--- a/.lessons/54 Slider Features/4 Slider- Creating image upload trait and handling image upload/1.pptx
+++ b/.lessons/54 Slider Features/4 Slider- Creating image upload trait and handling image upload/1.pptx
@@ -7,7 +7,20 @@
   <p:sldIdLst>
     <p:sldId id="413" r:id="rId2"/>
     <p:sldId id="414" r:id="rId3"/>
-    <p:sldId id="400" r:id="rId4"/>
+    <p:sldId id="415" r:id="rId4"/>
+    <p:sldId id="416" r:id="rId5"/>
+    <p:sldId id="417" r:id="rId6"/>
+    <p:sldId id="421" r:id="rId7"/>
+    <p:sldId id="422" r:id="rId8"/>
+    <p:sldId id="425" r:id="rId9"/>
+    <p:sldId id="423" r:id="rId10"/>
+    <p:sldId id="424" r:id="rId11"/>
+    <p:sldId id="400" r:id="rId12"/>
+    <p:sldId id="426" r:id="rId13"/>
+    <p:sldId id="427" r:id="rId14"/>
+    <p:sldId id="428" r:id="rId15"/>
+    <p:sldId id="429" r:id="rId16"/>
+    <p:sldId id="430" r:id="rId17"/>
   </p:sldIdLst>
   <p:sldSz cx="12192000" cy="6858000"/>
   <p:notesSz cx="6858000" cy="9144000"/>
@@ -261,7 +274,7 @@
           <a:p>
             <a:fld id="{3E102D2E-813C-461C-9963-687A650C48C0}" type="datetimeFigureOut">
               <a:rPr lang="en-US" smtClean="0"/>
-              <a:t>6/26/2025</a:t>
+              <a:t>8/5/2025</a:t>
             </a:fld>
             <a:endParaRPr lang="en-US"/>
           </a:p>
@@ -459,7 +472,7 @@
           <a:p>
             <a:fld id="{3E102D2E-813C-461C-9963-687A650C48C0}" type="datetimeFigureOut">
               <a:rPr lang="en-US" smtClean="0"/>
-              <a:t>6/26/2025</a:t>
+              <a:t>8/5/2025</a:t>
             </a:fld>
             <a:endParaRPr lang="en-US"/>
           </a:p>
@@ -667,7 +680,7 @@
           <a:p>
             <a:fld id="{3E102D2E-813C-461C-9963-687A650C48C0}" type="datetimeFigureOut">
               <a:rPr lang="en-US" smtClean="0"/>
-              <a:t>6/26/2025</a:t>
+              <a:t>8/5/2025</a:t>
             </a:fld>
             <a:endParaRPr lang="en-US"/>
           </a:p>
@@ -865,7 +878,7 @@
           <a:p>
             <a:fld id="{3E102D2E-813C-461C-9963-687A650C48C0}" type="datetimeFigureOut">
               <a:rPr lang="en-US" smtClean="0"/>
-              <a:t>6/26/2025</a:t>
+              <a:t>8/5/2025</a:t>
             </a:fld>
             <a:endParaRPr lang="en-US"/>
           </a:p>
@@ -1140,7 +1153,7 @@
           <a:p>
             <a:fld id="{3E102D2E-813C-461C-9963-687A650C48C0}" type="datetimeFigureOut">
               <a:rPr lang="en-US" smtClean="0"/>
-              <a:t>6/26/2025</a:t>
+              <a:t>8/5/2025</a:t>
             </a:fld>
             <a:endParaRPr lang="en-US"/>
           </a:p>
@@ -1405,7 +1418,7 @@
           <a:p>
             <a:fld id="{3E102D2E-813C-461C-9963-687A650C48C0}" type="datetimeFigureOut">
               <a:rPr lang="en-US" smtClean="0"/>
-              <a:t>6/26/2025</a:t>
+              <a:t>8/5/2025</a:t>
             </a:fld>
             <a:endParaRPr lang="en-US"/>
           </a:p>
@@ -1817,7 +1830,7 @@
           <a:p>
             <a:fld id="{3E102D2E-813C-461C-9963-687A650C48C0}" type="datetimeFigureOut">
               <a:rPr lang="en-US" smtClean="0"/>
-              <a:t>6/26/2025</a:t>
+              <a:t>8/5/2025</a:t>
             </a:fld>
             <a:endParaRPr lang="en-US"/>
           </a:p>
@@ -1958,7 +1971,7 @@
           <a:p>
             <a:fld id="{3E102D2E-813C-461C-9963-687A650C48C0}" type="datetimeFigureOut">
               <a:rPr lang="en-US" smtClean="0"/>
-              <a:t>6/26/2025</a:t>
+              <a:t>8/5/2025</a:t>
             </a:fld>
             <a:endParaRPr lang="en-US"/>
           </a:p>
@@ -2071,7 +2084,7 @@
           <a:p>
             <a:fld id="{3E102D2E-813C-461C-9963-687A650C48C0}" type="datetimeFigureOut">
               <a:rPr lang="en-US" smtClean="0"/>
-              <a:t>6/26/2025</a:t>
+              <a:t>8/5/2025</a:t>
             </a:fld>
             <a:endParaRPr lang="en-US"/>
           </a:p>
@@ -2382,7 +2395,7 @@
           <a:p>
             <a:fld id="{3E102D2E-813C-461C-9963-687A650C48C0}" type="datetimeFigureOut">
               <a:rPr lang="en-US" smtClean="0"/>
-              <a:t>6/26/2025</a:t>
+              <a:t>8/5/2025</a:t>
             </a:fld>
             <a:endParaRPr lang="en-US"/>
           </a:p>
@@ -2670,7 +2683,7 @@
           <a:p>
             <a:fld id="{3E102D2E-813C-461C-9963-687A650C48C0}" type="datetimeFigureOut">
               <a:rPr lang="en-US" smtClean="0"/>
-              <a:t>6/26/2025</a:t>
+              <a:t>8/5/2025</a:t>
             </a:fld>
             <a:endParaRPr lang="en-US"/>
           </a:p>
@@ -2911,7 +2924,7 @@
           <a:p>
             <a:fld id="{3E102D2E-813C-461C-9963-687A650C48C0}" type="datetimeFigureOut">
               <a:rPr lang="en-US" smtClean="0"/>
-              <a:t>6/26/2025</a:t>
+              <a:t>8/5/2025</a:t>
             </a:fld>
             <a:endParaRPr lang="en-US"/>
           </a:p>
@@ -3348,6 +3361,195 @@
         </p:nvSpPr>
         <p:spPr>
           <a:xfrm>
+            <a:off x="217714" y="107264"/>
+            <a:ext cx="11756571" cy="1555682"/>
+          </a:xfrm>
+          <a:prstGeom prst="rect">
+            <a:avLst/>
+          </a:prstGeom>
+          <a:noFill/>
+        </p:spPr>
+        <p:txBody>
+          <a:bodyPr wrap="square">
+            <a:spAutoFit/>
+          </a:bodyPr>
+          <a:lstStyle/>
+          <a:p>
+            <a:pPr>
+              <a:lnSpc>
+                <a:spcPct val="150000"/>
+              </a:lnSpc>
+              <a:buNone/>
+            </a:pPr>
+            <a:r>
+              <a:rPr lang="az-Latn-AZ" altLang="en-US" sz="1300" b="1">
+                <a:latin typeface="Arial" panose="020B0604020202020204" pitchFamily="34" charset="0"/>
+              </a:rPr>
+              <a:t>Şəkil</a:t>
+            </a:r>
+            <a:r>
+              <a:rPr lang="az-Latn-AZ" altLang="en-US" sz="1300">
+                <a:latin typeface="Arial" panose="020B0604020202020204" pitchFamily="34" charset="0"/>
+              </a:rPr>
+              <a:t> əlavə edə bilmək üçün, `</a:t>
+            </a:r>
+            <a:r>
+              <a:rPr lang="az-Latn-AZ" altLang="en-US" sz="1300" b="1">
+                <a:latin typeface="Arial" panose="020B0604020202020204" pitchFamily="34" charset="0"/>
+              </a:rPr>
+              <a:t>ProfileController</a:t>
+            </a:r>
+            <a:r>
+              <a:rPr lang="az-Latn-AZ" altLang="en-US" sz="1300">
+                <a:latin typeface="Arial" panose="020B0604020202020204" pitchFamily="34" charset="0"/>
+              </a:rPr>
+              <a:t>` faylındakı işarələnən kodu, əvvəldə etdiyimiz kimi, `</a:t>
+            </a:r>
+            <a:r>
+              <a:rPr lang="az-Latn-AZ" altLang="en-US" sz="1300" b="1">
+                <a:latin typeface="Arial" panose="020B0604020202020204" pitchFamily="34" charset="0"/>
+              </a:rPr>
+              <a:t>SliderController</a:t>
+            </a:r>
+            <a:r>
+              <a:rPr lang="az-Latn-AZ" altLang="en-US" sz="1300">
+                <a:latin typeface="Arial" panose="020B0604020202020204" pitchFamily="34" charset="0"/>
+              </a:rPr>
+              <a:t>` kontrollerinə daşıya bilərik. Sonra həmin kodun üzərində cüzi dəyişikliklər edəcəyik.</a:t>
+            </a:r>
+          </a:p>
+          <a:p>
+            <a:pPr>
+              <a:lnSpc>
+                <a:spcPct val="150000"/>
+              </a:lnSpc>
+              <a:buNone/>
+            </a:pPr>
+            <a:endParaRPr lang="az-Latn-AZ" altLang="en-US" sz="1300">
+              <a:latin typeface="Arial" panose="020B0604020202020204" pitchFamily="34" charset="0"/>
+            </a:endParaRPr>
+          </a:p>
+          <a:p>
+            <a:pPr>
+              <a:lnSpc>
+                <a:spcPct val="150000"/>
+              </a:lnSpc>
+              <a:buNone/>
+            </a:pPr>
+            <a:r>
+              <a:rPr lang="az-Latn-AZ" altLang="en-US" sz="1300">
+                <a:latin typeface="Arial" panose="020B0604020202020204" pitchFamily="34" charset="0"/>
+              </a:rPr>
+              <a:t>Ancaq bir neçə kontrollerdə eyni kodu yazaraq fərqli cədvəllərə şəkil əlavə etmə strukturumuz varsa, onda hər dəfə eyni kodu təkrar-təkrar yazmaq məntiqsiz olacaqdır. Bu təkrarı azaltmaq üçün </a:t>
+            </a:r>
+            <a:r>
+              <a:rPr lang="az-Latn-AZ" altLang="en-US" sz="1300" b="1">
+                <a:solidFill>
+                  <a:srgbClr val="FF0000"/>
+                </a:solidFill>
+                <a:latin typeface="Arial" panose="020B0604020202020204" pitchFamily="34" charset="0"/>
+              </a:rPr>
+              <a:t>TRAİTS</a:t>
+            </a:r>
+            <a:r>
+              <a:rPr lang="az-Latn-AZ" altLang="en-US" sz="1300">
+                <a:latin typeface="Arial" panose="020B0604020202020204" pitchFamily="34" charset="0"/>
+              </a:rPr>
+              <a:t> yarada bilərik.</a:t>
+            </a:r>
+            <a:endParaRPr kumimoji="0" lang="en-US" altLang="en-US" sz="1300" b="0" i="0" u="none" strike="noStrike" cap="none" normalizeH="0" baseline="0">
+              <a:ln>
+                <a:noFill/>
+              </a:ln>
+              <a:solidFill>
+                <a:schemeClr val="tx1"/>
+              </a:solidFill>
+              <a:effectLst/>
+              <a:latin typeface="Arial" panose="020B0604020202020204" pitchFamily="34" charset="0"/>
+            </a:endParaRPr>
+          </a:p>
+        </p:txBody>
+      </p:sp>
+      <p:pic>
+        <p:nvPicPr>
+          <p:cNvPr id="4" name="Picture 3">
+            <a:extLst>
+              <a:ext uri="{FF2B5EF4-FFF2-40B4-BE49-F238E27FC236}">
+                <a16:creationId xmlns:a16="http://schemas.microsoft.com/office/drawing/2014/main" id="{1474C81B-B3D9-6F47-864F-C7CAFA7D48F4}"/>
+              </a:ext>
+            </a:extLst>
+          </p:cNvPr>
+          <p:cNvPicPr>
+            <a:picLocks noChangeAspect="1"/>
+          </p:cNvPicPr>
+          <p:nvPr/>
+        </p:nvPicPr>
+        <p:blipFill>
+          <a:blip r:embed="rId2"/>
+          <a:stretch>
+            <a:fillRect/>
+          </a:stretch>
+        </p:blipFill>
+        <p:spPr>
+          <a:xfrm>
+            <a:off x="2586182" y="1870953"/>
+            <a:ext cx="9605818" cy="4987046"/>
+          </a:xfrm>
+          <a:prstGeom prst="rect">
+            <a:avLst/>
+          </a:prstGeom>
+        </p:spPr>
+      </p:pic>
+    </p:spTree>
+    <p:extLst>
+      <p:ext uri="{BB962C8B-B14F-4D97-AF65-F5344CB8AC3E}">
+        <p14:creationId xmlns:p14="http://schemas.microsoft.com/office/powerpoint/2010/main" val="3863838039"/>
+      </p:ext>
+    </p:extLst>
+  </p:cSld>
+  <p:clrMapOvr>
+    <a:masterClrMapping/>
+  </p:clrMapOvr>
+</p:sld>
+</file>
+
+<file path=ppt/slides/slide10.xml><?xml version="1.0" encoding="utf-8"?>
+<p:sld xmlns:a="http://schemas.openxmlformats.org/drawingml/2006/main" xmlns:r="http://schemas.openxmlformats.org/officeDocument/2006/relationships" xmlns:p="http://schemas.openxmlformats.org/presentationml/2006/main">
+  <p:cSld>
+    <p:spTree>
+      <p:nvGrpSpPr>
+        <p:cNvPr id="1" name="">
+          <a:extLst>
+            <a:ext uri="{FF2B5EF4-FFF2-40B4-BE49-F238E27FC236}">
+              <a16:creationId xmlns:a16="http://schemas.microsoft.com/office/drawing/2014/main" id="{3E547454-819C-403C-FC6C-CD8A51C57D3E}"/>
+            </a:ext>
+          </a:extLst>
+        </p:cNvPr>
+        <p:cNvGrpSpPr/>
+        <p:nvPr/>
+      </p:nvGrpSpPr>
+      <p:grpSpPr>
+        <a:xfrm>
+          <a:off x="0" y="0"/>
+          <a:ext cx="0" cy="0"/>
+          <a:chOff x="0" y="0"/>
+          <a:chExt cx="0" cy="0"/>
+        </a:xfrm>
+      </p:grpSpPr>
+      <p:sp>
+        <p:nvSpPr>
+          <p:cNvPr id="3" name="TextBox 2">
+            <a:extLst>
+              <a:ext uri="{FF2B5EF4-FFF2-40B4-BE49-F238E27FC236}">
+                <a16:creationId xmlns:a16="http://schemas.microsoft.com/office/drawing/2014/main" id="{DF4B44B2-27F7-1EA2-F87B-88C3030DB54B}"/>
+              </a:ext>
+            </a:extLst>
+          </p:cNvPr>
+          <p:cNvSpPr txBox="1"/>
+          <p:nvPr/>
+        </p:nvSpPr>
+        <p:spPr>
+          <a:xfrm>
             <a:off x="217714" y="255046"/>
             <a:ext cx="11756571" cy="355354"/>
           </a:xfrm>
@@ -3369,6 +3571,2167 @@
               <a:buNone/>
             </a:pPr>
             <a:r>
+              <a:rPr lang="az-Latn-AZ" altLang="en-US" sz="1300">
+                <a:latin typeface="Arial" panose="020B0604020202020204" pitchFamily="34" charset="0"/>
+              </a:rPr>
+              <a:t>Nəticə.</a:t>
+            </a:r>
+            <a:endParaRPr kumimoji="0" lang="en-US" altLang="en-US" sz="1300" b="0" i="0" u="none" strike="noStrike" cap="none" normalizeH="0" baseline="0">
+              <a:ln>
+                <a:noFill/>
+              </a:ln>
+              <a:solidFill>
+                <a:schemeClr val="tx1"/>
+              </a:solidFill>
+              <a:effectLst/>
+              <a:latin typeface="Arial" panose="020B0604020202020204" pitchFamily="34" charset="0"/>
+            </a:endParaRPr>
+          </a:p>
+        </p:txBody>
+      </p:sp>
+      <p:pic>
+        <p:nvPicPr>
+          <p:cNvPr id="4" name="Picture 3">
+            <a:extLst>
+              <a:ext uri="{FF2B5EF4-FFF2-40B4-BE49-F238E27FC236}">
+                <a16:creationId xmlns:a16="http://schemas.microsoft.com/office/drawing/2014/main" id="{40B77F7B-A144-EC92-B83F-12F6C3A41AA4}"/>
+              </a:ext>
+            </a:extLst>
+          </p:cNvPr>
+          <p:cNvPicPr>
+            <a:picLocks noChangeAspect="1"/>
+          </p:cNvPicPr>
+          <p:nvPr/>
+        </p:nvPicPr>
+        <p:blipFill>
+          <a:blip r:embed="rId2"/>
+          <a:stretch>
+            <a:fillRect/>
+          </a:stretch>
+        </p:blipFill>
+        <p:spPr>
+          <a:xfrm>
+            <a:off x="0" y="2470192"/>
+            <a:ext cx="12192000" cy="1917616"/>
+          </a:xfrm>
+          <a:prstGeom prst="rect">
+            <a:avLst/>
+          </a:prstGeom>
+          <a:ln w="38100" cap="sq">
+            <a:solidFill>
+              <a:srgbClr val="000000"/>
+            </a:solidFill>
+            <a:prstDash val="solid"/>
+            <a:miter lim="800000"/>
+          </a:ln>
+          <a:effectLst>
+            <a:outerShdw blurRad="50800" dist="38100" dir="2700000" algn="tl" rotWithShape="0">
+              <a:srgbClr val="000000">
+                <a:alpha val="43000"/>
+              </a:srgbClr>
+            </a:outerShdw>
+          </a:effectLst>
+        </p:spPr>
+      </p:pic>
+    </p:spTree>
+    <p:extLst>
+      <p:ext uri="{BB962C8B-B14F-4D97-AF65-F5344CB8AC3E}">
+        <p14:creationId xmlns:p14="http://schemas.microsoft.com/office/powerpoint/2010/main" val="1309734020"/>
+      </p:ext>
+    </p:extLst>
+  </p:cSld>
+  <p:clrMapOvr>
+    <a:masterClrMapping/>
+  </p:clrMapOvr>
+</p:sld>
+</file>
+
+<file path=ppt/slides/slide11.xml><?xml version="1.0" encoding="utf-8"?>
+<p:sld xmlns:a="http://schemas.openxmlformats.org/drawingml/2006/main" xmlns:r="http://schemas.openxmlformats.org/officeDocument/2006/relationships" xmlns:p="http://schemas.openxmlformats.org/presentationml/2006/main">
+  <p:cSld>
+    <p:spTree>
+      <p:nvGrpSpPr>
+        <p:cNvPr id="1" name="">
+          <a:extLst>
+            <a:ext uri="{FF2B5EF4-FFF2-40B4-BE49-F238E27FC236}">
+              <a16:creationId xmlns:a16="http://schemas.microsoft.com/office/drawing/2014/main" id="{ECE25D7D-A080-F22B-7E8D-36EC827289A1}"/>
+            </a:ext>
+          </a:extLst>
+        </p:cNvPr>
+        <p:cNvGrpSpPr/>
+        <p:nvPr/>
+      </p:nvGrpSpPr>
+      <p:grpSpPr>
+        <a:xfrm>
+          <a:off x="0" y="0"/>
+          <a:ext cx="0" cy="0"/>
+          <a:chOff x="0" y="0"/>
+          <a:chExt cx="0" cy="0"/>
+        </a:xfrm>
+      </p:grpSpPr>
+      <p:sp>
+        <p:nvSpPr>
+          <p:cNvPr id="3" name="TextBox 2">
+            <a:extLst>
+              <a:ext uri="{FF2B5EF4-FFF2-40B4-BE49-F238E27FC236}">
+                <a16:creationId xmlns:a16="http://schemas.microsoft.com/office/drawing/2014/main" id="{E33F16A3-A6E8-401E-847B-09570DC6E4CB}"/>
+              </a:ext>
+            </a:extLst>
+          </p:cNvPr>
+          <p:cNvSpPr txBox="1"/>
+          <p:nvPr/>
+        </p:nvSpPr>
+        <p:spPr>
+          <a:xfrm>
+            <a:off x="217714" y="255046"/>
+            <a:ext cx="11756571" cy="5756832"/>
+          </a:xfrm>
+          <a:prstGeom prst="rect">
+            <a:avLst/>
+          </a:prstGeom>
+          <a:noFill/>
+        </p:spPr>
+        <p:txBody>
+          <a:bodyPr wrap="square">
+            <a:spAutoFit/>
+          </a:bodyPr>
+          <a:lstStyle/>
+          <a:p>
+            <a:pPr>
+              <a:lnSpc>
+                <a:spcPct val="150000"/>
+              </a:lnSpc>
+              <a:buNone/>
+            </a:pPr>
+            <a:r>
+              <a:rPr lang="az-Latn-AZ" altLang="en-US" sz="1300">
+                <a:latin typeface="Arial" panose="020B0604020202020204" pitchFamily="34" charset="0"/>
+              </a:rPr>
+              <a:t>Burda yazılanları etməyəcəyik. Sadəcə bilgimiz olsun deyə qeyd edirəm ki, bəlkə kimsə üçün lazım olar: </a:t>
+            </a:r>
+          </a:p>
+          <a:p>
+            <a:pPr>
+              <a:lnSpc>
+                <a:spcPct val="150000"/>
+              </a:lnSpc>
+              <a:buNone/>
+            </a:pPr>
+            <a:endParaRPr lang="az-Latn-AZ" altLang="en-US" sz="1300" b="1">
+              <a:latin typeface="Arial" panose="020B0604020202020204" pitchFamily="34" charset="0"/>
+            </a:endParaRPr>
+          </a:p>
+          <a:p>
+            <a:pPr>
+              <a:lnSpc>
+                <a:spcPct val="150000"/>
+              </a:lnSpc>
+              <a:buNone/>
+            </a:pPr>
+            <a:r>
+              <a:rPr lang="en-US" altLang="en-US" sz="1300" b="1">
+                <a:latin typeface="Arial" panose="020B0604020202020204" pitchFamily="34" charset="0"/>
+              </a:rPr>
+              <a:t>Laravel</a:t>
+            </a:r>
+            <a:r>
+              <a:rPr lang="en-US" altLang="en-US" sz="1300">
+                <a:latin typeface="Arial" panose="020B0604020202020204" pitchFamily="34" charset="0"/>
+              </a:rPr>
+              <a:t> və </a:t>
+            </a:r>
+            <a:r>
+              <a:rPr lang="en-US" altLang="en-US" sz="1300" b="1">
+                <a:latin typeface="Arial" panose="020B0604020202020204" pitchFamily="34" charset="0"/>
+              </a:rPr>
+              <a:t>Intervention Image </a:t>
+            </a:r>
+            <a:r>
+              <a:rPr lang="en-US" altLang="en-US" sz="1300">
+                <a:latin typeface="Arial" panose="020B0604020202020204" pitchFamily="34" charset="0"/>
+              </a:rPr>
+              <a:t>paketi ilə şəkil yükləmə</a:t>
+            </a:r>
+            <a:r>
+              <a:rPr lang="az-Latn-AZ" altLang="en-US" sz="1300">
+                <a:latin typeface="Arial" panose="020B0604020202020204" pitchFamily="34" charset="0"/>
+              </a:rPr>
+              <a:t>. Bu zaman, a</a:t>
+            </a:r>
+            <a:r>
+              <a:rPr lang="en-US" altLang="en-US" sz="1300">
+                <a:latin typeface="Arial" panose="020B0604020202020204" pitchFamily="34" charset="0"/>
+              </a:rPr>
+              <a:t>vtomatik olaraq:</a:t>
+            </a:r>
+          </a:p>
+          <a:p>
+            <a:pPr marL="742950" lvl="1" indent="-285750">
+              <a:lnSpc>
+                <a:spcPct val="150000"/>
+              </a:lnSpc>
+              <a:buFont typeface="Wingdings" panose="05000000000000000000" pitchFamily="2" charset="2"/>
+              <a:buChar char="q"/>
+            </a:pPr>
+            <a:r>
+              <a:rPr lang="en-US" altLang="en-US" sz="1300">
+                <a:latin typeface="Arial" panose="020B0604020202020204" pitchFamily="34" charset="0"/>
+              </a:rPr>
+              <a:t>Boyutunu dəyişmək (resize)</a:t>
+            </a:r>
+          </a:p>
+          <a:p>
+            <a:pPr marL="742950" lvl="1" indent="-285750">
+              <a:lnSpc>
+                <a:spcPct val="150000"/>
+              </a:lnSpc>
+              <a:buFont typeface="Wingdings" panose="05000000000000000000" pitchFamily="2" charset="2"/>
+              <a:buChar char="q"/>
+            </a:pPr>
+            <a:r>
+              <a:rPr lang="en-US" altLang="en-US" sz="1300">
+                <a:latin typeface="Arial" panose="020B0604020202020204" pitchFamily="34" charset="0"/>
+              </a:rPr>
+              <a:t>Watermark əlavə etmək</a:t>
+            </a:r>
+          </a:p>
+          <a:p>
+            <a:pPr marL="742950" lvl="1" indent="-285750">
+              <a:lnSpc>
+                <a:spcPct val="150000"/>
+              </a:lnSpc>
+              <a:buFont typeface="Wingdings" panose="05000000000000000000" pitchFamily="2" charset="2"/>
+              <a:buChar char="q"/>
+            </a:pPr>
+            <a:r>
+              <a:rPr lang="en-US" altLang="en-US" sz="1300">
+                <a:latin typeface="Arial" panose="020B0604020202020204" pitchFamily="34" charset="0"/>
+              </a:rPr>
+              <a:t>Thumbnail (kiçik versiya) yaratmaq</a:t>
+            </a:r>
+          </a:p>
+          <a:p>
+            <a:pPr marL="742950" lvl="1" indent="-285750">
+              <a:lnSpc>
+                <a:spcPct val="150000"/>
+              </a:lnSpc>
+              <a:buFont typeface="Wingdings" panose="05000000000000000000" pitchFamily="2" charset="2"/>
+              <a:buChar char="q"/>
+            </a:pPr>
+            <a:r>
+              <a:rPr lang="en-US" altLang="en-US" sz="1300">
+                <a:latin typeface="Arial" panose="020B0604020202020204" pitchFamily="34" charset="0"/>
+              </a:rPr>
+              <a:t>Optimallaşdırmaq və .webp olaraq saxlamaq</a:t>
+            </a:r>
+            <a:endParaRPr lang="az-Latn-AZ" altLang="en-US" sz="1300">
+              <a:latin typeface="Arial" panose="020B0604020202020204" pitchFamily="34" charset="0"/>
+            </a:endParaRPr>
+          </a:p>
+          <a:p>
+            <a:pPr>
+              <a:lnSpc>
+                <a:spcPct val="150000"/>
+              </a:lnSpc>
+              <a:buNone/>
+            </a:pPr>
+            <a:endParaRPr kumimoji="0" lang="az-Latn-AZ" altLang="en-US" sz="1300" b="0" i="0" u="none" strike="noStrike" cap="none" normalizeH="0" baseline="0">
+              <a:ln>
+                <a:noFill/>
+              </a:ln>
+              <a:solidFill>
+                <a:schemeClr val="tx1"/>
+              </a:solidFill>
+              <a:effectLst/>
+              <a:latin typeface="Arial" panose="020B0604020202020204" pitchFamily="34" charset="0"/>
+            </a:endParaRPr>
+          </a:p>
+          <a:p>
+            <a:pPr>
+              <a:lnSpc>
+                <a:spcPct val="150000"/>
+              </a:lnSpc>
+              <a:buNone/>
+            </a:pPr>
+            <a:r>
+              <a:rPr lang="en-US" altLang="en-US" sz="1300">
+                <a:latin typeface="Arial" panose="020B0604020202020204" pitchFamily="34" charset="0"/>
+              </a:rPr>
+              <a:t>Əvvəlcə: Intervention Image Qurulması</a:t>
+            </a:r>
+            <a:r>
+              <a:rPr lang="az-Latn-AZ" altLang="en-US" sz="1300">
+                <a:latin typeface="Arial" panose="020B0604020202020204" pitchFamily="34" charset="0"/>
+              </a:rPr>
+              <a:t>: Əgər Laravel 10/11 istifadə edirsinizsə, config/app.php faylında heç nə dəyişməyə ehtiyac yoxdur.</a:t>
+            </a:r>
+          </a:p>
+          <a:p>
+            <a:pPr>
+              <a:lnSpc>
+                <a:spcPct val="150000"/>
+              </a:lnSpc>
+              <a:buNone/>
+            </a:pPr>
+            <a:endParaRPr kumimoji="0" lang="az-Latn-AZ" altLang="en-US" sz="1300" b="0" i="0" u="none" strike="noStrike" cap="none" normalizeH="0" baseline="0">
+              <a:ln>
+                <a:noFill/>
+              </a:ln>
+              <a:solidFill>
+                <a:schemeClr val="tx1"/>
+              </a:solidFill>
+              <a:effectLst/>
+              <a:latin typeface="Arial" panose="020B0604020202020204" pitchFamily="34" charset="0"/>
+            </a:endParaRPr>
+          </a:p>
+          <a:p>
+            <a:pPr>
+              <a:lnSpc>
+                <a:spcPct val="150000"/>
+              </a:lnSpc>
+              <a:buNone/>
+            </a:pPr>
+            <a:endParaRPr lang="az-Latn-AZ" altLang="en-US" sz="1300">
+              <a:latin typeface="Arial" panose="020B0604020202020204" pitchFamily="34" charset="0"/>
+            </a:endParaRPr>
+          </a:p>
+          <a:p>
+            <a:pPr>
+              <a:lnSpc>
+                <a:spcPct val="150000"/>
+              </a:lnSpc>
+              <a:buNone/>
+            </a:pPr>
+            <a:endParaRPr kumimoji="0" lang="az-Latn-AZ" altLang="en-US" sz="1300" b="0" i="0" u="none" strike="noStrike" cap="none" normalizeH="0" baseline="0">
+              <a:ln>
+                <a:noFill/>
+              </a:ln>
+              <a:solidFill>
+                <a:schemeClr val="tx1"/>
+              </a:solidFill>
+              <a:effectLst/>
+              <a:latin typeface="Arial" panose="020B0604020202020204" pitchFamily="34" charset="0"/>
+            </a:endParaRPr>
+          </a:p>
+          <a:p>
+            <a:pPr>
+              <a:lnSpc>
+                <a:spcPct val="150000"/>
+              </a:lnSpc>
+              <a:buNone/>
+            </a:pPr>
+            <a:endParaRPr lang="az-Latn-AZ" altLang="en-US" sz="1300">
+              <a:latin typeface="Arial" panose="020B0604020202020204" pitchFamily="34" charset="0"/>
+            </a:endParaRPr>
+          </a:p>
+          <a:p>
+            <a:pPr>
+              <a:lnSpc>
+                <a:spcPct val="150000"/>
+              </a:lnSpc>
+              <a:buNone/>
+            </a:pPr>
+            <a:endParaRPr kumimoji="0" lang="az-Latn-AZ" altLang="en-US" sz="1300" b="0" i="0" u="none" strike="noStrike" cap="none" normalizeH="0" baseline="0">
+              <a:ln>
+                <a:noFill/>
+              </a:ln>
+              <a:solidFill>
+                <a:schemeClr val="tx1"/>
+              </a:solidFill>
+              <a:effectLst/>
+              <a:latin typeface="Arial" panose="020B0604020202020204" pitchFamily="34" charset="0"/>
+            </a:endParaRPr>
+          </a:p>
+          <a:p>
+            <a:pPr>
+              <a:lnSpc>
+                <a:spcPct val="150000"/>
+              </a:lnSpc>
+              <a:buNone/>
+            </a:pPr>
+            <a:endParaRPr lang="az-Latn-AZ" altLang="en-US" sz="1300">
+              <a:latin typeface="Arial" panose="020B0604020202020204" pitchFamily="34" charset="0"/>
+            </a:endParaRPr>
+          </a:p>
+          <a:p>
+            <a:pPr>
+              <a:lnSpc>
+                <a:spcPct val="150000"/>
+              </a:lnSpc>
+              <a:buNone/>
+            </a:pPr>
+            <a:endParaRPr kumimoji="0" lang="az-Latn-AZ" altLang="en-US" sz="1300" b="0" i="0" u="none" strike="noStrike" cap="none" normalizeH="0" baseline="0">
+              <a:ln>
+                <a:noFill/>
+              </a:ln>
+              <a:solidFill>
+                <a:schemeClr val="tx1"/>
+              </a:solidFill>
+              <a:effectLst/>
+              <a:latin typeface="Arial" panose="020B0604020202020204" pitchFamily="34" charset="0"/>
+            </a:endParaRPr>
+          </a:p>
+          <a:p>
+            <a:pPr>
+              <a:lnSpc>
+                <a:spcPct val="150000"/>
+              </a:lnSpc>
+              <a:buNone/>
+            </a:pPr>
+            <a:endParaRPr lang="az-Latn-AZ" altLang="en-US" sz="1300">
+              <a:latin typeface="Arial" panose="020B0604020202020204" pitchFamily="34" charset="0"/>
+            </a:endParaRPr>
+          </a:p>
+          <a:p>
+            <a:pPr>
+              <a:lnSpc>
+                <a:spcPct val="150000"/>
+              </a:lnSpc>
+              <a:buNone/>
+            </a:pPr>
+            <a:r>
+              <a:rPr lang="en-US" altLang="en-US" sz="1300" b="1">
+                <a:latin typeface="Arial" panose="020B0604020202020204" pitchFamily="34" charset="0"/>
+              </a:rPr>
+              <a:t>ImageUploadTrait.php </a:t>
+            </a:r>
+            <a:r>
+              <a:rPr lang="en-US" altLang="en-US" sz="1300">
+                <a:latin typeface="Arial" panose="020B0604020202020204" pitchFamily="34" charset="0"/>
+              </a:rPr>
+              <a:t>Faylını </a:t>
+            </a:r>
+            <a:r>
+              <a:rPr lang="az-Latn-AZ" altLang="en-US" sz="1300">
+                <a:latin typeface="Arial" panose="020B0604020202020204" pitchFamily="34" charset="0"/>
+              </a:rPr>
+              <a:t>Növbəti slayddakı</a:t>
+            </a:r>
+            <a:r>
+              <a:rPr lang="en-US" altLang="en-US" sz="1300">
+                <a:latin typeface="Arial" panose="020B0604020202020204" pitchFamily="34" charset="0"/>
+              </a:rPr>
+              <a:t> Kimi Təkmilləşdir</a:t>
+            </a:r>
+            <a:r>
+              <a:rPr lang="az-Latn-AZ" altLang="en-US" sz="1300">
+                <a:latin typeface="Arial" panose="020B0604020202020204" pitchFamily="34" charset="0"/>
+              </a:rPr>
+              <a:t>mək lazımdır. Bu kodları tək-tək oxumaq lazımdır. Çünki kodları paketin yaxud laravelin versiyasından asılı olaraq dəyişdirmək məcburiyyətində qalaq.</a:t>
+            </a:r>
+            <a:endParaRPr kumimoji="0" lang="en-US" altLang="en-US" sz="1300" b="0" i="0" u="none" strike="noStrike" cap="none" normalizeH="0" baseline="0">
+              <a:ln>
+                <a:noFill/>
+              </a:ln>
+              <a:solidFill>
+                <a:schemeClr val="tx1"/>
+              </a:solidFill>
+              <a:effectLst/>
+              <a:latin typeface="Arial" panose="020B0604020202020204" pitchFamily="34" charset="0"/>
+            </a:endParaRPr>
+          </a:p>
+        </p:txBody>
+      </p:sp>
+      <p:pic>
+        <p:nvPicPr>
+          <p:cNvPr id="4" name="Picture 3">
+            <a:extLst>
+              <a:ext uri="{FF2B5EF4-FFF2-40B4-BE49-F238E27FC236}">
+                <a16:creationId xmlns:a16="http://schemas.microsoft.com/office/drawing/2014/main" id="{BA7B059E-49C1-1ED1-72B6-6875348700A2}"/>
+              </a:ext>
+            </a:extLst>
+          </p:cNvPr>
+          <p:cNvPicPr>
+            <a:picLocks noChangeAspect="1"/>
+          </p:cNvPicPr>
+          <p:nvPr/>
+        </p:nvPicPr>
+        <p:blipFill>
+          <a:blip r:embed="rId2"/>
+          <a:stretch>
+            <a:fillRect/>
+          </a:stretch>
+        </p:blipFill>
+        <p:spPr>
+          <a:xfrm>
+            <a:off x="217714" y="3050312"/>
+            <a:ext cx="2953162" cy="381053"/>
+          </a:xfrm>
+          <a:prstGeom prst="rect">
+            <a:avLst/>
+          </a:prstGeom>
+        </p:spPr>
+      </p:pic>
+    </p:spTree>
+    <p:extLst>
+      <p:ext uri="{BB962C8B-B14F-4D97-AF65-F5344CB8AC3E}">
+        <p14:creationId xmlns:p14="http://schemas.microsoft.com/office/powerpoint/2010/main" val="3095838342"/>
+      </p:ext>
+    </p:extLst>
+  </p:cSld>
+  <p:clrMapOvr>
+    <a:masterClrMapping/>
+  </p:clrMapOvr>
+</p:sld>
+</file>
+
+<file path=ppt/slides/slide12.xml><?xml version="1.0" encoding="utf-8"?>
+<p:sld xmlns:a="http://schemas.openxmlformats.org/drawingml/2006/main" xmlns:r="http://schemas.openxmlformats.org/officeDocument/2006/relationships" xmlns:p="http://schemas.openxmlformats.org/presentationml/2006/main">
+  <p:cSld>
+    <p:spTree>
+      <p:nvGrpSpPr>
+        <p:cNvPr id="1" name="">
+          <a:extLst>
+            <a:ext uri="{FF2B5EF4-FFF2-40B4-BE49-F238E27FC236}">
+              <a16:creationId xmlns:a16="http://schemas.microsoft.com/office/drawing/2014/main" id="{7BD0E366-F38C-F885-9078-BAC6E7A38508}"/>
+            </a:ext>
+          </a:extLst>
+        </p:cNvPr>
+        <p:cNvGrpSpPr/>
+        <p:nvPr/>
+      </p:nvGrpSpPr>
+      <p:grpSpPr>
+        <a:xfrm>
+          <a:off x="0" y="0"/>
+          <a:ext cx="0" cy="0"/>
+          <a:chOff x="0" y="0"/>
+          <a:chExt cx="0" cy="0"/>
+        </a:xfrm>
+      </p:grpSpPr>
+      <p:sp>
+        <p:nvSpPr>
+          <p:cNvPr id="3" name="TextBox 2">
+            <a:extLst>
+              <a:ext uri="{FF2B5EF4-FFF2-40B4-BE49-F238E27FC236}">
+                <a16:creationId xmlns:a16="http://schemas.microsoft.com/office/drawing/2014/main" id="{A66456D6-215C-AC5A-E1E3-9B684D605369}"/>
+              </a:ext>
+            </a:extLst>
+          </p:cNvPr>
+          <p:cNvSpPr txBox="1"/>
+          <p:nvPr/>
+        </p:nvSpPr>
+        <p:spPr>
+          <a:xfrm>
+            <a:off x="217714" y="295353"/>
+            <a:ext cx="11756571" cy="6267293"/>
+          </a:xfrm>
+          <a:prstGeom prst="rect">
+            <a:avLst/>
+          </a:prstGeom>
+          <a:noFill/>
+        </p:spPr>
+        <p:txBody>
+          <a:bodyPr wrap="square">
+            <a:spAutoFit/>
+          </a:bodyPr>
+          <a:lstStyle/>
+          <a:p>
+            <a:pPr>
+              <a:lnSpc>
+                <a:spcPct val="150000"/>
+              </a:lnSpc>
+              <a:buNone/>
+            </a:pPr>
+            <a:r>
+              <a:rPr lang="en-US" altLang="en-US" sz="400">
+                <a:latin typeface="Arial" panose="020B0604020202020204" pitchFamily="34" charset="0"/>
+              </a:rPr>
+              <a:t>use Intervention\Image\Facades\Image;</a:t>
+            </a:r>
+          </a:p>
+          <a:p>
+            <a:pPr>
+              <a:lnSpc>
+                <a:spcPct val="150000"/>
+              </a:lnSpc>
+              <a:buNone/>
+            </a:pPr>
+            <a:r>
+              <a:rPr lang="en-US" altLang="en-US" sz="400">
+                <a:latin typeface="Arial" panose="020B0604020202020204" pitchFamily="34" charset="0"/>
+              </a:rPr>
+              <a:t>use Illuminate\Support\Str;</a:t>
+            </a:r>
+          </a:p>
+          <a:p>
+            <a:pPr>
+              <a:lnSpc>
+                <a:spcPct val="150000"/>
+              </a:lnSpc>
+              <a:buNone/>
+            </a:pPr>
+            <a:endParaRPr lang="en-US" altLang="en-US" sz="400">
+              <a:latin typeface="Arial" panose="020B0604020202020204" pitchFamily="34" charset="0"/>
+            </a:endParaRPr>
+          </a:p>
+          <a:p>
+            <a:pPr>
+              <a:lnSpc>
+                <a:spcPct val="150000"/>
+              </a:lnSpc>
+              <a:buNone/>
+            </a:pPr>
+            <a:r>
+              <a:rPr lang="en-US" altLang="en-US" sz="400">
+                <a:latin typeface="Arial" panose="020B0604020202020204" pitchFamily="34" charset="0"/>
+              </a:rPr>
+              <a:t>trait ImageUploadTrait {</a:t>
+            </a:r>
+          </a:p>
+          <a:p>
+            <a:pPr>
+              <a:lnSpc>
+                <a:spcPct val="150000"/>
+              </a:lnSpc>
+              <a:buNone/>
+            </a:pPr>
+            <a:endParaRPr lang="en-US" altLang="en-US" sz="400">
+              <a:latin typeface="Arial" panose="020B0604020202020204" pitchFamily="34" charset="0"/>
+            </a:endParaRPr>
+          </a:p>
+          <a:p>
+            <a:pPr>
+              <a:lnSpc>
+                <a:spcPct val="150000"/>
+              </a:lnSpc>
+              <a:buNone/>
+            </a:pPr>
+            <a:r>
+              <a:rPr lang="en-US" altLang="en-US" sz="400">
+                <a:latin typeface="Arial" panose="020B0604020202020204" pitchFamily="34" charset="0"/>
+              </a:rPr>
+              <a:t>    public function uploadImage(Request $request, $inputName, $folder, $resize = [800, 600], $createThumbnail = false)</a:t>
+            </a:r>
+          </a:p>
+          <a:p>
+            <a:pPr>
+              <a:lnSpc>
+                <a:spcPct val="150000"/>
+              </a:lnSpc>
+              <a:buNone/>
+            </a:pPr>
+            <a:r>
+              <a:rPr lang="en-US" altLang="en-US" sz="400">
+                <a:latin typeface="Arial" panose="020B0604020202020204" pitchFamily="34" charset="0"/>
+              </a:rPr>
+              <a:t>    {</a:t>
+            </a:r>
+          </a:p>
+          <a:p>
+            <a:pPr>
+              <a:lnSpc>
+                <a:spcPct val="150000"/>
+              </a:lnSpc>
+              <a:buNone/>
+            </a:pPr>
+            <a:r>
+              <a:rPr lang="en-US" altLang="en-US" sz="400">
+                <a:latin typeface="Arial" panose="020B0604020202020204" pitchFamily="34" charset="0"/>
+              </a:rPr>
+              <a:t>        if ($request-&gt;hasFile($inputName)) {</a:t>
+            </a:r>
+          </a:p>
+          <a:p>
+            <a:pPr>
+              <a:lnSpc>
+                <a:spcPct val="150000"/>
+              </a:lnSpc>
+              <a:buNone/>
+            </a:pPr>
+            <a:endParaRPr lang="en-US" altLang="en-US" sz="400">
+              <a:latin typeface="Arial" panose="020B0604020202020204" pitchFamily="34" charset="0"/>
+            </a:endParaRPr>
+          </a:p>
+          <a:p>
+            <a:pPr>
+              <a:lnSpc>
+                <a:spcPct val="150000"/>
+              </a:lnSpc>
+              <a:buNone/>
+            </a:pPr>
+            <a:r>
+              <a:rPr lang="en-US" altLang="en-US" sz="400">
+                <a:latin typeface="Arial" panose="020B0604020202020204" pitchFamily="34" charset="0"/>
+              </a:rPr>
+              <a:t>            $image = $request-&gt;file($inputName);</a:t>
+            </a:r>
+          </a:p>
+          <a:p>
+            <a:pPr>
+              <a:lnSpc>
+                <a:spcPct val="150000"/>
+              </a:lnSpc>
+              <a:buNone/>
+            </a:pPr>
+            <a:endParaRPr lang="en-US" altLang="en-US" sz="400">
+              <a:latin typeface="Arial" panose="020B0604020202020204" pitchFamily="34" charset="0"/>
+            </a:endParaRPr>
+          </a:p>
+          <a:p>
+            <a:pPr>
+              <a:lnSpc>
+                <a:spcPct val="150000"/>
+              </a:lnSpc>
+              <a:buNone/>
+            </a:pPr>
+            <a:r>
+              <a:rPr lang="en-US" altLang="en-US" sz="400">
+                <a:latin typeface="Arial" panose="020B0604020202020204" pitchFamily="34" charset="0"/>
+              </a:rPr>
+              <a:t>            $ext = strtolower($image-&gt;getClientOriginalExtension());</a:t>
+            </a:r>
+          </a:p>
+          <a:p>
+            <a:pPr>
+              <a:lnSpc>
+                <a:spcPct val="150000"/>
+              </a:lnSpc>
+              <a:buNone/>
+            </a:pPr>
+            <a:r>
+              <a:rPr lang="en-US" altLang="en-US" sz="400">
+                <a:latin typeface="Arial" panose="020B0604020202020204" pitchFamily="34" charset="0"/>
+              </a:rPr>
+              <a:t>            $allowed = ['jpg', 'jpeg', 'png', 'webp'];</a:t>
+            </a:r>
+          </a:p>
+          <a:p>
+            <a:pPr>
+              <a:lnSpc>
+                <a:spcPct val="150000"/>
+              </a:lnSpc>
+              <a:buNone/>
+            </a:pPr>
+            <a:endParaRPr lang="en-US" altLang="en-US" sz="400">
+              <a:latin typeface="Arial" panose="020B0604020202020204" pitchFamily="34" charset="0"/>
+            </a:endParaRPr>
+          </a:p>
+          <a:p>
+            <a:pPr>
+              <a:lnSpc>
+                <a:spcPct val="150000"/>
+              </a:lnSpc>
+              <a:buNone/>
+            </a:pPr>
+            <a:r>
+              <a:rPr lang="en-US" altLang="en-US" sz="400">
+                <a:latin typeface="Arial" panose="020B0604020202020204" pitchFamily="34" charset="0"/>
+              </a:rPr>
+              <a:t>            if (!in_array($ext, $allowed)) {</a:t>
+            </a:r>
+          </a:p>
+          <a:p>
+            <a:pPr>
+              <a:lnSpc>
+                <a:spcPct val="150000"/>
+              </a:lnSpc>
+              <a:buNone/>
+            </a:pPr>
+            <a:r>
+              <a:rPr lang="en-US" altLang="en-US" sz="400">
+                <a:latin typeface="Arial" panose="020B0604020202020204" pitchFamily="34" charset="0"/>
+              </a:rPr>
+              <a:t>                abort(400, 'Unsupported image type');</a:t>
+            </a:r>
+          </a:p>
+          <a:p>
+            <a:pPr>
+              <a:lnSpc>
+                <a:spcPct val="150000"/>
+              </a:lnSpc>
+              <a:buNone/>
+            </a:pPr>
+            <a:r>
+              <a:rPr lang="en-US" altLang="en-US" sz="400">
+                <a:latin typeface="Arial" panose="020B0604020202020204" pitchFamily="34" charset="0"/>
+              </a:rPr>
+              <a:t>            }</a:t>
+            </a:r>
+          </a:p>
+          <a:p>
+            <a:pPr>
+              <a:lnSpc>
+                <a:spcPct val="150000"/>
+              </a:lnSpc>
+              <a:buNone/>
+            </a:pPr>
+            <a:endParaRPr lang="en-US" altLang="en-US" sz="400">
+              <a:latin typeface="Arial" panose="020B0604020202020204" pitchFamily="34" charset="0"/>
+            </a:endParaRPr>
+          </a:p>
+          <a:p>
+            <a:pPr>
+              <a:lnSpc>
+                <a:spcPct val="150000"/>
+              </a:lnSpc>
+              <a:buNone/>
+            </a:pPr>
+            <a:r>
+              <a:rPr lang="en-US" altLang="en-US" sz="400">
+                <a:latin typeface="Arial" panose="020B0604020202020204" pitchFamily="34" charset="0"/>
+              </a:rPr>
+              <a:t>            // Unikal ad</a:t>
+            </a:r>
+          </a:p>
+          <a:p>
+            <a:pPr>
+              <a:lnSpc>
+                <a:spcPct val="150000"/>
+              </a:lnSpc>
+              <a:buNone/>
+            </a:pPr>
+            <a:r>
+              <a:rPr lang="en-US" altLang="en-US" sz="400">
+                <a:latin typeface="Arial" panose="020B0604020202020204" pitchFamily="34" charset="0"/>
+              </a:rPr>
+              <a:t>            $imageName = 'media_' . uniqid() . '.' . $ext;</a:t>
+            </a:r>
+          </a:p>
+          <a:p>
+            <a:pPr>
+              <a:lnSpc>
+                <a:spcPct val="150000"/>
+              </a:lnSpc>
+              <a:buNone/>
+            </a:pPr>
+            <a:endParaRPr lang="en-US" altLang="en-US" sz="400">
+              <a:latin typeface="Arial" panose="020B0604020202020204" pitchFamily="34" charset="0"/>
+            </a:endParaRPr>
+          </a:p>
+          <a:p>
+            <a:pPr>
+              <a:lnSpc>
+                <a:spcPct val="150000"/>
+              </a:lnSpc>
+              <a:buNone/>
+            </a:pPr>
+            <a:r>
+              <a:rPr lang="en-US" altLang="en-US" sz="400">
+                <a:latin typeface="Arial" panose="020B0604020202020204" pitchFamily="34" charset="0"/>
+              </a:rPr>
+              <a:t>            // Əsas şəkil boyutunu dəyiş və watermark əlavə et</a:t>
+            </a:r>
+          </a:p>
+          <a:p>
+            <a:pPr>
+              <a:lnSpc>
+                <a:spcPct val="150000"/>
+              </a:lnSpc>
+              <a:buNone/>
+            </a:pPr>
+            <a:r>
+              <a:rPr lang="en-US" altLang="en-US" sz="400">
+                <a:latin typeface="Arial" panose="020B0604020202020204" pitchFamily="34" charset="0"/>
+              </a:rPr>
+              <a:t>            $mainImage = Image::make($image)</a:t>
+            </a:r>
+          </a:p>
+          <a:p>
+            <a:pPr>
+              <a:lnSpc>
+                <a:spcPct val="150000"/>
+              </a:lnSpc>
+              <a:buNone/>
+            </a:pPr>
+            <a:r>
+              <a:rPr lang="en-US" altLang="en-US" sz="400">
+                <a:latin typeface="Arial" panose="020B0604020202020204" pitchFamily="34" charset="0"/>
+              </a:rPr>
+              <a:t>                -&gt;resize($resize[0], $resize[1], function ($constraint) {</a:t>
+            </a:r>
+          </a:p>
+          <a:p>
+            <a:pPr>
+              <a:lnSpc>
+                <a:spcPct val="150000"/>
+              </a:lnSpc>
+              <a:buNone/>
+            </a:pPr>
+            <a:r>
+              <a:rPr lang="en-US" altLang="en-US" sz="400">
+                <a:latin typeface="Arial" panose="020B0604020202020204" pitchFamily="34" charset="0"/>
+              </a:rPr>
+              <a:t>                    $constraint-&gt;aspectRatio();</a:t>
+            </a:r>
+          </a:p>
+          <a:p>
+            <a:pPr>
+              <a:lnSpc>
+                <a:spcPct val="150000"/>
+              </a:lnSpc>
+              <a:buNone/>
+            </a:pPr>
+            <a:r>
+              <a:rPr lang="en-US" altLang="en-US" sz="400">
+                <a:latin typeface="Arial" panose="020B0604020202020204" pitchFamily="34" charset="0"/>
+              </a:rPr>
+              <a:t>                    $constraint-&gt;upsize();</a:t>
+            </a:r>
+          </a:p>
+          <a:p>
+            <a:pPr>
+              <a:lnSpc>
+                <a:spcPct val="150000"/>
+              </a:lnSpc>
+              <a:buNone/>
+            </a:pPr>
+            <a:r>
+              <a:rPr lang="en-US" altLang="en-US" sz="400">
+                <a:latin typeface="Arial" panose="020B0604020202020204" pitchFamily="34" charset="0"/>
+              </a:rPr>
+              <a:t>                });</a:t>
+            </a:r>
+          </a:p>
+          <a:p>
+            <a:pPr>
+              <a:lnSpc>
+                <a:spcPct val="150000"/>
+              </a:lnSpc>
+              <a:buNone/>
+            </a:pPr>
+            <a:endParaRPr lang="en-US" altLang="en-US" sz="400">
+              <a:latin typeface="Arial" panose="020B0604020202020204" pitchFamily="34" charset="0"/>
+            </a:endParaRPr>
+          </a:p>
+          <a:p>
+            <a:pPr>
+              <a:lnSpc>
+                <a:spcPct val="150000"/>
+              </a:lnSpc>
+              <a:buNone/>
+            </a:pPr>
+            <a:r>
+              <a:rPr lang="en-US" altLang="en-US" sz="400">
+                <a:latin typeface="Arial" panose="020B0604020202020204" pitchFamily="34" charset="0"/>
+              </a:rPr>
+              <a:t>            // Su nişanı (watermark) əlavə etmək istəyirsinizsə:</a:t>
+            </a:r>
+          </a:p>
+          <a:p>
+            <a:pPr>
+              <a:lnSpc>
+                <a:spcPct val="150000"/>
+              </a:lnSpc>
+              <a:buNone/>
+            </a:pPr>
+            <a:r>
+              <a:rPr lang="en-US" altLang="en-US" sz="400">
+                <a:latin typeface="Arial" panose="020B0604020202020204" pitchFamily="34" charset="0"/>
+              </a:rPr>
+              <a:t>            $watermarkPath = public_path('watermarks/logo.png');</a:t>
+            </a:r>
+          </a:p>
+          <a:p>
+            <a:pPr>
+              <a:lnSpc>
+                <a:spcPct val="150000"/>
+              </a:lnSpc>
+              <a:buNone/>
+            </a:pPr>
+            <a:r>
+              <a:rPr lang="en-US" altLang="en-US" sz="400">
+                <a:latin typeface="Arial" panose="020B0604020202020204" pitchFamily="34" charset="0"/>
+              </a:rPr>
+              <a:t>            if (file_exists($watermarkPath)) {</a:t>
+            </a:r>
+          </a:p>
+          <a:p>
+            <a:pPr>
+              <a:lnSpc>
+                <a:spcPct val="150000"/>
+              </a:lnSpc>
+              <a:buNone/>
+            </a:pPr>
+            <a:r>
+              <a:rPr lang="en-US" altLang="en-US" sz="400">
+                <a:latin typeface="Arial" panose="020B0604020202020204" pitchFamily="34" charset="0"/>
+              </a:rPr>
+              <a:t>                $mainImage-&gt;insert($watermarkPath, 'bottom-right', 10, 10);</a:t>
+            </a:r>
+          </a:p>
+          <a:p>
+            <a:pPr>
+              <a:lnSpc>
+                <a:spcPct val="150000"/>
+              </a:lnSpc>
+              <a:buNone/>
+            </a:pPr>
+            <a:r>
+              <a:rPr lang="en-US" altLang="en-US" sz="400">
+                <a:latin typeface="Arial" panose="020B0604020202020204" pitchFamily="34" charset="0"/>
+              </a:rPr>
+              <a:t>            }</a:t>
+            </a:r>
+          </a:p>
+          <a:p>
+            <a:pPr>
+              <a:lnSpc>
+                <a:spcPct val="150000"/>
+              </a:lnSpc>
+              <a:buNone/>
+            </a:pPr>
+            <a:endParaRPr lang="en-US" altLang="en-US" sz="400">
+              <a:latin typeface="Arial" panose="020B0604020202020204" pitchFamily="34" charset="0"/>
+            </a:endParaRPr>
+          </a:p>
+          <a:p>
+            <a:pPr>
+              <a:lnSpc>
+                <a:spcPct val="150000"/>
+              </a:lnSpc>
+              <a:buNone/>
+            </a:pPr>
+            <a:r>
+              <a:rPr lang="en-US" altLang="en-US" sz="400">
+                <a:latin typeface="Arial" panose="020B0604020202020204" pitchFamily="34" charset="0"/>
+              </a:rPr>
+              <a:t>            // Qovluğu yoxla və yarat</a:t>
+            </a:r>
+          </a:p>
+          <a:p>
+            <a:pPr>
+              <a:lnSpc>
+                <a:spcPct val="150000"/>
+              </a:lnSpc>
+              <a:buNone/>
+            </a:pPr>
+            <a:r>
+              <a:rPr lang="en-US" altLang="en-US" sz="400">
+                <a:latin typeface="Arial" panose="020B0604020202020204" pitchFamily="34" charset="0"/>
+              </a:rPr>
+              <a:t>            $uploadPath = public_path($folder);</a:t>
+            </a:r>
+          </a:p>
+          <a:p>
+            <a:pPr>
+              <a:lnSpc>
+                <a:spcPct val="150000"/>
+              </a:lnSpc>
+              <a:buNone/>
+            </a:pPr>
+            <a:r>
+              <a:rPr lang="en-US" altLang="en-US" sz="400">
+                <a:latin typeface="Arial" panose="020B0604020202020204" pitchFamily="34" charset="0"/>
+              </a:rPr>
+              <a:t>            if (!file_exists($uploadPath)) {</a:t>
+            </a:r>
+          </a:p>
+          <a:p>
+            <a:pPr>
+              <a:lnSpc>
+                <a:spcPct val="150000"/>
+              </a:lnSpc>
+              <a:buNone/>
+            </a:pPr>
+            <a:r>
+              <a:rPr lang="en-US" altLang="en-US" sz="400">
+                <a:latin typeface="Arial" panose="020B0604020202020204" pitchFamily="34" charset="0"/>
+              </a:rPr>
+              <a:t>                mkdir($uploadPath, 0777, true);</a:t>
+            </a:r>
+          </a:p>
+          <a:p>
+            <a:pPr>
+              <a:lnSpc>
+                <a:spcPct val="150000"/>
+              </a:lnSpc>
+              <a:buNone/>
+            </a:pPr>
+            <a:r>
+              <a:rPr lang="en-US" altLang="en-US" sz="400">
+                <a:latin typeface="Arial" panose="020B0604020202020204" pitchFamily="34" charset="0"/>
+              </a:rPr>
+              <a:t>            }</a:t>
+            </a:r>
+          </a:p>
+          <a:p>
+            <a:pPr>
+              <a:lnSpc>
+                <a:spcPct val="150000"/>
+              </a:lnSpc>
+              <a:buNone/>
+            </a:pPr>
+            <a:endParaRPr lang="en-US" altLang="en-US" sz="400">
+              <a:latin typeface="Arial" panose="020B0604020202020204" pitchFamily="34" charset="0"/>
+            </a:endParaRPr>
+          </a:p>
+          <a:p>
+            <a:pPr>
+              <a:lnSpc>
+                <a:spcPct val="150000"/>
+              </a:lnSpc>
+              <a:buNone/>
+            </a:pPr>
+            <a:r>
+              <a:rPr lang="en-US" altLang="en-US" sz="400">
+                <a:latin typeface="Arial" panose="020B0604020202020204" pitchFamily="34" charset="0"/>
+              </a:rPr>
+              <a:t>            // Əsas şəkli yadda saxla (webp versiyasını da yarada bilərsən)</a:t>
+            </a:r>
+          </a:p>
+          <a:p>
+            <a:pPr>
+              <a:lnSpc>
+                <a:spcPct val="150000"/>
+              </a:lnSpc>
+              <a:buNone/>
+            </a:pPr>
+            <a:r>
+              <a:rPr lang="en-US" altLang="en-US" sz="400">
+                <a:latin typeface="Arial" panose="020B0604020202020204" pitchFamily="34" charset="0"/>
+              </a:rPr>
+              <a:t>            $mainImage-&gt;save($uploadPath . '/' . $imageName, 85); // 85 - keyfiyyət %</a:t>
+            </a:r>
+          </a:p>
+          <a:p>
+            <a:pPr>
+              <a:lnSpc>
+                <a:spcPct val="150000"/>
+              </a:lnSpc>
+              <a:buNone/>
+            </a:pPr>
+            <a:endParaRPr lang="en-US" altLang="en-US" sz="400">
+              <a:latin typeface="Arial" panose="020B0604020202020204" pitchFamily="34" charset="0"/>
+            </a:endParaRPr>
+          </a:p>
+          <a:p>
+            <a:pPr>
+              <a:lnSpc>
+                <a:spcPct val="150000"/>
+              </a:lnSpc>
+              <a:buNone/>
+            </a:pPr>
+            <a:r>
+              <a:rPr lang="en-US" altLang="en-US" sz="400">
+                <a:latin typeface="Arial" panose="020B0604020202020204" pitchFamily="34" charset="0"/>
+              </a:rPr>
+              <a:t>            // Thumbnail yaradırıqsa:</a:t>
+            </a:r>
+          </a:p>
+          <a:p>
+            <a:pPr>
+              <a:lnSpc>
+                <a:spcPct val="150000"/>
+              </a:lnSpc>
+              <a:buNone/>
+            </a:pPr>
+            <a:r>
+              <a:rPr lang="en-US" altLang="en-US" sz="400">
+                <a:latin typeface="Arial" panose="020B0604020202020204" pitchFamily="34" charset="0"/>
+              </a:rPr>
+              <a:t>            if ($createThumbnail) {</a:t>
+            </a:r>
+          </a:p>
+          <a:p>
+            <a:pPr>
+              <a:lnSpc>
+                <a:spcPct val="150000"/>
+              </a:lnSpc>
+              <a:buNone/>
+            </a:pPr>
+            <a:r>
+              <a:rPr lang="en-US" altLang="en-US" sz="400">
+                <a:latin typeface="Arial" panose="020B0604020202020204" pitchFamily="34" charset="0"/>
+              </a:rPr>
+              <a:t>                $thumbName = 'thumb_' . $imageName;</a:t>
+            </a:r>
+          </a:p>
+          <a:p>
+            <a:pPr>
+              <a:lnSpc>
+                <a:spcPct val="150000"/>
+              </a:lnSpc>
+              <a:buNone/>
+            </a:pPr>
+            <a:r>
+              <a:rPr lang="en-US" altLang="en-US" sz="400">
+                <a:latin typeface="Arial" panose="020B0604020202020204" pitchFamily="34" charset="0"/>
+              </a:rPr>
+              <a:t>                $thumbImage = Image::make($image)</a:t>
+            </a:r>
+          </a:p>
+          <a:p>
+            <a:pPr>
+              <a:lnSpc>
+                <a:spcPct val="150000"/>
+              </a:lnSpc>
+              <a:buNone/>
+            </a:pPr>
+            <a:r>
+              <a:rPr lang="en-US" altLang="en-US" sz="400">
+                <a:latin typeface="Arial" panose="020B0604020202020204" pitchFamily="34" charset="0"/>
+              </a:rPr>
+              <a:t>                    -&gt;resize(250, 250, function ($constraint) {</a:t>
+            </a:r>
+          </a:p>
+          <a:p>
+            <a:pPr>
+              <a:lnSpc>
+                <a:spcPct val="150000"/>
+              </a:lnSpc>
+              <a:buNone/>
+            </a:pPr>
+            <a:r>
+              <a:rPr lang="en-US" altLang="en-US" sz="400">
+                <a:latin typeface="Arial" panose="020B0604020202020204" pitchFamily="34" charset="0"/>
+              </a:rPr>
+              <a:t>                        $constraint-&gt;aspectRatio();</a:t>
+            </a:r>
+          </a:p>
+          <a:p>
+            <a:pPr>
+              <a:lnSpc>
+                <a:spcPct val="150000"/>
+              </a:lnSpc>
+              <a:buNone/>
+            </a:pPr>
+            <a:r>
+              <a:rPr lang="en-US" altLang="en-US" sz="400">
+                <a:latin typeface="Arial" panose="020B0604020202020204" pitchFamily="34" charset="0"/>
+              </a:rPr>
+              <a:t>                        $constraint-&gt;upsize();</a:t>
+            </a:r>
+          </a:p>
+          <a:p>
+            <a:pPr>
+              <a:lnSpc>
+                <a:spcPct val="150000"/>
+              </a:lnSpc>
+              <a:buNone/>
+            </a:pPr>
+            <a:r>
+              <a:rPr lang="en-US" altLang="en-US" sz="400">
+                <a:latin typeface="Arial" panose="020B0604020202020204" pitchFamily="34" charset="0"/>
+              </a:rPr>
+              <a:t>                    });</a:t>
+            </a:r>
+          </a:p>
+          <a:p>
+            <a:pPr>
+              <a:lnSpc>
+                <a:spcPct val="150000"/>
+              </a:lnSpc>
+              <a:buNone/>
+            </a:pPr>
+            <a:endParaRPr lang="en-US" altLang="en-US" sz="400">
+              <a:latin typeface="Arial" panose="020B0604020202020204" pitchFamily="34" charset="0"/>
+            </a:endParaRPr>
+          </a:p>
+          <a:p>
+            <a:pPr>
+              <a:lnSpc>
+                <a:spcPct val="150000"/>
+              </a:lnSpc>
+              <a:buNone/>
+            </a:pPr>
+            <a:r>
+              <a:rPr lang="en-US" altLang="en-US" sz="400">
+                <a:latin typeface="Arial" panose="020B0604020202020204" pitchFamily="34" charset="0"/>
+              </a:rPr>
+              <a:t>                $thumbPath = $uploadPath . '/thumbs';</a:t>
+            </a:r>
+          </a:p>
+          <a:p>
+            <a:pPr>
+              <a:lnSpc>
+                <a:spcPct val="150000"/>
+              </a:lnSpc>
+              <a:buNone/>
+            </a:pPr>
+            <a:r>
+              <a:rPr lang="en-US" altLang="en-US" sz="400">
+                <a:latin typeface="Arial" panose="020B0604020202020204" pitchFamily="34" charset="0"/>
+              </a:rPr>
+              <a:t>                if (!file_exists($thumbPath)) {</a:t>
+            </a:r>
+          </a:p>
+          <a:p>
+            <a:pPr>
+              <a:lnSpc>
+                <a:spcPct val="150000"/>
+              </a:lnSpc>
+              <a:buNone/>
+            </a:pPr>
+            <a:r>
+              <a:rPr lang="en-US" altLang="en-US" sz="400">
+                <a:latin typeface="Arial" panose="020B0604020202020204" pitchFamily="34" charset="0"/>
+              </a:rPr>
+              <a:t>                    mkdir($thumbPath, 0777, true);</a:t>
+            </a:r>
+          </a:p>
+          <a:p>
+            <a:pPr>
+              <a:lnSpc>
+                <a:spcPct val="150000"/>
+              </a:lnSpc>
+              <a:buNone/>
+            </a:pPr>
+            <a:r>
+              <a:rPr lang="en-US" altLang="en-US" sz="400">
+                <a:latin typeface="Arial" panose="020B0604020202020204" pitchFamily="34" charset="0"/>
+              </a:rPr>
+              <a:t>                }</a:t>
+            </a:r>
+          </a:p>
+          <a:p>
+            <a:pPr>
+              <a:lnSpc>
+                <a:spcPct val="150000"/>
+              </a:lnSpc>
+              <a:buNone/>
+            </a:pPr>
+            <a:endParaRPr lang="en-US" altLang="en-US" sz="400">
+              <a:latin typeface="Arial" panose="020B0604020202020204" pitchFamily="34" charset="0"/>
+            </a:endParaRPr>
+          </a:p>
+          <a:p>
+            <a:pPr>
+              <a:lnSpc>
+                <a:spcPct val="150000"/>
+              </a:lnSpc>
+              <a:buNone/>
+            </a:pPr>
+            <a:r>
+              <a:rPr lang="en-US" altLang="en-US" sz="400">
+                <a:latin typeface="Arial" panose="020B0604020202020204" pitchFamily="34" charset="0"/>
+              </a:rPr>
+              <a:t>                $thumbImage-&gt;save($thumbPath . '/' . $thumbName, 80);</a:t>
+            </a:r>
+          </a:p>
+          <a:p>
+            <a:pPr>
+              <a:lnSpc>
+                <a:spcPct val="150000"/>
+              </a:lnSpc>
+              <a:buNone/>
+            </a:pPr>
+            <a:r>
+              <a:rPr lang="en-US" altLang="en-US" sz="400">
+                <a:latin typeface="Arial" panose="020B0604020202020204" pitchFamily="34" charset="0"/>
+              </a:rPr>
+              <a:t>            }</a:t>
+            </a:r>
+          </a:p>
+          <a:p>
+            <a:pPr>
+              <a:lnSpc>
+                <a:spcPct val="150000"/>
+              </a:lnSpc>
+              <a:buNone/>
+            </a:pPr>
+            <a:endParaRPr lang="en-US" altLang="en-US" sz="400">
+              <a:latin typeface="Arial" panose="020B0604020202020204" pitchFamily="34" charset="0"/>
+            </a:endParaRPr>
+          </a:p>
+          <a:p>
+            <a:pPr>
+              <a:lnSpc>
+                <a:spcPct val="150000"/>
+              </a:lnSpc>
+              <a:buNone/>
+            </a:pPr>
+            <a:r>
+              <a:rPr lang="en-US" altLang="en-US" sz="400">
+                <a:latin typeface="Arial" panose="020B0604020202020204" pitchFamily="34" charset="0"/>
+              </a:rPr>
+              <a:t>            return $folder . '/' . $imageName;</a:t>
+            </a:r>
+          </a:p>
+          <a:p>
+            <a:pPr>
+              <a:lnSpc>
+                <a:spcPct val="150000"/>
+              </a:lnSpc>
+              <a:buNone/>
+            </a:pPr>
+            <a:r>
+              <a:rPr lang="en-US" altLang="en-US" sz="400">
+                <a:latin typeface="Arial" panose="020B0604020202020204" pitchFamily="34" charset="0"/>
+              </a:rPr>
+              <a:t>        }</a:t>
+            </a:r>
+          </a:p>
+          <a:p>
+            <a:pPr>
+              <a:lnSpc>
+                <a:spcPct val="150000"/>
+              </a:lnSpc>
+              <a:buNone/>
+            </a:pPr>
+            <a:endParaRPr lang="en-US" altLang="en-US" sz="400">
+              <a:latin typeface="Arial" panose="020B0604020202020204" pitchFamily="34" charset="0"/>
+            </a:endParaRPr>
+          </a:p>
+          <a:p>
+            <a:pPr>
+              <a:lnSpc>
+                <a:spcPct val="150000"/>
+              </a:lnSpc>
+              <a:buNone/>
+            </a:pPr>
+            <a:r>
+              <a:rPr lang="en-US" altLang="en-US" sz="400">
+                <a:latin typeface="Arial" panose="020B0604020202020204" pitchFamily="34" charset="0"/>
+              </a:rPr>
+              <a:t>        return null;</a:t>
+            </a:r>
+          </a:p>
+          <a:p>
+            <a:pPr>
+              <a:lnSpc>
+                <a:spcPct val="150000"/>
+              </a:lnSpc>
+              <a:buNone/>
+            </a:pPr>
+            <a:r>
+              <a:rPr lang="en-US" altLang="en-US" sz="400">
+                <a:latin typeface="Arial" panose="020B0604020202020204" pitchFamily="34" charset="0"/>
+              </a:rPr>
+              <a:t>    }</a:t>
+            </a:r>
+          </a:p>
+          <a:p>
+            <a:pPr>
+              <a:lnSpc>
+                <a:spcPct val="150000"/>
+              </a:lnSpc>
+              <a:buNone/>
+            </a:pPr>
+            <a:endParaRPr lang="en-US" altLang="en-US" sz="400">
+              <a:latin typeface="Arial" panose="020B0604020202020204" pitchFamily="34" charset="0"/>
+            </a:endParaRPr>
+          </a:p>
+          <a:p>
+            <a:pPr>
+              <a:lnSpc>
+                <a:spcPct val="150000"/>
+              </a:lnSpc>
+              <a:buNone/>
+            </a:pPr>
+            <a:r>
+              <a:rPr lang="en-US" altLang="en-US" sz="400">
+                <a:latin typeface="Arial" panose="020B0604020202020204" pitchFamily="34" charset="0"/>
+              </a:rPr>
+              <a:t>}</a:t>
+            </a:r>
+            <a:endParaRPr kumimoji="0" lang="en-US" altLang="en-US" sz="400" b="0" i="0" u="none" strike="noStrike" cap="none" normalizeH="0" baseline="0">
+              <a:ln>
+                <a:noFill/>
+              </a:ln>
+              <a:solidFill>
+                <a:schemeClr val="tx1"/>
+              </a:solidFill>
+              <a:effectLst/>
+              <a:latin typeface="Arial" panose="020B0604020202020204" pitchFamily="34" charset="0"/>
+            </a:endParaRPr>
+          </a:p>
+        </p:txBody>
+      </p:sp>
+    </p:spTree>
+    <p:extLst>
+      <p:ext uri="{BB962C8B-B14F-4D97-AF65-F5344CB8AC3E}">
+        <p14:creationId xmlns:p14="http://schemas.microsoft.com/office/powerpoint/2010/main" val="2180148358"/>
+      </p:ext>
+    </p:extLst>
+  </p:cSld>
+  <p:clrMapOvr>
+    <a:masterClrMapping/>
+  </p:clrMapOvr>
+</p:sld>
+</file>
+
+<file path=ppt/slides/slide13.xml><?xml version="1.0" encoding="utf-8"?>
+<p:sld xmlns:a="http://schemas.openxmlformats.org/drawingml/2006/main" xmlns:r="http://schemas.openxmlformats.org/officeDocument/2006/relationships" xmlns:p="http://schemas.openxmlformats.org/presentationml/2006/main">
+  <p:cSld>
+    <p:spTree>
+      <p:nvGrpSpPr>
+        <p:cNvPr id="1" name="">
+          <a:extLst>
+            <a:ext uri="{FF2B5EF4-FFF2-40B4-BE49-F238E27FC236}">
+              <a16:creationId xmlns:a16="http://schemas.microsoft.com/office/drawing/2014/main" id="{AA9A7D5A-34C4-E303-1E19-A49F5CD31197}"/>
+            </a:ext>
+          </a:extLst>
+        </p:cNvPr>
+        <p:cNvGrpSpPr/>
+        <p:nvPr/>
+      </p:nvGrpSpPr>
+      <p:grpSpPr>
+        <a:xfrm>
+          <a:off x="0" y="0"/>
+          <a:ext cx="0" cy="0"/>
+          <a:chOff x="0" y="0"/>
+          <a:chExt cx="0" cy="0"/>
+        </a:xfrm>
+      </p:grpSpPr>
+      <p:sp>
+        <p:nvSpPr>
+          <p:cNvPr id="3" name="TextBox 2">
+            <a:extLst>
+              <a:ext uri="{FF2B5EF4-FFF2-40B4-BE49-F238E27FC236}">
+                <a16:creationId xmlns:a16="http://schemas.microsoft.com/office/drawing/2014/main" id="{53332B7D-92EB-9FB3-14D2-AA3C147D6EF5}"/>
+              </a:ext>
+            </a:extLst>
+          </p:cNvPr>
+          <p:cNvSpPr txBox="1"/>
+          <p:nvPr/>
+        </p:nvSpPr>
+        <p:spPr>
+          <a:xfrm>
+            <a:off x="217714" y="255046"/>
+            <a:ext cx="11756571" cy="5156668"/>
+          </a:xfrm>
+          <a:prstGeom prst="rect">
+            <a:avLst/>
+          </a:prstGeom>
+          <a:noFill/>
+        </p:spPr>
+        <p:txBody>
+          <a:bodyPr wrap="square">
+            <a:spAutoFit/>
+          </a:bodyPr>
+          <a:lstStyle/>
+          <a:p>
+            <a:pPr>
+              <a:lnSpc>
+                <a:spcPct val="150000"/>
+              </a:lnSpc>
+              <a:buNone/>
+            </a:pPr>
+            <a:r>
+              <a:rPr lang="en-US" altLang="en-US" sz="1300">
+                <a:latin typeface="Arial" panose="020B0604020202020204" pitchFamily="34" charset="0"/>
+              </a:rPr>
+              <a:t>Controller-də istifadə (məsələn SliderController):</a:t>
+            </a:r>
+            <a:endParaRPr lang="az-Latn-AZ" altLang="en-US" sz="1300">
+              <a:latin typeface="Arial" panose="020B0604020202020204" pitchFamily="34" charset="0"/>
+            </a:endParaRPr>
+          </a:p>
+          <a:p>
+            <a:pPr>
+              <a:lnSpc>
+                <a:spcPct val="150000"/>
+              </a:lnSpc>
+              <a:buNone/>
+            </a:pPr>
+            <a:endParaRPr kumimoji="0" lang="az-Latn-AZ" altLang="en-US" sz="1300" b="0" i="0" u="none" strike="noStrike" cap="none" normalizeH="0" baseline="0">
+              <a:ln>
+                <a:noFill/>
+              </a:ln>
+              <a:solidFill>
+                <a:schemeClr val="tx1"/>
+              </a:solidFill>
+              <a:effectLst/>
+              <a:latin typeface="Arial" panose="020B0604020202020204" pitchFamily="34" charset="0"/>
+            </a:endParaRPr>
+          </a:p>
+          <a:p>
+            <a:pPr>
+              <a:lnSpc>
+                <a:spcPct val="150000"/>
+              </a:lnSpc>
+              <a:buNone/>
+            </a:pPr>
+            <a:endParaRPr lang="az-Latn-AZ" altLang="en-US" sz="1300">
+              <a:latin typeface="Arial" panose="020B0604020202020204" pitchFamily="34" charset="0"/>
+            </a:endParaRPr>
+          </a:p>
+          <a:p>
+            <a:pPr>
+              <a:lnSpc>
+                <a:spcPct val="150000"/>
+              </a:lnSpc>
+              <a:buNone/>
+            </a:pPr>
+            <a:endParaRPr kumimoji="0" lang="az-Latn-AZ" altLang="en-US" sz="1300" b="0" i="0" u="none" strike="noStrike" cap="none" normalizeH="0" baseline="0">
+              <a:ln>
+                <a:noFill/>
+              </a:ln>
+              <a:solidFill>
+                <a:schemeClr val="tx1"/>
+              </a:solidFill>
+              <a:effectLst/>
+              <a:latin typeface="Arial" panose="020B0604020202020204" pitchFamily="34" charset="0"/>
+            </a:endParaRPr>
+          </a:p>
+          <a:p>
+            <a:pPr>
+              <a:lnSpc>
+                <a:spcPct val="150000"/>
+              </a:lnSpc>
+              <a:buNone/>
+            </a:pPr>
+            <a:endParaRPr lang="az-Latn-AZ" altLang="en-US" sz="1300">
+              <a:latin typeface="Arial" panose="020B0604020202020204" pitchFamily="34" charset="0"/>
+            </a:endParaRPr>
+          </a:p>
+          <a:p>
+            <a:pPr>
+              <a:lnSpc>
+                <a:spcPct val="150000"/>
+              </a:lnSpc>
+              <a:buNone/>
+            </a:pPr>
+            <a:endParaRPr kumimoji="0" lang="az-Latn-AZ" altLang="en-US" sz="1300" b="0" i="0" u="none" strike="noStrike" cap="none" normalizeH="0" baseline="0">
+              <a:ln>
+                <a:noFill/>
+              </a:ln>
+              <a:solidFill>
+                <a:schemeClr val="tx1"/>
+              </a:solidFill>
+              <a:effectLst/>
+              <a:latin typeface="Arial" panose="020B0604020202020204" pitchFamily="34" charset="0"/>
+            </a:endParaRPr>
+          </a:p>
+          <a:p>
+            <a:pPr>
+              <a:lnSpc>
+                <a:spcPct val="150000"/>
+              </a:lnSpc>
+              <a:buNone/>
+            </a:pPr>
+            <a:r>
+              <a:rPr lang="en-US" altLang="en-US" sz="1300">
+                <a:latin typeface="Arial" panose="020B0604020202020204" pitchFamily="34" charset="0"/>
+              </a:rPr>
+              <a:t>Yaradılacaq Struktur (public/ altında):</a:t>
+            </a:r>
+            <a:endParaRPr lang="az-Latn-AZ" altLang="en-US" sz="1300">
+              <a:latin typeface="Arial" panose="020B0604020202020204" pitchFamily="34" charset="0"/>
+            </a:endParaRPr>
+          </a:p>
+          <a:p>
+            <a:pPr>
+              <a:lnSpc>
+                <a:spcPct val="150000"/>
+              </a:lnSpc>
+              <a:buNone/>
+            </a:pPr>
+            <a:endParaRPr kumimoji="0" lang="az-Latn-AZ" altLang="en-US" sz="1300" b="0" i="0" u="none" strike="noStrike" cap="none" normalizeH="0" baseline="0">
+              <a:ln>
+                <a:noFill/>
+              </a:ln>
+              <a:solidFill>
+                <a:schemeClr val="tx1"/>
+              </a:solidFill>
+              <a:effectLst/>
+              <a:latin typeface="Arial" panose="020B0604020202020204" pitchFamily="34" charset="0"/>
+            </a:endParaRPr>
+          </a:p>
+          <a:p>
+            <a:pPr>
+              <a:lnSpc>
+                <a:spcPct val="150000"/>
+              </a:lnSpc>
+              <a:buNone/>
+            </a:pPr>
+            <a:endParaRPr lang="az-Latn-AZ" altLang="en-US" sz="1300">
+              <a:latin typeface="Arial" panose="020B0604020202020204" pitchFamily="34" charset="0"/>
+            </a:endParaRPr>
+          </a:p>
+          <a:p>
+            <a:pPr>
+              <a:lnSpc>
+                <a:spcPct val="150000"/>
+              </a:lnSpc>
+              <a:buNone/>
+            </a:pPr>
+            <a:endParaRPr kumimoji="0" lang="az-Latn-AZ" altLang="en-US" sz="1300" b="0" i="0" u="none" strike="noStrike" cap="none" normalizeH="0" baseline="0">
+              <a:ln>
+                <a:noFill/>
+              </a:ln>
+              <a:solidFill>
+                <a:schemeClr val="tx1"/>
+              </a:solidFill>
+              <a:effectLst/>
+              <a:latin typeface="Arial" panose="020B0604020202020204" pitchFamily="34" charset="0"/>
+            </a:endParaRPr>
+          </a:p>
+          <a:p>
+            <a:pPr>
+              <a:lnSpc>
+                <a:spcPct val="150000"/>
+              </a:lnSpc>
+              <a:buNone/>
+            </a:pPr>
+            <a:endParaRPr lang="az-Latn-AZ" altLang="en-US" sz="1300">
+              <a:latin typeface="Arial" panose="020B0604020202020204" pitchFamily="34" charset="0"/>
+            </a:endParaRPr>
+          </a:p>
+          <a:p>
+            <a:pPr>
+              <a:lnSpc>
+                <a:spcPct val="150000"/>
+              </a:lnSpc>
+              <a:buNone/>
+            </a:pPr>
+            <a:endParaRPr kumimoji="0" lang="az-Latn-AZ" altLang="en-US" sz="1300" b="0" i="0" u="none" strike="noStrike" cap="none" normalizeH="0" baseline="0">
+              <a:ln>
+                <a:noFill/>
+              </a:ln>
+              <a:solidFill>
+                <a:schemeClr val="tx1"/>
+              </a:solidFill>
+              <a:effectLst/>
+              <a:latin typeface="Arial" panose="020B0604020202020204" pitchFamily="34" charset="0"/>
+            </a:endParaRPr>
+          </a:p>
+          <a:p>
+            <a:pPr>
+              <a:lnSpc>
+                <a:spcPct val="150000"/>
+              </a:lnSpc>
+              <a:buNone/>
+            </a:pPr>
+            <a:endParaRPr lang="az-Latn-AZ" altLang="en-US" sz="1300">
+              <a:latin typeface="Arial" panose="020B0604020202020204" pitchFamily="34" charset="0"/>
+            </a:endParaRPr>
+          </a:p>
+          <a:p>
+            <a:pPr>
+              <a:lnSpc>
+                <a:spcPct val="150000"/>
+              </a:lnSpc>
+              <a:buNone/>
+            </a:pPr>
+            <a:endParaRPr kumimoji="0" lang="az-Latn-AZ" altLang="en-US" sz="1300" b="0" i="0" u="none" strike="noStrike" cap="none" normalizeH="0" baseline="0">
+              <a:ln>
+                <a:noFill/>
+              </a:ln>
+              <a:solidFill>
+                <a:schemeClr val="tx1"/>
+              </a:solidFill>
+              <a:effectLst/>
+              <a:latin typeface="Arial" panose="020B0604020202020204" pitchFamily="34" charset="0"/>
+            </a:endParaRPr>
+          </a:p>
+          <a:p>
+            <a:pPr>
+              <a:lnSpc>
+                <a:spcPct val="150000"/>
+              </a:lnSpc>
+              <a:buNone/>
+            </a:pPr>
+            <a:endParaRPr lang="az-Latn-AZ" altLang="en-US" sz="1300">
+              <a:latin typeface="Arial" panose="020B0604020202020204" pitchFamily="34" charset="0"/>
+            </a:endParaRPr>
+          </a:p>
+          <a:p>
+            <a:pPr>
+              <a:lnSpc>
+                <a:spcPct val="150000"/>
+              </a:lnSpc>
+              <a:buNone/>
+            </a:pPr>
+            <a:endParaRPr kumimoji="0" lang="az-Latn-AZ" altLang="en-US" sz="1300" b="0" i="0" u="none" strike="noStrike" cap="none" normalizeH="0" baseline="0">
+              <a:ln>
+                <a:noFill/>
+              </a:ln>
+              <a:solidFill>
+                <a:schemeClr val="tx1"/>
+              </a:solidFill>
+              <a:effectLst/>
+              <a:latin typeface="Arial" panose="020B0604020202020204" pitchFamily="34" charset="0"/>
+            </a:endParaRPr>
+          </a:p>
+          <a:p>
+            <a:pPr>
+              <a:lnSpc>
+                <a:spcPct val="150000"/>
+              </a:lnSpc>
+              <a:buNone/>
+            </a:pPr>
+            <a:r>
+              <a:rPr lang="en-US" altLang="en-US" sz="1300">
+                <a:latin typeface="Arial" panose="020B0604020202020204" pitchFamily="34" charset="0"/>
+              </a:rPr>
+              <a:t>WebP olaraq yadda saxlamaq istəyirsinizsə</a:t>
+            </a:r>
+            <a:r>
+              <a:rPr lang="az-Latn-AZ" altLang="en-US" sz="1300">
+                <a:latin typeface="Arial" panose="020B0604020202020204" pitchFamily="34" charset="0"/>
+              </a:rPr>
+              <a:t>:</a:t>
+            </a:r>
+            <a:endParaRPr kumimoji="0" lang="en-US" altLang="en-US" sz="1300" b="0" i="0" u="none" strike="noStrike" cap="none" normalizeH="0" baseline="0">
+              <a:ln>
+                <a:noFill/>
+              </a:ln>
+              <a:solidFill>
+                <a:schemeClr val="tx1"/>
+              </a:solidFill>
+              <a:effectLst/>
+              <a:latin typeface="Arial" panose="020B0604020202020204" pitchFamily="34" charset="0"/>
+            </a:endParaRPr>
+          </a:p>
+        </p:txBody>
+      </p:sp>
+      <p:pic>
+        <p:nvPicPr>
+          <p:cNvPr id="4" name="Picture 3">
+            <a:extLst>
+              <a:ext uri="{FF2B5EF4-FFF2-40B4-BE49-F238E27FC236}">
+                <a16:creationId xmlns:a16="http://schemas.microsoft.com/office/drawing/2014/main" id="{BD923776-0372-8144-B87B-DC91F845C6A5}"/>
+              </a:ext>
+            </a:extLst>
+          </p:cNvPr>
+          <p:cNvPicPr>
+            <a:picLocks noChangeAspect="1"/>
+          </p:cNvPicPr>
+          <p:nvPr/>
+        </p:nvPicPr>
+        <p:blipFill>
+          <a:blip r:embed="rId2"/>
+          <a:stretch>
+            <a:fillRect/>
+          </a:stretch>
+        </p:blipFill>
+        <p:spPr>
+          <a:xfrm>
+            <a:off x="217714" y="621102"/>
+            <a:ext cx="7068536" cy="609685"/>
+          </a:xfrm>
+          <a:prstGeom prst="rect">
+            <a:avLst/>
+          </a:prstGeom>
+        </p:spPr>
+      </p:pic>
+      <p:pic>
+        <p:nvPicPr>
+          <p:cNvPr id="6" name="Picture 5">
+            <a:extLst>
+              <a:ext uri="{FF2B5EF4-FFF2-40B4-BE49-F238E27FC236}">
+                <a16:creationId xmlns:a16="http://schemas.microsoft.com/office/drawing/2014/main" id="{D49D27DF-FD98-9214-3ED8-1946B54EF257}"/>
+              </a:ext>
+            </a:extLst>
+          </p:cNvPr>
+          <p:cNvPicPr>
+            <a:picLocks noChangeAspect="1"/>
+          </p:cNvPicPr>
+          <p:nvPr/>
+        </p:nvPicPr>
+        <p:blipFill>
+          <a:blip r:embed="rId3"/>
+          <a:stretch>
+            <a:fillRect/>
+          </a:stretch>
+        </p:blipFill>
+        <p:spPr>
+          <a:xfrm>
+            <a:off x="217714" y="2424833"/>
+            <a:ext cx="3820058" cy="2029108"/>
+          </a:xfrm>
+          <a:prstGeom prst="rect">
+            <a:avLst/>
+          </a:prstGeom>
+        </p:spPr>
+      </p:pic>
+      <p:pic>
+        <p:nvPicPr>
+          <p:cNvPr id="8" name="Picture 7">
+            <a:extLst>
+              <a:ext uri="{FF2B5EF4-FFF2-40B4-BE49-F238E27FC236}">
+                <a16:creationId xmlns:a16="http://schemas.microsoft.com/office/drawing/2014/main" id="{37FE3894-4B39-ED04-4F33-5D3ADE1BF5AE}"/>
+              </a:ext>
+            </a:extLst>
+          </p:cNvPr>
+          <p:cNvPicPr>
+            <a:picLocks noChangeAspect="1"/>
+          </p:cNvPicPr>
+          <p:nvPr/>
+        </p:nvPicPr>
+        <p:blipFill>
+          <a:blip r:embed="rId4"/>
+          <a:stretch>
+            <a:fillRect/>
+          </a:stretch>
+        </p:blipFill>
+        <p:spPr>
+          <a:xfrm>
+            <a:off x="217714" y="5411714"/>
+            <a:ext cx="5420481" cy="647790"/>
+          </a:xfrm>
+          <a:prstGeom prst="rect">
+            <a:avLst/>
+          </a:prstGeom>
+        </p:spPr>
+      </p:pic>
+    </p:spTree>
+    <p:extLst>
+      <p:ext uri="{BB962C8B-B14F-4D97-AF65-F5344CB8AC3E}">
+        <p14:creationId xmlns:p14="http://schemas.microsoft.com/office/powerpoint/2010/main" val="3754947179"/>
+      </p:ext>
+    </p:extLst>
+  </p:cSld>
+  <p:clrMapOvr>
+    <a:masterClrMapping/>
+  </p:clrMapOvr>
+</p:sld>
+</file>
+
+<file path=ppt/slides/slide14.xml><?xml version="1.0" encoding="utf-8"?>
+<p:sld xmlns:a="http://schemas.openxmlformats.org/drawingml/2006/main" xmlns:r="http://schemas.openxmlformats.org/officeDocument/2006/relationships" xmlns:p="http://schemas.openxmlformats.org/presentationml/2006/main">
+  <p:cSld>
+    <p:spTree>
+      <p:nvGrpSpPr>
+        <p:cNvPr id="1" name="">
+          <a:extLst>
+            <a:ext uri="{FF2B5EF4-FFF2-40B4-BE49-F238E27FC236}">
+              <a16:creationId xmlns:a16="http://schemas.microsoft.com/office/drawing/2014/main" id="{A840BE3A-06F9-176B-8B7A-46660D8B86CD}"/>
+            </a:ext>
+          </a:extLst>
+        </p:cNvPr>
+        <p:cNvGrpSpPr/>
+        <p:nvPr/>
+      </p:nvGrpSpPr>
+      <p:grpSpPr>
+        <a:xfrm>
+          <a:off x="0" y="0"/>
+          <a:ext cx="0" cy="0"/>
+          <a:chOff x="0" y="0"/>
+          <a:chExt cx="0" cy="0"/>
+        </a:xfrm>
+      </p:grpSpPr>
+      <p:sp>
+        <p:nvSpPr>
+          <p:cNvPr id="3" name="TextBox 2">
+            <a:extLst>
+              <a:ext uri="{FF2B5EF4-FFF2-40B4-BE49-F238E27FC236}">
+                <a16:creationId xmlns:a16="http://schemas.microsoft.com/office/drawing/2014/main" id="{483F6849-2F3B-D58D-751D-ABE7FC2F9790}"/>
+              </a:ext>
+            </a:extLst>
+          </p:cNvPr>
+          <p:cNvSpPr txBox="1"/>
+          <p:nvPr/>
+        </p:nvSpPr>
+        <p:spPr>
+          <a:xfrm>
+            <a:off x="217714" y="255046"/>
+            <a:ext cx="11756571" cy="2155847"/>
+          </a:xfrm>
+          <a:prstGeom prst="rect">
+            <a:avLst/>
+          </a:prstGeom>
+          <a:noFill/>
+        </p:spPr>
+        <p:txBody>
+          <a:bodyPr wrap="square">
+            <a:spAutoFit/>
+          </a:bodyPr>
+          <a:lstStyle/>
+          <a:p>
+            <a:pPr>
+              <a:lnSpc>
+                <a:spcPct val="150000"/>
+              </a:lnSpc>
+              <a:buNone/>
+            </a:pPr>
+            <a:r>
+              <a:rPr lang="en-US" altLang="en-US" sz="1300" b="1">
+                <a:latin typeface="Arial" panose="020B0604020202020204" pitchFamily="34" charset="0"/>
+              </a:rPr>
+              <a:t>Əlavə Göstərişlər</a:t>
+            </a:r>
+            <a:r>
+              <a:rPr lang="en-US" altLang="en-US" sz="1300">
+                <a:latin typeface="Arial" panose="020B0604020202020204" pitchFamily="34" charset="0"/>
+              </a:rPr>
+              <a:t>:</a:t>
+            </a:r>
+            <a:endParaRPr kumimoji="0" lang="az-Latn-AZ" altLang="en-US" sz="1300" b="0" i="0" u="none" strike="noStrike" cap="none" normalizeH="0" baseline="0">
+              <a:ln>
+                <a:noFill/>
+              </a:ln>
+              <a:solidFill>
+                <a:schemeClr val="tx1"/>
+              </a:solidFill>
+              <a:effectLst/>
+              <a:latin typeface="Arial" panose="020B0604020202020204" pitchFamily="34" charset="0"/>
+            </a:endParaRPr>
+          </a:p>
+          <a:p>
+            <a:pPr marL="742950" lvl="1" indent="-285750">
+              <a:lnSpc>
+                <a:spcPct val="150000"/>
+              </a:lnSpc>
+              <a:buFont typeface="Wingdings" panose="05000000000000000000" pitchFamily="2" charset="2"/>
+              <a:buChar char="q"/>
+            </a:pPr>
+            <a:r>
+              <a:rPr lang="en-US" altLang="en-US" sz="1300">
+                <a:latin typeface="Arial" panose="020B0604020202020204" pitchFamily="34" charset="0"/>
+              </a:rPr>
+              <a:t>İstifadəçinin yüklədiyi şəkilləri böyütmək yox, kiçiltmək daha düzgündür.</a:t>
+            </a:r>
+          </a:p>
+          <a:p>
+            <a:pPr marL="742950" lvl="1" indent="-285750">
+              <a:lnSpc>
+                <a:spcPct val="150000"/>
+              </a:lnSpc>
+              <a:buFont typeface="Wingdings" panose="05000000000000000000" pitchFamily="2" charset="2"/>
+              <a:buChar char="q"/>
+            </a:pPr>
+            <a:r>
+              <a:rPr lang="en-US" altLang="en-US" sz="1300">
+                <a:latin typeface="Arial" panose="020B0604020202020204" pitchFamily="34" charset="0"/>
+              </a:rPr>
+              <a:t>Watermark png şəklində şəffaflıqla yaradılmalıdır.</a:t>
+            </a:r>
+          </a:p>
+          <a:p>
+            <a:pPr marL="742950" lvl="1" indent="-285750">
+              <a:lnSpc>
+                <a:spcPct val="150000"/>
+              </a:lnSpc>
+              <a:buFont typeface="Wingdings" panose="05000000000000000000" pitchFamily="2" charset="2"/>
+              <a:buChar char="q"/>
+            </a:pPr>
+            <a:r>
+              <a:rPr lang="en-US" altLang="en-US" sz="1300">
+                <a:latin typeface="Arial" panose="020B0604020202020204" pitchFamily="34" charset="0"/>
+              </a:rPr>
+              <a:t>Fayl adlarında uniqid() + .webp → </a:t>
+            </a:r>
+            <a:r>
+              <a:rPr lang="en-US" altLang="en-US" sz="1300" b="1">
+                <a:solidFill>
+                  <a:srgbClr val="FF0000"/>
+                </a:solidFill>
+                <a:latin typeface="Arial" panose="020B0604020202020204" pitchFamily="34" charset="0"/>
+              </a:rPr>
+              <a:t>SEO</a:t>
+            </a:r>
+            <a:r>
+              <a:rPr lang="en-US" altLang="en-US" sz="1300">
+                <a:latin typeface="Arial" panose="020B0604020202020204" pitchFamily="34" charset="0"/>
+              </a:rPr>
+              <a:t> və performans üçün yaxşıdır.</a:t>
+            </a:r>
+            <a:endParaRPr lang="az-Latn-AZ" altLang="en-US" sz="1300">
+              <a:latin typeface="Arial" panose="020B0604020202020204" pitchFamily="34" charset="0"/>
+            </a:endParaRPr>
+          </a:p>
+          <a:p>
+            <a:pPr>
+              <a:lnSpc>
+                <a:spcPct val="150000"/>
+              </a:lnSpc>
+              <a:buNone/>
+            </a:pPr>
+            <a:endParaRPr kumimoji="0" lang="az-Latn-AZ" altLang="en-US" sz="1300" b="0" i="0" u="none" strike="noStrike" cap="none" normalizeH="0" baseline="0">
+              <a:ln>
+                <a:noFill/>
+              </a:ln>
+              <a:solidFill>
+                <a:schemeClr val="tx1"/>
+              </a:solidFill>
+              <a:effectLst/>
+              <a:latin typeface="Arial" panose="020B0604020202020204" pitchFamily="34" charset="0"/>
+            </a:endParaRPr>
+          </a:p>
+          <a:p>
+            <a:pPr>
+              <a:lnSpc>
+                <a:spcPct val="150000"/>
+              </a:lnSpc>
+              <a:buNone/>
+            </a:pPr>
+            <a:endParaRPr lang="az-Latn-AZ" altLang="en-US" sz="1300">
+              <a:latin typeface="Arial" panose="020B0604020202020204" pitchFamily="34" charset="0"/>
+            </a:endParaRPr>
+          </a:p>
+          <a:p>
+            <a:pPr>
+              <a:lnSpc>
+                <a:spcPct val="150000"/>
+              </a:lnSpc>
+              <a:buNone/>
+            </a:pPr>
+            <a:endParaRPr kumimoji="0" lang="en-US" altLang="en-US" sz="1300" b="0" i="0" u="none" strike="noStrike" cap="none" normalizeH="0" baseline="0">
+              <a:ln>
+                <a:noFill/>
+              </a:ln>
+              <a:solidFill>
+                <a:schemeClr val="tx1"/>
+              </a:solidFill>
+              <a:effectLst/>
+              <a:latin typeface="Arial" panose="020B0604020202020204" pitchFamily="34" charset="0"/>
+            </a:endParaRPr>
+          </a:p>
+        </p:txBody>
+      </p:sp>
+    </p:spTree>
+    <p:extLst>
+      <p:ext uri="{BB962C8B-B14F-4D97-AF65-F5344CB8AC3E}">
+        <p14:creationId xmlns:p14="http://schemas.microsoft.com/office/powerpoint/2010/main" val="659983865"/>
+      </p:ext>
+    </p:extLst>
+  </p:cSld>
+  <p:clrMapOvr>
+    <a:masterClrMapping/>
+  </p:clrMapOvr>
+</p:sld>
+</file>
+
+<file path=ppt/slides/slide15.xml><?xml version="1.0" encoding="utf-8"?>
+<p:sld xmlns:a="http://schemas.openxmlformats.org/drawingml/2006/main" xmlns:r="http://schemas.openxmlformats.org/officeDocument/2006/relationships" xmlns:p="http://schemas.openxmlformats.org/presentationml/2006/main">
+  <p:cSld>
+    <p:spTree>
+      <p:nvGrpSpPr>
+        <p:cNvPr id="1" name="">
+          <a:extLst>
+            <a:ext uri="{FF2B5EF4-FFF2-40B4-BE49-F238E27FC236}">
+              <a16:creationId xmlns:a16="http://schemas.microsoft.com/office/drawing/2014/main" id="{D95E1F45-B793-583B-2398-A17093924ED3}"/>
+            </a:ext>
+          </a:extLst>
+        </p:cNvPr>
+        <p:cNvGrpSpPr/>
+        <p:nvPr/>
+      </p:nvGrpSpPr>
+      <p:grpSpPr>
+        <a:xfrm>
+          <a:off x="0" y="0"/>
+          <a:ext cx="0" cy="0"/>
+          <a:chOff x="0" y="0"/>
+          <a:chExt cx="0" cy="0"/>
+        </a:xfrm>
+      </p:grpSpPr>
+      <p:sp>
+        <p:nvSpPr>
+          <p:cNvPr id="3" name="TextBox 2">
+            <a:extLst>
+              <a:ext uri="{FF2B5EF4-FFF2-40B4-BE49-F238E27FC236}">
+                <a16:creationId xmlns:a16="http://schemas.microsoft.com/office/drawing/2014/main" id="{0E29DA6E-433B-7E73-CADF-4AF29CB5C2AC}"/>
+              </a:ext>
+            </a:extLst>
+          </p:cNvPr>
+          <p:cNvSpPr txBox="1"/>
+          <p:nvPr/>
+        </p:nvSpPr>
+        <p:spPr>
+          <a:xfrm>
+            <a:off x="217714" y="255046"/>
+            <a:ext cx="11756571" cy="355354"/>
+          </a:xfrm>
+          <a:prstGeom prst="rect">
+            <a:avLst/>
+          </a:prstGeom>
+          <a:noFill/>
+        </p:spPr>
+        <p:txBody>
+          <a:bodyPr wrap="square">
+            <a:spAutoFit/>
+          </a:bodyPr>
+          <a:lstStyle/>
+          <a:p>
+            <a:pPr>
+              <a:lnSpc>
+                <a:spcPct val="150000"/>
+              </a:lnSpc>
+              <a:buNone/>
+            </a:pPr>
+            <a:r>
               <a:rPr kumimoji="0" lang="en-US" altLang="en-US" sz="1300" b="0" i="0" u="none" strike="noStrike" cap="none" normalizeH="0" baseline="0">
                 <a:ln>
                   <a:noFill/>
@@ -3387,7 +5750,93 @@
     </p:spTree>
     <p:extLst>
       <p:ext uri="{BB962C8B-B14F-4D97-AF65-F5344CB8AC3E}">
-        <p14:creationId xmlns:p14="http://schemas.microsoft.com/office/powerpoint/2010/main" val="3863838039"/>
+        <p14:creationId xmlns:p14="http://schemas.microsoft.com/office/powerpoint/2010/main" val="810249119"/>
+      </p:ext>
+    </p:extLst>
+  </p:cSld>
+  <p:clrMapOvr>
+    <a:masterClrMapping/>
+  </p:clrMapOvr>
+</p:sld>
+</file>
+
+<file path=ppt/slides/slide16.xml><?xml version="1.0" encoding="utf-8"?>
+<p:sld xmlns:a="http://schemas.openxmlformats.org/drawingml/2006/main" xmlns:r="http://schemas.openxmlformats.org/officeDocument/2006/relationships" xmlns:p="http://schemas.openxmlformats.org/presentationml/2006/main">
+  <p:cSld>
+    <p:spTree>
+      <p:nvGrpSpPr>
+        <p:cNvPr id="1" name="">
+          <a:extLst>
+            <a:ext uri="{FF2B5EF4-FFF2-40B4-BE49-F238E27FC236}">
+              <a16:creationId xmlns:a16="http://schemas.microsoft.com/office/drawing/2014/main" id="{82D8287F-5C12-0037-D6EC-8E4F2D06E6FC}"/>
+            </a:ext>
+          </a:extLst>
+        </p:cNvPr>
+        <p:cNvGrpSpPr/>
+        <p:nvPr/>
+      </p:nvGrpSpPr>
+      <p:grpSpPr>
+        <a:xfrm>
+          <a:off x="0" y="0"/>
+          <a:ext cx="0" cy="0"/>
+          <a:chOff x="0" y="0"/>
+          <a:chExt cx="0" cy="0"/>
+        </a:xfrm>
+      </p:grpSpPr>
+      <p:sp>
+        <p:nvSpPr>
+          <p:cNvPr id="3" name="TextBox 2">
+            <a:extLst>
+              <a:ext uri="{FF2B5EF4-FFF2-40B4-BE49-F238E27FC236}">
+                <a16:creationId xmlns:a16="http://schemas.microsoft.com/office/drawing/2014/main" id="{780106D9-D199-ED58-C4E7-B638047E7922}"/>
+              </a:ext>
+            </a:extLst>
+          </p:cNvPr>
+          <p:cNvSpPr txBox="1"/>
+          <p:nvPr/>
+        </p:nvSpPr>
+        <p:spPr>
+          <a:xfrm>
+            <a:off x="217714" y="255046"/>
+            <a:ext cx="11756571" cy="355354"/>
+          </a:xfrm>
+          <a:prstGeom prst="rect">
+            <a:avLst/>
+          </a:prstGeom>
+          <a:noFill/>
+        </p:spPr>
+        <p:txBody>
+          <a:bodyPr wrap="square">
+            <a:spAutoFit/>
+          </a:bodyPr>
+          <a:lstStyle/>
+          <a:p>
+            <a:pPr>
+              <a:lnSpc>
+                <a:spcPct val="150000"/>
+              </a:lnSpc>
+              <a:buNone/>
+            </a:pPr>
+            <a:r>
+              <a:rPr kumimoji="0" lang="en-US" altLang="en-US" sz="1300" b="0" i="0" u="none" strike="noStrike" cap="none" normalizeH="0" baseline="0">
+                <a:ln>
+                  <a:noFill/>
+                </a:ln>
+                <a:solidFill>
+                  <a:schemeClr val="tx1"/>
+                </a:solidFill>
+                <a:effectLst/>
+                <a:latin typeface="Arial" panose="020B0604020202020204" pitchFamily="34" charset="0"/>
+              </a:rPr>
+              <a:t>.</a:t>
+            </a:r>
+          </a:p>
+        </p:txBody>
+      </p:sp>
+    </p:spTree>
+    <p:extLst>
+      <p:ext uri="{BB962C8B-B14F-4D97-AF65-F5344CB8AC3E}">
+        <p14:creationId xmlns:p14="http://schemas.microsoft.com/office/powerpoint/2010/main" val="3336331324"/>
       </p:ext>
     </p:extLst>
   </p:cSld>
@@ -3435,7 +5884,7 @@
         <p:spPr>
           <a:xfrm>
             <a:off x="217714" y="255046"/>
-            <a:ext cx="11756571" cy="355354"/>
+            <a:ext cx="11756571" cy="3286925"/>
           </a:xfrm>
           <a:prstGeom prst="rect">
             <a:avLst/>
@@ -3455,7 +5904,77 @@
               <a:buNone/>
             </a:pPr>
             <a:r>
-              <a:rPr kumimoji="0" lang="en-US" altLang="en-US" sz="1300" b="0" i="0" u="none" strike="noStrike" cap="none" normalizeH="0" baseline="0">
+              <a:rPr lang="az-Latn-AZ" altLang="en-US" sz="1300">
+                <a:latin typeface="Arial" panose="020B0604020202020204" pitchFamily="34" charset="0"/>
+                <a:cs typeface="Arial" panose="020B0604020202020204" pitchFamily="34" charset="0"/>
+              </a:rPr>
+              <a:t>`</a:t>
+            </a:r>
+            <a:r>
+              <a:rPr lang="en-US" altLang="en-US" sz="1300" b="1">
+                <a:latin typeface="Arial" panose="020B0604020202020204" pitchFamily="34" charset="0"/>
+                <a:cs typeface="Arial" panose="020B0604020202020204" pitchFamily="34" charset="0"/>
+              </a:rPr>
+              <a:t>ImageUploadTrait.php</a:t>
+            </a:r>
+            <a:r>
+              <a:rPr lang="az-Latn-AZ" altLang="en-US" sz="1300">
+                <a:latin typeface="Arial" panose="020B0604020202020204" pitchFamily="34" charset="0"/>
+                <a:cs typeface="Arial" panose="020B0604020202020204" pitchFamily="34" charset="0"/>
+              </a:rPr>
+              <a:t>` adlı </a:t>
+            </a:r>
+            <a:r>
+              <a:rPr lang="az-Latn-AZ" altLang="en-US" sz="1300" b="1">
+                <a:latin typeface="Arial" panose="020B0604020202020204" pitchFamily="34" charset="0"/>
+                <a:cs typeface="Arial" panose="020B0604020202020204" pitchFamily="34" charset="0"/>
+              </a:rPr>
+              <a:t>traits</a:t>
+            </a:r>
+            <a:r>
+              <a:rPr lang="az-Latn-AZ" altLang="en-US" sz="1300">
+                <a:latin typeface="Arial" panose="020B0604020202020204" pitchFamily="34" charset="0"/>
+                <a:cs typeface="Arial" panose="020B0604020202020204" pitchFamily="34" charset="0"/>
+              </a:rPr>
+              <a:t>, `</a:t>
+            </a:r>
+            <a:r>
+              <a:rPr lang="en-US" altLang="en-US" sz="1300" b="1">
+                <a:latin typeface="Arial" panose="020B0604020202020204" pitchFamily="34" charset="0"/>
+                <a:cs typeface="Arial" panose="020B0604020202020204" pitchFamily="34" charset="0"/>
+              </a:rPr>
+              <a:t>SliderController.php</a:t>
+            </a:r>
+            <a:r>
+              <a:rPr lang="az-Latn-AZ" altLang="en-US" sz="1300">
+                <a:latin typeface="Arial" panose="020B0604020202020204" pitchFamily="34" charset="0"/>
+                <a:cs typeface="Arial" panose="020B0604020202020204" pitchFamily="34" charset="0"/>
+              </a:rPr>
+              <a:t>` klasında çağrılır və ona 3 dənə </a:t>
+            </a:r>
+            <a:r>
+              <a:rPr lang="az-Latn-AZ" altLang="en-US" sz="1300" b="1">
+                <a:latin typeface="Arial" panose="020B0604020202020204" pitchFamily="34" charset="0"/>
+                <a:cs typeface="Arial" panose="020B0604020202020204" pitchFamily="34" charset="0"/>
+              </a:rPr>
+              <a:t>arqument</a:t>
+            </a:r>
+            <a:r>
+              <a:rPr lang="az-Latn-AZ" altLang="en-US" sz="1300">
+                <a:latin typeface="Arial" panose="020B0604020202020204" pitchFamily="34" charset="0"/>
+                <a:cs typeface="Arial" panose="020B0604020202020204" pitchFamily="34" charset="0"/>
+              </a:rPr>
+              <a:t> göndərilir. Burada bizə yad olan hissə sadəcə: </a:t>
+            </a:r>
+          </a:p>
+          <a:p>
+            <a:pPr>
+              <a:lnSpc>
+                <a:spcPct val="150000"/>
+              </a:lnSpc>
+            </a:pPr>
+            <a:r>
+              <a:rPr kumimoji="0" lang="az-Latn-AZ" altLang="en-US" sz="1300" b="0" i="0" u="none" strike="noStrike" cap="none" normalizeH="0" baseline="0">
                 <a:ln>
                   <a:noFill/>
                 </a:ln>
@@ -3464,12 +5983,330 @@
                 </a:solidFill>
                 <a:effectLst/>
                 <a:latin typeface="Arial" panose="020B0604020202020204" pitchFamily="34" charset="0"/>
-              </a:rPr>
-              <a:t>.</a:t>
-            </a:r>
+                <a:cs typeface="Arial" panose="020B0604020202020204" pitchFamily="34" charset="0"/>
+              </a:rPr>
+              <a:t>	</a:t>
+            </a:r>
+            <a:r>
+              <a:rPr lang="en-US">
+                <a:latin typeface="Arial" panose="020B0604020202020204" pitchFamily="34" charset="0"/>
+                <a:cs typeface="Arial" panose="020B0604020202020204" pitchFamily="34" charset="0"/>
+              </a:rPr>
+              <a:t>  </a:t>
+            </a:r>
+            <a:r>
+              <a:rPr lang="en-US" b="1">
+                <a:solidFill>
+                  <a:srgbClr val="00B050"/>
+                </a:solidFill>
+                <a:latin typeface="Arial" panose="020B0604020202020204" pitchFamily="34" charset="0"/>
+                <a:cs typeface="Arial" panose="020B0604020202020204" pitchFamily="34" charset="0"/>
+              </a:rPr>
+              <a:t>$image = $request-&gt;</a:t>
+            </a:r>
+            <a:r>
+              <a:rPr lang="en-US" b="1">
+                <a:solidFill>
+                  <a:srgbClr val="FF0000"/>
+                </a:solidFill>
+                <a:latin typeface="Arial" panose="020B0604020202020204" pitchFamily="34" charset="0"/>
+                <a:cs typeface="Arial" panose="020B0604020202020204" pitchFamily="34" charset="0"/>
+              </a:rPr>
+              <a:t>{</a:t>
+            </a:r>
+            <a:r>
+              <a:rPr lang="en-US" b="1">
+                <a:solidFill>
+                  <a:srgbClr val="0070C0"/>
+                </a:solidFill>
+                <a:latin typeface="Arial" panose="020B0604020202020204" pitchFamily="34" charset="0"/>
+                <a:cs typeface="Arial" panose="020B0604020202020204" pitchFamily="34" charset="0"/>
+              </a:rPr>
+              <a:t>$inputName</a:t>
+            </a:r>
+            <a:r>
+              <a:rPr lang="en-US" b="1">
+                <a:solidFill>
+                  <a:srgbClr val="FF0000"/>
+                </a:solidFill>
+                <a:latin typeface="Arial" panose="020B0604020202020204" pitchFamily="34" charset="0"/>
+                <a:cs typeface="Arial" panose="020B0604020202020204" pitchFamily="34" charset="0"/>
+              </a:rPr>
+              <a:t>}</a:t>
+            </a:r>
+            <a:r>
+              <a:rPr lang="en-US" b="1">
+                <a:solidFill>
+                  <a:srgbClr val="00B050"/>
+                </a:solidFill>
+                <a:latin typeface="Arial" panose="020B0604020202020204" pitchFamily="34" charset="0"/>
+                <a:cs typeface="Arial" panose="020B0604020202020204" pitchFamily="34" charset="0"/>
+              </a:rPr>
+              <a:t>;</a:t>
+            </a:r>
+            <a:endParaRPr lang="az-Latn-AZ" b="1">
+              <a:solidFill>
+                <a:srgbClr val="00B050"/>
+              </a:solidFill>
+              <a:latin typeface="Arial" panose="020B0604020202020204" pitchFamily="34" charset="0"/>
+              <a:cs typeface="Arial" panose="020B0604020202020204" pitchFamily="34" charset="0"/>
+            </a:endParaRPr>
+          </a:p>
+          <a:p>
+            <a:pPr>
+              <a:lnSpc>
+                <a:spcPct val="150000"/>
+              </a:lnSpc>
+            </a:pPr>
+            <a:endParaRPr lang="en-US" b="1">
+              <a:solidFill>
+                <a:srgbClr val="00B050"/>
+              </a:solidFill>
+              <a:latin typeface="Arial" panose="020B0604020202020204" pitchFamily="34" charset="0"/>
+              <a:cs typeface="Arial" panose="020B0604020202020204" pitchFamily="34" charset="0"/>
+            </a:endParaRPr>
+          </a:p>
+          <a:p>
+            <a:pPr>
+              <a:lnSpc>
+                <a:spcPct val="150000"/>
+              </a:lnSpc>
+              <a:buNone/>
+            </a:pPr>
+            <a:r>
+              <a:rPr lang="az-Latn-AZ" altLang="en-US" sz="1300">
+                <a:latin typeface="Arial" panose="020B0604020202020204" pitchFamily="34" charset="0"/>
+                <a:cs typeface="Arial" panose="020B0604020202020204" pitchFamily="34" charset="0"/>
+              </a:rPr>
+              <a:t>bu hissə ola bilər. Çünki </a:t>
+            </a:r>
+            <a:r>
+              <a:rPr lang="az-Latn-AZ" altLang="en-US" sz="1300" b="1">
+                <a:latin typeface="Arial" panose="020B0604020202020204" pitchFamily="34" charset="0"/>
+                <a:cs typeface="Arial" panose="020B0604020202020204" pitchFamily="34" charset="0"/>
+              </a:rPr>
+              <a:t>STRİNG</a:t>
+            </a:r>
+            <a:r>
+              <a:rPr lang="az-Latn-AZ" altLang="en-US" sz="1300">
+                <a:latin typeface="Arial" panose="020B0604020202020204" pitchFamily="34" charset="0"/>
+                <a:cs typeface="Arial" panose="020B0604020202020204" pitchFamily="34" charset="0"/>
+              </a:rPr>
+              <a:t> göndəririk, acnaq onu </a:t>
+            </a:r>
+            <a:r>
+              <a:rPr lang="en-US" altLang="en-US" sz="1300" b="1">
+                <a:solidFill>
+                  <a:srgbClr val="FF0000"/>
+                </a:solidFill>
+                <a:latin typeface="Arial" panose="020B0604020202020204" pitchFamily="34" charset="0"/>
+                <a:cs typeface="Arial" panose="020B0604020202020204" pitchFamily="34" charset="0"/>
+              </a:rPr>
+              <a:t>{</a:t>
+            </a:r>
+            <a:r>
+              <a:rPr lang="en-US" altLang="en-US" sz="1300">
+                <a:latin typeface="Arial" panose="020B0604020202020204" pitchFamily="34" charset="0"/>
+                <a:cs typeface="Arial" panose="020B0604020202020204" pitchFamily="34" charset="0"/>
+              </a:rPr>
+              <a:t> </a:t>
+            </a:r>
+            <a:r>
+              <a:rPr lang="az-Latn-AZ" altLang="en-US" sz="1300">
+                <a:latin typeface="Arial" panose="020B0604020202020204" pitchFamily="34" charset="0"/>
+                <a:cs typeface="Arial" panose="020B0604020202020204" pitchFamily="34" charset="0"/>
+              </a:rPr>
+              <a:t>bəzəkli mörtərizə</a:t>
+            </a:r>
+            <a:r>
+              <a:rPr lang="en-US" altLang="en-US" sz="1300">
+                <a:latin typeface="Arial" panose="020B0604020202020204" pitchFamily="34" charset="0"/>
+                <a:cs typeface="Arial" panose="020B0604020202020204" pitchFamily="34" charset="0"/>
+              </a:rPr>
+              <a:t> </a:t>
+            </a:r>
+            <a:r>
+              <a:rPr lang="en-US" altLang="en-US" sz="1300" b="1">
+                <a:solidFill>
+                  <a:srgbClr val="FF0000"/>
+                </a:solidFill>
+                <a:latin typeface="Arial" panose="020B0604020202020204" pitchFamily="34" charset="0"/>
+                <a:cs typeface="Arial" panose="020B0604020202020204" pitchFamily="34" charset="0"/>
+              </a:rPr>
+              <a:t>}</a:t>
+            </a:r>
+            <a:r>
+              <a:rPr lang="az-Latn-AZ" altLang="en-US" sz="1300">
+                <a:latin typeface="Arial" panose="020B0604020202020204" pitchFamily="34" charset="0"/>
+                <a:cs typeface="Arial" panose="020B0604020202020204" pitchFamily="34" charset="0"/>
+              </a:rPr>
+              <a:t> içində yazmışıq. Bu sintaksis, PHP-də "</a:t>
+            </a:r>
+            <a:r>
+              <a:rPr lang="az-Latn-AZ" altLang="en-US" sz="1300" b="1">
+                <a:solidFill>
+                  <a:srgbClr val="0070C0"/>
+                </a:solidFill>
+                <a:latin typeface="Arial" panose="020B0604020202020204" pitchFamily="34" charset="0"/>
+                <a:cs typeface="Arial" panose="020B0604020202020204" pitchFamily="34" charset="0"/>
+              </a:rPr>
+              <a:t>dinamik property əldə edilməsi</a:t>
+            </a:r>
+            <a:r>
+              <a:rPr lang="az-Latn-AZ" altLang="en-US" sz="1300">
+                <a:latin typeface="Arial" panose="020B0604020202020204" pitchFamily="34" charset="0"/>
+                <a:cs typeface="Arial" panose="020B0604020202020204" pitchFamily="34" charset="0"/>
+              </a:rPr>
+              <a:t>" adlanır. Əslində isə, aşağıdakı hər 2 halda da, yazsaq kodumuz düz işləyəcəkdi:</a:t>
+            </a:r>
+            <a:endParaRPr lang="en-US" altLang="en-US" sz="1300">
+              <a:latin typeface="Arial" panose="020B0604020202020204" pitchFamily="34" charset="0"/>
+              <a:cs typeface="Arial" panose="020B0604020202020204" pitchFamily="34" charset="0"/>
+            </a:endParaRPr>
+          </a:p>
+          <a:p>
+            <a:pPr>
+              <a:lnSpc>
+                <a:spcPct val="150000"/>
+              </a:lnSpc>
+              <a:buNone/>
+            </a:pPr>
+            <a:endParaRPr kumimoji="0" lang="en-US" altLang="en-US" sz="1300" b="0" i="0" u="none" strike="noStrike" cap="none" normalizeH="0" baseline="0">
+              <a:ln>
+                <a:noFill/>
+              </a:ln>
+              <a:solidFill>
+                <a:schemeClr val="tx1"/>
+              </a:solidFill>
+              <a:effectLst/>
+              <a:latin typeface="Arial" panose="020B0604020202020204" pitchFamily="34" charset="0"/>
+              <a:cs typeface="Arial" panose="020B0604020202020204" pitchFamily="34" charset="0"/>
+            </a:endParaRPr>
+          </a:p>
+          <a:p>
+            <a:pPr>
+              <a:lnSpc>
+                <a:spcPct val="150000"/>
+              </a:lnSpc>
+              <a:buNone/>
+            </a:pPr>
+            <a:endParaRPr lang="en-US" altLang="en-US" sz="1300">
+              <a:latin typeface="Arial" panose="020B0604020202020204" pitchFamily="34" charset="0"/>
+              <a:cs typeface="Arial" panose="020B0604020202020204" pitchFamily="34" charset="0"/>
+            </a:endParaRPr>
+          </a:p>
+          <a:p>
+            <a:pPr>
+              <a:lnSpc>
+                <a:spcPct val="150000"/>
+              </a:lnSpc>
+              <a:buNone/>
+            </a:pPr>
+            <a:endParaRPr kumimoji="0" lang="en-US" altLang="en-US" sz="1300" b="0" i="0" u="none" strike="noStrike" cap="none" normalizeH="0" baseline="0">
+              <a:ln>
+                <a:noFill/>
+              </a:ln>
+              <a:solidFill>
+                <a:schemeClr val="tx1"/>
+              </a:solidFill>
+              <a:effectLst/>
+              <a:latin typeface="Arial" panose="020B0604020202020204" pitchFamily="34" charset="0"/>
+              <a:cs typeface="Arial" panose="020B0604020202020204" pitchFamily="34" charset="0"/>
+            </a:endParaRPr>
+          </a:p>
+          <a:p>
+            <a:pPr>
+              <a:lnSpc>
+                <a:spcPct val="150000"/>
+              </a:lnSpc>
+              <a:buNone/>
+            </a:pPr>
+            <a:endParaRPr lang="en-US" altLang="en-US" sz="1300">
+              <a:latin typeface="Arial" panose="020B0604020202020204" pitchFamily="34" charset="0"/>
+              <a:cs typeface="Arial" panose="020B0604020202020204" pitchFamily="34" charset="0"/>
+            </a:endParaRPr>
+          </a:p>
+          <a:p>
+            <a:pPr>
+              <a:lnSpc>
+                <a:spcPct val="150000"/>
+              </a:lnSpc>
+              <a:buNone/>
+            </a:pPr>
+            <a:endParaRPr kumimoji="0" lang="en-US" altLang="en-US" sz="1300" b="0" i="0" u="none" strike="noStrike" cap="none" normalizeH="0" baseline="0">
+              <a:ln>
+                <a:noFill/>
+              </a:ln>
+              <a:solidFill>
+                <a:schemeClr val="tx1"/>
+              </a:solidFill>
+              <a:effectLst/>
+              <a:latin typeface="Arial" panose="020B0604020202020204" pitchFamily="34" charset="0"/>
+              <a:cs typeface="Arial" panose="020B0604020202020204" pitchFamily="34" charset="0"/>
+            </a:endParaRPr>
           </a:p>
         </p:txBody>
       </p:sp>
+      <p:pic>
+        <p:nvPicPr>
+          <p:cNvPr id="4" name="Picture 3">
+            <a:extLst>
+              <a:ext uri="{FF2B5EF4-FFF2-40B4-BE49-F238E27FC236}">
+                <a16:creationId xmlns:a16="http://schemas.microsoft.com/office/drawing/2014/main" id="{3CBD88D1-E9C3-AF70-1DD2-412B6A7E4296}"/>
+              </a:ext>
+            </a:extLst>
+          </p:cNvPr>
+          <p:cNvPicPr>
+            <a:picLocks noChangeAspect="1"/>
+          </p:cNvPicPr>
+          <p:nvPr/>
+        </p:nvPicPr>
+        <p:blipFill>
+          <a:blip r:embed="rId2"/>
+          <a:stretch>
+            <a:fillRect/>
+          </a:stretch>
+        </p:blipFill>
+        <p:spPr>
+          <a:xfrm>
+            <a:off x="3744325" y="2355273"/>
+            <a:ext cx="8447673" cy="4502727"/>
+          </a:xfrm>
+          <a:prstGeom prst="rect">
+            <a:avLst/>
+          </a:prstGeom>
+        </p:spPr>
+      </p:pic>
+      <p:pic>
+        <p:nvPicPr>
+          <p:cNvPr id="6" name="Picture 5">
+            <a:extLst>
+              <a:ext uri="{FF2B5EF4-FFF2-40B4-BE49-F238E27FC236}">
+                <a16:creationId xmlns:a16="http://schemas.microsoft.com/office/drawing/2014/main" id="{4A4291FD-3A70-05DE-8E24-D606954B299F}"/>
+              </a:ext>
+            </a:extLst>
+          </p:cNvPr>
+          <p:cNvPicPr>
+            <a:picLocks noChangeAspect="1"/>
+          </p:cNvPicPr>
+          <p:nvPr/>
+        </p:nvPicPr>
+        <p:blipFill>
+          <a:blip r:embed="rId3"/>
+          <a:stretch>
+            <a:fillRect/>
+          </a:stretch>
+        </p:blipFill>
+        <p:spPr>
+          <a:xfrm>
+            <a:off x="217714" y="2130525"/>
+            <a:ext cx="2829320" cy="657317"/>
+          </a:xfrm>
+          <a:prstGeom prst="rect">
+            <a:avLst/>
+          </a:prstGeom>
+        </p:spPr>
+      </p:pic>
     </p:spTree>
     <p:extLst>
       <p:ext uri="{BB962C8B-B14F-4D97-AF65-F5344CB8AC3E}">
@@ -3491,7 +6328,7 @@
         <p:cNvPr id="1" name="">
           <a:extLst>
             <a:ext uri="{FF2B5EF4-FFF2-40B4-BE49-F238E27FC236}">
-              <a16:creationId xmlns:a16="http://schemas.microsoft.com/office/drawing/2014/main" id="{ECE25D7D-A080-F22B-7E8D-36EC827289A1}"/>
+              <a16:creationId xmlns:a16="http://schemas.microsoft.com/office/drawing/2014/main" id="{EB0FF47B-85C3-AA11-9D71-B9214A1CEC79}"/>
             </a:ext>
           </a:extLst>
         </p:cNvPr>
@@ -3511,7 +6348,2126 @@
           <p:cNvPr id="3" name="TextBox 2">
             <a:extLst>
               <a:ext uri="{FF2B5EF4-FFF2-40B4-BE49-F238E27FC236}">
-                <a16:creationId xmlns:a16="http://schemas.microsoft.com/office/drawing/2014/main" id="{E33F16A3-A6E8-401E-847B-09570DC6E4CB}"/>
+                <a16:creationId xmlns:a16="http://schemas.microsoft.com/office/drawing/2014/main" id="{5739CC21-5EF9-351C-4BB2-6E58BD549D73}"/>
+              </a:ext>
+            </a:extLst>
+          </p:cNvPr>
+          <p:cNvSpPr txBox="1"/>
+          <p:nvPr/>
+        </p:nvSpPr>
+        <p:spPr>
+          <a:xfrm>
+            <a:off x="217714" y="255046"/>
+            <a:ext cx="11756571" cy="5756832"/>
+          </a:xfrm>
+          <a:prstGeom prst="rect">
+            <a:avLst/>
+          </a:prstGeom>
+          <a:noFill/>
+        </p:spPr>
+        <p:txBody>
+          <a:bodyPr wrap="square">
+            <a:spAutoFit/>
+          </a:bodyPr>
+          <a:lstStyle/>
+          <a:p>
+            <a:pPr>
+              <a:lnSpc>
+                <a:spcPct val="150000"/>
+              </a:lnSpc>
+              <a:buNone/>
+            </a:pPr>
+            <a:r>
+              <a:rPr lang="az-Latn-AZ" altLang="en-US" sz="1300">
+                <a:latin typeface="Arial" panose="020B0604020202020204" pitchFamily="34" charset="0"/>
+              </a:rPr>
+              <a:t>Əgər hər iki yazılış işləyirsə: Onda nə üçün əlavə olaraq </a:t>
+            </a:r>
+            <a:r>
+              <a:rPr lang="en-US" altLang="en-US" sz="1300">
+                <a:latin typeface="Arial" panose="020B0604020202020204" pitchFamily="34" charset="0"/>
+              </a:rPr>
+              <a:t> </a:t>
+            </a:r>
+            <a:r>
+              <a:rPr lang="en-US" altLang="en-US" sz="1300" b="1">
+                <a:solidFill>
+                  <a:srgbClr val="FF0000"/>
+                </a:solidFill>
+                <a:latin typeface="Arial" panose="020B0604020202020204" pitchFamily="34" charset="0"/>
+              </a:rPr>
+              <a:t>{ } </a:t>
+            </a:r>
+            <a:r>
+              <a:rPr lang="az-Latn-AZ" altLang="en-US" sz="1300">
+                <a:latin typeface="Arial" panose="020B0604020202020204" pitchFamily="34" charset="0"/>
+              </a:rPr>
+              <a:t> yazmaq lazımdır?</a:t>
+            </a:r>
+            <a:endParaRPr lang="en-US" altLang="en-US" sz="1300">
+              <a:latin typeface="Arial" panose="020B0604020202020204" pitchFamily="34" charset="0"/>
+            </a:endParaRPr>
+          </a:p>
+          <a:p>
+            <a:pPr>
+              <a:lnSpc>
+                <a:spcPct val="150000"/>
+              </a:lnSpc>
+              <a:buNone/>
+            </a:pPr>
+            <a:endParaRPr kumimoji="0" lang="en-US" altLang="en-US" sz="1300" b="0" i="0" u="none" strike="noStrike" cap="none" normalizeH="0" baseline="0">
+              <a:ln>
+                <a:noFill/>
+              </a:ln>
+              <a:solidFill>
+                <a:schemeClr val="tx1"/>
+              </a:solidFill>
+              <a:effectLst/>
+              <a:latin typeface="Arial" panose="020B0604020202020204" pitchFamily="34" charset="0"/>
+            </a:endParaRPr>
+          </a:p>
+          <a:p>
+            <a:pPr>
+              <a:lnSpc>
+                <a:spcPct val="150000"/>
+              </a:lnSpc>
+              <a:buNone/>
+            </a:pPr>
+            <a:r>
+              <a:rPr lang="en-US" altLang="en-US" sz="1300">
+                <a:latin typeface="Arial" panose="020B0604020202020204" pitchFamily="34" charset="0"/>
+              </a:rPr>
+              <a:t>Hər </a:t>
+            </a:r>
+            <a:r>
+              <a:rPr lang="en-US" altLang="en-US" sz="1300" b="1">
+                <a:latin typeface="Arial" panose="020B0604020202020204" pitchFamily="34" charset="0"/>
+              </a:rPr>
+              <a:t>iki</a:t>
+            </a:r>
+            <a:r>
+              <a:rPr lang="en-US" altLang="en-US" sz="1300">
+                <a:latin typeface="Arial" panose="020B0604020202020204" pitchFamily="34" charset="0"/>
+              </a:rPr>
+              <a:t> yazılış sadə hallarda işləyir. Amma </a:t>
+            </a:r>
+            <a:r>
+              <a:rPr lang="en-US" altLang="en-US" sz="1300" b="1">
+                <a:solidFill>
+                  <a:srgbClr val="FF0000"/>
+                </a:solidFill>
+                <a:latin typeface="Arial" panose="020B0604020202020204" pitchFamily="34" charset="0"/>
+              </a:rPr>
+              <a:t>{ }</a:t>
+            </a:r>
+            <a:r>
+              <a:rPr lang="en-US" altLang="en-US" sz="1300">
+                <a:latin typeface="Arial" panose="020B0604020202020204" pitchFamily="34" charset="0"/>
+              </a:rPr>
+              <a:t> sintaksisi çox daha güclüdür, çünki onu daha </a:t>
+            </a:r>
+            <a:r>
+              <a:rPr lang="en-US" altLang="en-US" sz="1300" b="1">
+                <a:latin typeface="Arial" panose="020B0604020202020204" pitchFamily="34" charset="0"/>
+              </a:rPr>
+              <a:t>kompleks ifadələrdə</a:t>
+            </a:r>
+            <a:r>
+              <a:rPr lang="en-US" altLang="en-US" sz="1300">
+                <a:latin typeface="Arial" panose="020B0604020202020204" pitchFamily="34" charset="0"/>
+              </a:rPr>
+              <a:t>, </a:t>
+            </a:r>
+            <a:r>
+              <a:rPr lang="en-US" altLang="en-US" sz="1300" b="1">
+                <a:latin typeface="Arial" panose="020B0604020202020204" pitchFamily="34" charset="0"/>
+              </a:rPr>
+              <a:t>array daxilində</a:t>
+            </a:r>
+            <a:r>
+              <a:rPr lang="en-US" altLang="en-US" sz="1300">
+                <a:latin typeface="Arial" panose="020B0604020202020204" pitchFamily="34" charset="0"/>
+              </a:rPr>
+              <a:t>, birlikdə </a:t>
+            </a:r>
+            <a:r>
+              <a:rPr lang="en-US" altLang="en-US" sz="1300" b="1">
+                <a:latin typeface="Arial" panose="020B0604020202020204" pitchFamily="34" charset="0"/>
+              </a:rPr>
+              <a:t>concatenation</a:t>
+            </a:r>
+            <a:r>
+              <a:rPr lang="en-US" altLang="en-US" sz="1300">
+                <a:latin typeface="Arial" panose="020B0604020202020204" pitchFamily="34" charset="0"/>
+              </a:rPr>
+              <a:t> (birləşdirmə) və ya </a:t>
+            </a:r>
+            <a:r>
+              <a:rPr lang="en-US" altLang="en-US" sz="1300" b="1">
+                <a:latin typeface="Arial" panose="020B0604020202020204" pitchFamily="34" charset="0"/>
+              </a:rPr>
+              <a:t>çoxlu səviyyəli property-lər</a:t>
+            </a:r>
+            <a:r>
+              <a:rPr lang="en-US" altLang="en-US" sz="1300">
+                <a:latin typeface="Arial" panose="020B0604020202020204" pitchFamily="34" charset="0"/>
+              </a:rPr>
+              <a:t> olan hallarda PHP qarışdırmır.</a:t>
+            </a:r>
+          </a:p>
+          <a:p>
+            <a:pPr>
+              <a:lnSpc>
+                <a:spcPct val="150000"/>
+              </a:lnSpc>
+              <a:buNone/>
+            </a:pPr>
+            <a:endParaRPr kumimoji="0" lang="az-Latn-AZ" altLang="en-US" sz="1300" b="0" i="0" u="none" strike="noStrike" cap="none" normalizeH="0" baseline="0">
+              <a:ln>
+                <a:noFill/>
+              </a:ln>
+              <a:solidFill>
+                <a:schemeClr val="tx1"/>
+              </a:solidFill>
+              <a:effectLst/>
+              <a:latin typeface="Arial" panose="020B0604020202020204" pitchFamily="34" charset="0"/>
+            </a:endParaRPr>
+          </a:p>
+          <a:p>
+            <a:pPr>
+              <a:lnSpc>
+                <a:spcPct val="150000"/>
+              </a:lnSpc>
+              <a:buNone/>
+            </a:pPr>
+            <a:endParaRPr kumimoji="0" lang="en-US" altLang="en-US" sz="1300" b="0" i="0" u="none" strike="noStrike" cap="none" normalizeH="0" baseline="0">
+              <a:ln>
+                <a:noFill/>
+              </a:ln>
+              <a:solidFill>
+                <a:schemeClr val="tx1"/>
+              </a:solidFill>
+              <a:effectLst/>
+              <a:latin typeface="Arial" panose="020B0604020202020204" pitchFamily="34" charset="0"/>
+            </a:endParaRPr>
+          </a:p>
+          <a:p>
+            <a:pPr>
+              <a:lnSpc>
+                <a:spcPct val="150000"/>
+              </a:lnSpc>
+              <a:buNone/>
+            </a:pPr>
+            <a:r>
+              <a:rPr lang="en-US" altLang="en-US" sz="1300">
+                <a:latin typeface="Arial" panose="020B0604020202020204" pitchFamily="34" charset="0"/>
+              </a:rPr>
+              <a:t>Əsas Fərq: PHP-nin parslama (təhlil etmə) davranışın</a:t>
+            </a:r>
+            <a:r>
+              <a:rPr lang="az-Latn-AZ" altLang="en-US" sz="1300">
+                <a:latin typeface="Arial" panose="020B0604020202020204" pitchFamily="34" charset="0"/>
+              </a:rPr>
+              <a:t>dadır. Sadə halda:</a:t>
+            </a:r>
+          </a:p>
+          <a:p>
+            <a:pPr>
+              <a:lnSpc>
+                <a:spcPct val="150000"/>
+              </a:lnSpc>
+              <a:buNone/>
+            </a:pPr>
+            <a:endParaRPr kumimoji="0" lang="az-Latn-AZ" altLang="en-US" sz="1300" b="0" i="0" u="none" strike="noStrike" cap="none" normalizeH="0" baseline="0">
+              <a:ln>
+                <a:noFill/>
+              </a:ln>
+              <a:solidFill>
+                <a:schemeClr val="tx1"/>
+              </a:solidFill>
+              <a:effectLst/>
+              <a:latin typeface="Arial" panose="020B0604020202020204" pitchFamily="34" charset="0"/>
+            </a:endParaRPr>
+          </a:p>
+          <a:p>
+            <a:pPr>
+              <a:lnSpc>
+                <a:spcPct val="150000"/>
+              </a:lnSpc>
+              <a:buNone/>
+            </a:pPr>
+            <a:endParaRPr lang="az-Latn-AZ" altLang="en-US" sz="1300">
+              <a:latin typeface="Arial" panose="020B0604020202020204" pitchFamily="34" charset="0"/>
+            </a:endParaRPr>
+          </a:p>
+          <a:p>
+            <a:pPr>
+              <a:lnSpc>
+                <a:spcPct val="150000"/>
+              </a:lnSpc>
+              <a:buNone/>
+            </a:pPr>
+            <a:endParaRPr kumimoji="0" lang="az-Latn-AZ" altLang="en-US" sz="1300" b="0" i="0" u="none" strike="noStrike" cap="none" normalizeH="0" baseline="0">
+              <a:ln>
+                <a:noFill/>
+              </a:ln>
+              <a:solidFill>
+                <a:schemeClr val="tx1"/>
+              </a:solidFill>
+              <a:effectLst/>
+              <a:latin typeface="Arial" panose="020B0604020202020204" pitchFamily="34" charset="0"/>
+            </a:endParaRPr>
+          </a:p>
+          <a:p>
+            <a:pPr>
+              <a:lnSpc>
+                <a:spcPct val="150000"/>
+              </a:lnSpc>
+              <a:buNone/>
+            </a:pPr>
+            <a:endParaRPr lang="az-Latn-AZ" altLang="en-US" sz="1300">
+              <a:latin typeface="Arial" panose="020B0604020202020204" pitchFamily="34" charset="0"/>
+            </a:endParaRPr>
+          </a:p>
+          <a:p>
+            <a:pPr>
+              <a:lnSpc>
+                <a:spcPct val="150000"/>
+              </a:lnSpc>
+              <a:buNone/>
+            </a:pPr>
+            <a:r>
+              <a:rPr lang="en-US" altLang="en-US" sz="1300">
+                <a:latin typeface="Arial" panose="020B0604020202020204" pitchFamily="34" charset="0"/>
+              </a:rPr>
+              <a:t>Hər ikisi: </a:t>
+            </a:r>
+            <a:r>
+              <a:rPr lang="en-US" altLang="en-US" sz="1300" b="1">
+                <a:latin typeface="Arial" panose="020B0604020202020204" pitchFamily="34" charset="0"/>
+              </a:rPr>
+              <a:t>$request-&gt;banner</a:t>
+            </a:r>
+            <a:r>
+              <a:rPr lang="az-Latn-AZ" altLang="en-US" sz="1300" b="1">
+                <a:latin typeface="Arial" panose="020B0604020202020204" pitchFamily="34" charset="0"/>
+              </a:rPr>
+              <a:t> </a:t>
+            </a:r>
+            <a:r>
+              <a:rPr lang="az-Latn-AZ" altLang="en-US" sz="1300">
+                <a:latin typeface="Arial" panose="020B0604020202020204" pitchFamily="34" charset="0"/>
+              </a:rPr>
+              <a:t>bizə verəcək. Yəni bu halda heç bir fərq yoxdur.</a:t>
+            </a:r>
+          </a:p>
+          <a:p>
+            <a:pPr>
+              <a:lnSpc>
+                <a:spcPct val="150000"/>
+              </a:lnSpc>
+              <a:buNone/>
+            </a:pPr>
+            <a:endParaRPr kumimoji="0" lang="az-Latn-AZ" altLang="en-US" sz="1300" b="0" i="0" u="none" strike="noStrike" cap="none" normalizeH="0" baseline="0">
+              <a:ln>
+                <a:noFill/>
+              </a:ln>
+              <a:solidFill>
+                <a:schemeClr val="tx1"/>
+              </a:solidFill>
+              <a:effectLst/>
+              <a:latin typeface="Arial" panose="020B0604020202020204" pitchFamily="34" charset="0"/>
+            </a:endParaRPr>
+          </a:p>
+          <a:p>
+            <a:pPr>
+              <a:lnSpc>
+                <a:spcPct val="150000"/>
+              </a:lnSpc>
+              <a:buNone/>
+            </a:pPr>
+            <a:endParaRPr lang="az-Latn-AZ" altLang="en-US" sz="1300">
+              <a:latin typeface="Arial" panose="020B0604020202020204" pitchFamily="34" charset="0"/>
+            </a:endParaRPr>
+          </a:p>
+          <a:p>
+            <a:pPr>
+              <a:lnSpc>
+                <a:spcPct val="150000"/>
+              </a:lnSpc>
+              <a:buNone/>
+            </a:pPr>
+            <a:r>
+              <a:rPr lang="az-Latn-AZ" altLang="en-US" sz="1300" b="1">
+                <a:solidFill>
+                  <a:srgbClr val="00B050"/>
+                </a:solidFill>
+                <a:latin typeface="Arial" panose="020B0604020202020204" pitchFamily="34" charset="0"/>
+              </a:rPr>
+              <a:t>Bəs</a:t>
+            </a:r>
+            <a:r>
+              <a:rPr lang="en-US" altLang="en-US" sz="1300" b="1">
+                <a:solidFill>
+                  <a:srgbClr val="00B050"/>
+                </a:solidFill>
+                <a:latin typeface="Arial" panose="020B0604020202020204" pitchFamily="34" charset="0"/>
+              </a:rPr>
+              <a:t> bu halda</a:t>
+            </a:r>
+            <a:r>
+              <a:rPr lang="en-US" altLang="en-US" sz="1300">
+                <a:latin typeface="Arial" panose="020B0604020202020204" pitchFamily="34" charset="0"/>
+              </a:rPr>
+              <a:t>?</a:t>
+            </a:r>
+            <a:r>
+              <a:rPr lang="az-Latn-AZ" altLang="en-US" sz="1300">
+                <a:latin typeface="Arial" panose="020B0604020202020204" pitchFamily="34" charset="0"/>
+              </a:rPr>
+              <a:t> </a:t>
+            </a:r>
+          </a:p>
+          <a:p>
+            <a:pPr>
+              <a:lnSpc>
+                <a:spcPct val="150000"/>
+              </a:lnSpc>
+              <a:buNone/>
+            </a:pPr>
+            <a:endParaRPr kumimoji="0" lang="az-Latn-AZ" altLang="en-US" sz="1300" b="0" i="0" u="none" strike="noStrike" cap="none" normalizeH="0" baseline="0">
+              <a:ln>
+                <a:noFill/>
+              </a:ln>
+              <a:solidFill>
+                <a:schemeClr val="tx1"/>
+              </a:solidFill>
+              <a:effectLst/>
+              <a:latin typeface="Arial" panose="020B0604020202020204" pitchFamily="34" charset="0"/>
+            </a:endParaRPr>
+          </a:p>
+          <a:p>
+            <a:pPr>
+              <a:lnSpc>
+                <a:spcPct val="150000"/>
+              </a:lnSpc>
+              <a:buNone/>
+            </a:pPr>
+            <a:endParaRPr lang="az-Latn-AZ" altLang="en-US" sz="1300">
+              <a:latin typeface="Arial" panose="020B0604020202020204" pitchFamily="34" charset="0"/>
+            </a:endParaRPr>
+          </a:p>
+          <a:p>
+            <a:pPr>
+              <a:lnSpc>
+                <a:spcPct val="150000"/>
+              </a:lnSpc>
+              <a:buNone/>
+            </a:pPr>
+            <a:endParaRPr kumimoji="0" lang="az-Latn-AZ" altLang="en-US" sz="1300" b="0" i="0" u="none" strike="noStrike" cap="none" normalizeH="0" baseline="0">
+              <a:ln>
+                <a:noFill/>
+              </a:ln>
+              <a:solidFill>
+                <a:schemeClr val="tx1"/>
+              </a:solidFill>
+              <a:effectLst/>
+              <a:latin typeface="Arial" panose="020B0604020202020204" pitchFamily="34" charset="0"/>
+            </a:endParaRPr>
+          </a:p>
+          <a:p>
+            <a:pPr>
+              <a:lnSpc>
+                <a:spcPct val="150000"/>
+              </a:lnSpc>
+              <a:buNone/>
+            </a:pPr>
+            <a:r>
+              <a:rPr lang="en-US" altLang="en-US" sz="1300">
+                <a:latin typeface="Arial" panose="020B0604020202020204" pitchFamily="34" charset="0"/>
+              </a:rPr>
+              <a:t>Bu sətirdə PHP belə düşünür:</a:t>
+            </a:r>
+            <a:r>
+              <a:rPr lang="az-Latn-AZ" altLang="en-US" sz="1300">
+                <a:latin typeface="Arial" panose="020B0604020202020204" pitchFamily="34" charset="0"/>
+              </a:rPr>
+              <a:t> Yəni PHP </a:t>
+            </a:r>
+            <a:r>
+              <a:rPr lang="az-Latn-AZ" altLang="en-US" sz="1300" b="1">
+                <a:latin typeface="Arial" panose="020B0604020202020204" pitchFamily="34" charset="0"/>
+              </a:rPr>
+              <a:t>$inputName . 'ner' </a:t>
+            </a:r>
+            <a:r>
+              <a:rPr lang="az-Latn-AZ" altLang="en-US" sz="1300">
+                <a:latin typeface="Arial" panose="020B0604020202020204" pitchFamily="34" charset="0"/>
+              </a:rPr>
+              <a:t>hissəsini bir </a:t>
+            </a:r>
+            <a:r>
+              <a:rPr lang="az-Latn-AZ" altLang="en-US" sz="1300" b="1">
+                <a:solidFill>
+                  <a:srgbClr val="7030A0"/>
+                </a:solidFill>
+                <a:latin typeface="Arial" panose="020B0604020202020204" pitchFamily="34" charset="0"/>
+              </a:rPr>
+              <a:t>property</a:t>
+            </a:r>
+            <a:r>
+              <a:rPr lang="az-Latn-AZ" altLang="en-US" sz="1300">
+                <a:latin typeface="Arial" panose="020B0604020202020204" pitchFamily="34" charset="0"/>
+              </a:rPr>
+              <a:t> kimi yox, sonradan </a:t>
+            </a:r>
+            <a:r>
+              <a:rPr lang="az-Latn-AZ" altLang="en-US" sz="1300" b="1">
+                <a:solidFill>
+                  <a:schemeClr val="accent2"/>
+                </a:solidFill>
+                <a:latin typeface="Arial" panose="020B0604020202020204" pitchFamily="34" charset="0"/>
+              </a:rPr>
+              <a:t>stringə</a:t>
+            </a:r>
+            <a:r>
+              <a:rPr lang="az-Latn-AZ" altLang="en-US" sz="1300">
+                <a:latin typeface="Arial" panose="020B0604020202020204" pitchFamily="34" charset="0"/>
+              </a:rPr>
+              <a:t> çevrilən iki fərqli hissə kimi görür.</a:t>
+            </a:r>
+            <a:endParaRPr kumimoji="0" lang="en-US" altLang="en-US" sz="1300" b="0" i="0" u="none" strike="noStrike" cap="none" normalizeH="0" baseline="0">
+              <a:ln>
+                <a:noFill/>
+              </a:ln>
+              <a:solidFill>
+                <a:schemeClr val="tx1"/>
+              </a:solidFill>
+              <a:effectLst/>
+              <a:latin typeface="Arial" panose="020B0604020202020204" pitchFamily="34" charset="0"/>
+            </a:endParaRPr>
+          </a:p>
+        </p:txBody>
+      </p:sp>
+      <p:pic>
+        <p:nvPicPr>
+          <p:cNvPr id="4" name="Picture 3">
+            <a:extLst>
+              <a:ext uri="{FF2B5EF4-FFF2-40B4-BE49-F238E27FC236}">
+                <a16:creationId xmlns:a16="http://schemas.microsoft.com/office/drawing/2014/main" id="{790FF040-B637-6743-E1C1-ECEC7ADE6971}"/>
+              </a:ext>
+            </a:extLst>
+          </p:cNvPr>
+          <p:cNvPicPr>
+            <a:picLocks noChangeAspect="1"/>
+          </p:cNvPicPr>
+          <p:nvPr/>
+        </p:nvPicPr>
+        <p:blipFill>
+          <a:blip r:embed="rId2"/>
+          <a:stretch>
+            <a:fillRect/>
+          </a:stretch>
+        </p:blipFill>
+        <p:spPr>
+          <a:xfrm>
+            <a:off x="217714" y="2482737"/>
+            <a:ext cx="4610743" cy="819264"/>
+          </a:xfrm>
+          <a:prstGeom prst="rect">
+            <a:avLst/>
+          </a:prstGeom>
+        </p:spPr>
+      </p:pic>
+      <p:pic>
+        <p:nvPicPr>
+          <p:cNvPr id="6" name="Picture 5">
+            <a:extLst>
+              <a:ext uri="{FF2B5EF4-FFF2-40B4-BE49-F238E27FC236}">
+                <a16:creationId xmlns:a16="http://schemas.microsoft.com/office/drawing/2014/main" id="{C733AFCA-4F5A-B748-4E9A-C58AA1B87C34}"/>
+              </a:ext>
+            </a:extLst>
+          </p:cNvPr>
+          <p:cNvPicPr>
+            <a:picLocks noChangeAspect="1"/>
+          </p:cNvPicPr>
+          <p:nvPr/>
+        </p:nvPicPr>
+        <p:blipFill>
+          <a:blip r:embed="rId3"/>
+          <a:stretch>
+            <a:fillRect/>
+          </a:stretch>
+        </p:blipFill>
+        <p:spPr>
+          <a:xfrm>
+            <a:off x="217714" y="4811550"/>
+            <a:ext cx="4344006" cy="571580"/>
+          </a:xfrm>
+          <a:prstGeom prst="rect">
+            <a:avLst/>
+          </a:prstGeom>
+        </p:spPr>
+      </p:pic>
+      <p:pic>
+        <p:nvPicPr>
+          <p:cNvPr id="8" name="Picture 7">
+            <a:extLst>
+              <a:ext uri="{FF2B5EF4-FFF2-40B4-BE49-F238E27FC236}">
+                <a16:creationId xmlns:a16="http://schemas.microsoft.com/office/drawing/2014/main" id="{6B0984C4-412A-E947-D152-6E974F6440E3}"/>
+              </a:ext>
+            </a:extLst>
+          </p:cNvPr>
+          <p:cNvPicPr>
+            <a:picLocks noChangeAspect="1"/>
+          </p:cNvPicPr>
+          <p:nvPr/>
+        </p:nvPicPr>
+        <p:blipFill>
+          <a:blip r:embed="rId4"/>
+          <a:stretch>
+            <a:fillRect/>
+          </a:stretch>
+        </p:blipFill>
+        <p:spPr>
+          <a:xfrm>
+            <a:off x="217714" y="6011878"/>
+            <a:ext cx="2114845" cy="371527"/>
+          </a:xfrm>
+          <a:prstGeom prst="rect">
+            <a:avLst/>
+          </a:prstGeom>
+        </p:spPr>
+      </p:pic>
+    </p:spTree>
+    <p:extLst>
+      <p:ext uri="{BB962C8B-B14F-4D97-AF65-F5344CB8AC3E}">
+        <p14:creationId xmlns:p14="http://schemas.microsoft.com/office/powerpoint/2010/main" val="3167382722"/>
+      </p:ext>
+    </p:extLst>
+  </p:cSld>
+  <p:clrMapOvr>
+    <a:masterClrMapping/>
+  </p:clrMapOvr>
+</p:sld>
+</file>
+
+<file path=ppt/slides/slide4.xml><?xml version="1.0" encoding="utf-8"?>
+<p:sld xmlns:a="http://schemas.openxmlformats.org/drawingml/2006/main" xmlns:r="http://schemas.openxmlformats.org/officeDocument/2006/relationships" xmlns:p="http://schemas.openxmlformats.org/presentationml/2006/main">
+  <p:cSld>
+    <p:spTree>
+      <p:nvGrpSpPr>
+        <p:cNvPr id="1" name="">
+          <a:extLst>
+            <a:ext uri="{FF2B5EF4-FFF2-40B4-BE49-F238E27FC236}">
+              <a16:creationId xmlns:a16="http://schemas.microsoft.com/office/drawing/2014/main" id="{04518D5E-996D-EB24-ABE3-7492C77DEB45}"/>
+            </a:ext>
+          </a:extLst>
+        </p:cNvPr>
+        <p:cNvGrpSpPr/>
+        <p:nvPr/>
+      </p:nvGrpSpPr>
+      <p:grpSpPr>
+        <a:xfrm>
+          <a:off x="0" y="0"/>
+          <a:ext cx="0" cy="0"/>
+          <a:chOff x="0" y="0"/>
+          <a:chExt cx="0" cy="0"/>
+        </a:xfrm>
+      </p:grpSpPr>
+      <p:sp>
+        <p:nvSpPr>
+          <p:cNvPr id="3" name="TextBox 2">
+            <a:extLst>
+              <a:ext uri="{FF2B5EF4-FFF2-40B4-BE49-F238E27FC236}">
+                <a16:creationId xmlns:a16="http://schemas.microsoft.com/office/drawing/2014/main" id="{D5750A2E-698F-DC1D-5040-706773C773BE}"/>
+              </a:ext>
+            </a:extLst>
+          </p:cNvPr>
+          <p:cNvSpPr txBox="1"/>
+          <p:nvPr/>
+        </p:nvSpPr>
+        <p:spPr>
+          <a:xfrm>
+            <a:off x="217714" y="255046"/>
+            <a:ext cx="11756571" cy="1555682"/>
+          </a:xfrm>
+          <a:prstGeom prst="rect">
+            <a:avLst/>
+          </a:prstGeom>
+          <a:noFill/>
+        </p:spPr>
+        <p:txBody>
+          <a:bodyPr wrap="square">
+            <a:spAutoFit/>
+          </a:bodyPr>
+          <a:lstStyle/>
+          <a:p>
+            <a:pPr>
+              <a:lnSpc>
+                <a:spcPct val="150000"/>
+              </a:lnSpc>
+              <a:buNone/>
+            </a:pPr>
+            <a:r>
+              <a:rPr lang="en-US" altLang="en-US" sz="1300">
+                <a:latin typeface="Arial" panose="020B0604020202020204" pitchFamily="34" charset="0"/>
+              </a:rPr>
+              <a:t>Amma belə yazsaq:</a:t>
+            </a:r>
+            <a:r>
+              <a:rPr lang="az-Latn-AZ" altLang="en-US" sz="1300">
+                <a:latin typeface="Arial" panose="020B0604020202020204" pitchFamily="34" charset="0"/>
+              </a:rPr>
+              <a:t> PHP artıq anlayır ki, burada </a:t>
+            </a:r>
+            <a:r>
+              <a:rPr lang="az-Latn-AZ" altLang="en-US" sz="1300" b="1">
+                <a:latin typeface="Arial" panose="020B0604020202020204" pitchFamily="34" charset="0"/>
+              </a:rPr>
+              <a:t>property</a:t>
+            </a:r>
+            <a:r>
+              <a:rPr lang="az-Latn-AZ" altLang="en-US" sz="1300">
+                <a:latin typeface="Arial" panose="020B0604020202020204" pitchFamily="34" charset="0"/>
+              </a:rPr>
+              <a:t> adı </a:t>
+            </a:r>
+            <a:r>
+              <a:rPr lang="az-Latn-AZ" altLang="en-US" sz="1300" b="1">
+                <a:solidFill>
+                  <a:srgbClr val="00B050"/>
+                </a:solidFill>
+                <a:latin typeface="Arial" panose="020B0604020202020204" pitchFamily="34" charset="0"/>
+              </a:rPr>
+              <a:t>banner</a:t>
+            </a:r>
+            <a:r>
+              <a:rPr lang="az-Latn-AZ" altLang="en-US" sz="1300">
+                <a:latin typeface="Arial" panose="020B0604020202020204" pitchFamily="34" charset="0"/>
+              </a:rPr>
+              <a:t> olacaq.</a:t>
+            </a:r>
+          </a:p>
+          <a:p>
+            <a:pPr>
+              <a:lnSpc>
+                <a:spcPct val="150000"/>
+              </a:lnSpc>
+              <a:buNone/>
+            </a:pPr>
+            <a:endParaRPr kumimoji="0" lang="az-Latn-AZ" altLang="en-US" sz="1300" b="0" i="0" u="none" strike="noStrike" cap="none" normalizeH="0" baseline="0">
+              <a:ln>
+                <a:noFill/>
+              </a:ln>
+              <a:solidFill>
+                <a:schemeClr val="tx1"/>
+              </a:solidFill>
+              <a:effectLst/>
+              <a:latin typeface="Arial" panose="020B0604020202020204" pitchFamily="34" charset="0"/>
+            </a:endParaRPr>
+          </a:p>
+          <a:p>
+            <a:pPr>
+              <a:lnSpc>
+                <a:spcPct val="150000"/>
+              </a:lnSpc>
+              <a:buNone/>
+            </a:pPr>
+            <a:endParaRPr lang="az-Latn-AZ" altLang="en-US" sz="1300">
+              <a:latin typeface="Arial" panose="020B0604020202020204" pitchFamily="34" charset="0"/>
+            </a:endParaRPr>
+          </a:p>
+          <a:p>
+            <a:pPr>
+              <a:lnSpc>
+                <a:spcPct val="150000"/>
+              </a:lnSpc>
+              <a:buNone/>
+            </a:pPr>
+            <a:endParaRPr kumimoji="0" lang="az-Latn-AZ" altLang="en-US" sz="1300" b="0" i="0" u="none" strike="noStrike" cap="none" normalizeH="0" baseline="0">
+              <a:ln>
+                <a:noFill/>
+              </a:ln>
+              <a:solidFill>
+                <a:schemeClr val="tx1"/>
+              </a:solidFill>
+              <a:effectLst/>
+              <a:latin typeface="Arial" panose="020B0604020202020204" pitchFamily="34" charset="0"/>
+            </a:endParaRPr>
+          </a:p>
+          <a:p>
+            <a:pPr>
+              <a:lnSpc>
+                <a:spcPct val="150000"/>
+              </a:lnSpc>
+              <a:buNone/>
+            </a:pPr>
+            <a:r>
+              <a:rPr lang="en-US" altLang="en-US" sz="1300" b="1">
+                <a:latin typeface="Arial" panose="020B0604020202020204" pitchFamily="34" charset="0"/>
+              </a:rPr>
+              <a:t>Nəticə</a:t>
+            </a:r>
+            <a:r>
+              <a:rPr lang="az-Latn-AZ" altLang="en-US" sz="1300">
+                <a:latin typeface="Arial" panose="020B0604020202020204" pitchFamily="34" charset="0"/>
+              </a:rPr>
+              <a:t>:</a:t>
+            </a:r>
+            <a:endParaRPr kumimoji="0" lang="en-US" altLang="en-US" sz="1300" b="0" i="0" u="none" strike="noStrike" cap="none" normalizeH="0" baseline="0">
+              <a:ln>
+                <a:noFill/>
+              </a:ln>
+              <a:solidFill>
+                <a:schemeClr val="tx1"/>
+              </a:solidFill>
+              <a:effectLst/>
+              <a:latin typeface="Arial" panose="020B0604020202020204" pitchFamily="34" charset="0"/>
+            </a:endParaRPr>
+          </a:p>
+        </p:txBody>
+      </p:sp>
+      <p:pic>
+        <p:nvPicPr>
+          <p:cNvPr id="4" name="Picture 3">
+            <a:extLst>
+              <a:ext uri="{FF2B5EF4-FFF2-40B4-BE49-F238E27FC236}">
+                <a16:creationId xmlns:a16="http://schemas.microsoft.com/office/drawing/2014/main" id="{55EEADA2-9923-47B0-D128-CF43E8FBBB5A}"/>
+              </a:ext>
+            </a:extLst>
+          </p:cNvPr>
+          <p:cNvPicPr>
+            <a:picLocks noChangeAspect="1"/>
+          </p:cNvPicPr>
+          <p:nvPr/>
+        </p:nvPicPr>
+        <p:blipFill>
+          <a:blip r:embed="rId2"/>
+          <a:stretch>
+            <a:fillRect/>
+          </a:stretch>
+        </p:blipFill>
+        <p:spPr>
+          <a:xfrm>
+            <a:off x="217714" y="726472"/>
+            <a:ext cx="4477375" cy="362001"/>
+          </a:xfrm>
+          <a:prstGeom prst="rect">
+            <a:avLst/>
+          </a:prstGeom>
+        </p:spPr>
+      </p:pic>
+      <p:graphicFrame>
+        <p:nvGraphicFramePr>
+          <p:cNvPr id="5" name="Table 4">
+            <a:extLst>
+              <a:ext uri="{FF2B5EF4-FFF2-40B4-BE49-F238E27FC236}">
+                <a16:creationId xmlns:a16="http://schemas.microsoft.com/office/drawing/2014/main" id="{C44B13D5-9908-0A59-4149-F8967D3EEA74}"/>
+              </a:ext>
+            </a:extLst>
+          </p:cNvPr>
+          <p:cNvGraphicFramePr>
+            <a:graphicFrameLocks noGrp="1"/>
+          </p:cNvGraphicFramePr>
+          <p:nvPr>
+            <p:extLst>
+              <p:ext uri="{D42A27DB-BD31-4B8C-83A1-F6EECF244321}">
+                <p14:modId xmlns:p14="http://schemas.microsoft.com/office/powerpoint/2010/main" val="2064076292"/>
+              </p:ext>
+            </p:extLst>
+          </p:nvPr>
+        </p:nvGraphicFramePr>
+        <p:xfrm>
+          <a:off x="217714" y="1932808"/>
+          <a:ext cx="11756571" cy="2851627"/>
+        </p:xfrm>
+        <a:graphic>
+          <a:graphicData uri="http://schemas.openxmlformats.org/drawingml/2006/table">
+            <a:tbl>
+              <a:tblPr/>
+              <a:tblGrid>
+                <a:gridCol w="3269519">
+                  <a:extLst>
+                    <a:ext uri="{9D8B030D-6E8A-4147-A177-3AD203B41FA5}">
+                      <a16:colId xmlns:a16="http://schemas.microsoft.com/office/drawing/2014/main" val="4047908089"/>
+                    </a:ext>
+                  </a:extLst>
+                </a:gridCol>
+                <a:gridCol w="1705744">
+                  <a:extLst>
+                    <a:ext uri="{9D8B030D-6E8A-4147-A177-3AD203B41FA5}">
+                      <a16:colId xmlns:a16="http://schemas.microsoft.com/office/drawing/2014/main" val="2209708317"/>
+                    </a:ext>
+                  </a:extLst>
+                </a:gridCol>
+                <a:gridCol w="3009135">
+                  <a:extLst>
+                    <a:ext uri="{9D8B030D-6E8A-4147-A177-3AD203B41FA5}">
+                      <a16:colId xmlns:a16="http://schemas.microsoft.com/office/drawing/2014/main" val="182049259"/>
+                    </a:ext>
+                  </a:extLst>
+                </a:gridCol>
+                <a:gridCol w="3772173">
+                  <a:extLst>
+                    <a:ext uri="{9D8B030D-6E8A-4147-A177-3AD203B41FA5}">
+                      <a16:colId xmlns:a16="http://schemas.microsoft.com/office/drawing/2014/main" val="2642610516"/>
+                    </a:ext>
+                  </a:extLst>
+                </a:gridCol>
+              </a:tblGrid>
+              <a:tr h="760434">
+                <a:tc>
+                  <a:txBody>
+                    <a:bodyPr/>
+                    <a:lstStyle/>
+                    <a:p>
+                      <a:r>
+                        <a:rPr lang="en-US" b="1"/>
+                        <a:t>Yazılış</a:t>
+                      </a:r>
+                    </a:p>
+                  </a:txBody>
+                  <a:tcPr anchor="ctr">
+                    <a:lnL w="12700" cap="flat" cmpd="sng" algn="ctr">
+                      <a:solidFill>
+                        <a:schemeClr val="tx1"/>
+                      </a:solidFill>
+                      <a:prstDash val="solid"/>
+                      <a:round/>
+                      <a:headEnd type="none" w="med" len="med"/>
+                      <a:tailEnd type="none" w="med" len="med"/>
+                    </a:lnL>
+                    <a:lnR w="12700" cap="flat" cmpd="sng" algn="ctr">
+                      <a:solidFill>
+                        <a:schemeClr val="tx1"/>
+                      </a:solidFill>
+                      <a:prstDash val="solid"/>
+                      <a:round/>
+                      <a:headEnd type="none" w="med" len="med"/>
+                      <a:tailEnd type="none" w="med" len="med"/>
+                    </a:lnR>
+                    <a:lnT w="12700" cap="flat" cmpd="sng" algn="ctr">
+                      <a:solidFill>
+                        <a:schemeClr val="tx1"/>
+                      </a:solidFill>
+                      <a:prstDash val="solid"/>
+                      <a:round/>
+                      <a:headEnd type="none" w="med" len="med"/>
+                      <a:tailEnd type="none" w="med" len="med"/>
+                    </a:lnT>
+                    <a:lnB w="12700" cap="flat" cmpd="sng" algn="ctr">
+                      <a:solidFill>
+                        <a:schemeClr val="tx1"/>
+                      </a:solidFill>
+                      <a:prstDash val="solid"/>
+                      <a:round/>
+                      <a:headEnd type="none" w="med" len="med"/>
+                      <a:tailEnd type="none" w="med" len="med"/>
+                    </a:lnB>
+                    <a:solidFill>
+                      <a:schemeClr val="accent2"/>
+                    </a:solidFill>
+                  </a:tcPr>
+                </a:tc>
+                <a:tc>
+                  <a:txBody>
+                    <a:bodyPr/>
+                    <a:lstStyle/>
+                    <a:p>
+                      <a:r>
+                        <a:rPr lang="en-US" b="1"/>
+                        <a:t>Təhlükəsiz?</a:t>
+                      </a:r>
+                    </a:p>
+                  </a:txBody>
+                  <a:tcPr anchor="ctr">
+                    <a:lnL w="12700" cap="flat" cmpd="sng" algn="ctr">
+                      <a:solidFill>
+                        <a:schemeClr val="tx1"/>
+                      </a:solidFill>
+                      <a:prstDash val="solid"/>
+                      <a:round/>
+                      <a:headEnd type="none" w="med" len="med"/>
+                      <a:tailEnd type="none" w="med" len="med"/>
+                    </a:lnL>
+                    <a:lnR w="12700" cap="flat" cmpd="sng" algn="ctr">
+                      <a:solidFill>
+                        <a:schemeClr val="tx1"/>
+                      </a:solidFill>
+                      <a:prstDash val="solid"/>
+                      <a:round/>
+                      <a:headEnd type="none" w="med" len="med"/>
+                      <a:tailEnd type="none" w="med" len="med"/>
+                    </a:lnR>
+                    <a:lnT w="12700" cap="flat" cmpd="sng" algn="ctr">
+                      <a:solidFill>
+                        <a:schemeClr val="tx1"/>
+                      </a:solidFill>
+                      <a:prstDash val="solid"/>
+                      <a:round/>
+                      <a:headEnd type="none" w="med" len="med"/>
+                      <a:tailEnd type="none" w="med" len="med"/>
+                    </a:lnT>
+                    <a:lnB w="12700" cap="flat" cmpd="sng" algn="ctr">
+                      <a:solidFill>
+                        <a:schemeClr val="tx1"/>
+                      </a:solidFill>
+                      <a:prstDash val="solid"/>
+                      <a:round/>
+                      <a:headEnd type="none" w="med" len="med"/>
+                      <a:tailEnd type="none" w="med" len="med"/>
+                    </a:lnB>
+                    <a:solidFill>
+                      <a:schemeClr val="accent2"/>
+                    </a:solidFill>
+                  </a:tcPr>
+                </a:tc>
+                <a:tc>
+                  <a:txBody>
+                    <a:bodyPr/>
+                    <a:lstStyle/>
+                    <a:p>
+                      <a:r>
+                        <a:rPr lang="en-US" b="1"/>
+                        <a:t>Tövsiyə?</a:t>
+                      </a:r>
+                    </a:p>
+                  </a:txBody>
+                  <a:tcPr anchor="ctr">
+                    <a:lnL w="12700" cap="flat" cmpd="sng" algn="ctr">
+                      <a:solidFill>
+                        <a:schemeClr val="tx1"/>
+                      </a:solidFill>
+                      <a:prstDash val="solid"/>
+                      <a:round/>
+                      <a:headEnd type="none" w="med" len="med"/>
+                      <a:tailEnd type="none" w="med" len="med"/>
+                    </a:lnL>
+                    <a:lnR w="12700" cap="flat" cmpd="sng" algn="ctr">
+                      <a:solidFill>
+                        <a:schemeClr val="tx1"/>
+                      </a:solidFill>
+                      <a:prstDash val="solid"/>
+                      <a:round/>
+                      <a:headEnd type="none" w="med" len="med"/>
+                      <a:tailEnd type="none" w="med" len="med"/>
+                    </a:lnR>
+                    <a:lnT w="12700" cap="flat" cmpd="sng" algn="ctr">
+                      <a:solidFill>
+                        <a:schemeClr val="tx1"/>
+                      </a:solidFill>
+                      <a:prstDash val="solid"/>
+                      <a:round/>
+                      <a:headEnd type="none" w="med" len="med"/>
+                      <a:tailEnd type="none" w="med" len="med"/>
+                    </a:lnT>
+                    <a:lnB w="12700" cap="flat" cmpd="sng" algn="ctr">
+                      <a:solidFill>
+                        <a:schemeClr val="tx1"/>
+                      </a:solidFill>
+                      <a:prstDash val="solid"/>
+                      <a:round/>
+                      <a:headEnd type="none" w="med" len="med"/>
+                      <a:tailEnd type="none" w="med" len="med"/>
+                    </a:lnB>
+                    <a:solidFill>
+                      <a:schemeClr val="accent2"/>
+                    </a:solidFill>
+                  </a:tcPr>
+                </a:tc>
+                <a:tc>
+                  <a:txBody>
+                    <a:bodyPr/>
+                    <a:lstStyle/>
+                    <a:p>
+                      <a:r>
+                        <a:rPr lang="en-US" b="1"/>
+                        <a:t>Nə vaxt istifadə etməli?</a:t>
+                      </a:r>
+                    </a:p>
+                  </a:txBody>
+                  <a:tcPr anchor="ctr">
+                    <a:lnL w="12700" cap="flat" cmpd="sng" algn="ctr">
+                      <a:solidFill>
+                        <a:schemeClr val="tx1"/>
+                      </a:solidFill>
+                      <a:prstDash val="solid"/>
+                      <a:round/>
+                      <a:headEnd type="none" w="med" len="med"/>
+                      <a:tailEnd type="none" w="med" len="med"/>
+                    </a:lnL>
+                    <a:lnR w="12700" cap="flat" cmpd="sng" algn="ctr">
+                      <a:solidFill>
+                        <a:schemeClr val="tx1"/>
+                      </a:solidFill>
+                      <a:prstDash val="solid"/>
+                      <a:round/>
+                      <a:headEnd type="none" w="med" len="med"/>
+                      <a:tailEnd type="none" w="med" len="med"/>
+                    </a:lnR>
+                    <a:lnT w="12700" cap="flat" cmpd="sng" algn="ctr">
+                      <a:solidFill>
+                        <a:schemeClr val="tx1"/>
+                      </a:solidFill>
+                      <a:prstDash val="solid"/>
+                      <a:round/>
+                      <a:headEnd type="none" w="med" len="med"/>
+                      <a:tailEnd type="none" w="med" len="med"/>
+                    </a:lnT>
+                    <a:lnB w="12700" cap="flat" cmpd="sng" algn="ctr">
+                      <a:solidFill>
+                        <a:schemeClr val="tx1"/>
+                      </a:solidFill>
+                      <a:prstDash val="solid"/>
+                      <a:round/>
+                      <a:headEnd type="none" w="med" len="med"/>
+                      <a:tailEnd type="none" w="med" len="med"/>
+                    </a:lnB>
+                    <a:solidFill>
+                      <a:schemeClr val="accent2"/>
+                    </a:solidFill>
+                  </a:tcPr>
+                </a:tc>
+                <a:extLst>
+                  <a:ext uri="{0D108BD9-81ED-4DB2-BD59-A6C34878D82A}">
+                    <a16:rowId xmlns:a16="http://schemas.microsoft.com/office/drawing/2014/main" val="1537634969"/>
+                  </a:ext>
+                </a:extLst>
+              </a:tr>
+              <a:tr h="760434">
+                <a:tc>
+                  <a:txBody>
+                    <a:bodyPr/>
+                    <a:lstStyle/>
+                    <a:p>
+                      <a:r>
+                        <a:rPr lang="en-US" b="1"/>
+                        <a:t>$request-&gt;$inputName</a:t>
+                      </a:r>
+                    </a:p>
+                  </a:txBody>
+                  <a:tcPr anchor="ctr">
+                    <a:lnL w="12700" cap="flat" cmpd="sng" algn="ctr">
+                      <a:solidFill>
+                        <a:schemeClr val="tx1"/>
+                      </a:solidFill>
+                      <a:prstDash val="solid"/>
+                      <a:round/>
+                      <a:headEnd type="none" w="med" len="med"/>
+                      <a:tailEnd type="none" w="med" len="med"/>
+                    </a:lnL>
+                    <a:lnR w="12700" cap="flat" cmpd="sng" algn="ctr">
+                      <a:solidFill>
+                        <a:schemeClr val="tx1"/>
+                      </a:solidFill>
+                      <a:prstDash val="solid"/>
+                      <a:round/>
+                      <a:headEnd type="none" w="med" len="med"/>
+                      <a:tailEnd type="none" w="med" len="med"/>
+                    </a:lnR>
+                    <a:lnT w="12700" cap="flat" cmpd="sng" algn="ctr">
+                      <a:solidFill>
+                        <a:schemeClr val="tx1"/>
+                      </a:solidFill>
+                      <a:prstDash val="solid"/>
+                      <a:round/>
+                      <a:headEnd type="none" w="med" len="med"/>
+                      <a:tailEnd type="none" w="med" len="med"/>
+                    </a:lnT>
+                    <a:lnB w="12700" cap="flat" cmpd="sng" algn="ctr">
+                      <a:solidFill>
+                        <a:schemeClr val="tx1"/>
+                      </a:solidFill>
+                      <a:prstDash val="solid"/>
+                      <a:round/>
+                      <a:headEnd type="none" w="med" len="med"/>
+                      <a:tailEnd type="none" w="med" len="med"/>
+                    </a:lnB>
+                    <a:noFill/>
+                  </a:tcPr>
+                </a:tc>
+                <a:tc>
+                  <a:txBody>
+                    <a:bodyPr/>
+                    <a:lstStyle/>
+                    <a:p>
+                      <a:r>
+                        <a:rPr lang="en-US"/>
+                        <a:t>Bəli</a:t>
+                      </a:r>
+                    </a:p>
+                  </a:txBody>
+                  <a:tcPr anchor="ctr">
+                    <a:lnL w="12700" cap="flat" cmpd="sng" algn="ctr">
+                      <a:solidFill>
+                        <a:schemeClr val="tx1"/>
+                      </a:solidFill>
+                      <a:prstDash val="solid"/>
+                      <a:round/>
+                      <a:headEnd type="none" w="med" len="med"/>
+                      <a:tailEnd type="none" w="med" len="med"/>
+                    </a:lnL>
+                    <a:lnR w="12700" cap="flat" cmpd="sng" algn="ctr">
+                      <a:solidFill>
+                        <a:schemeClr val="tx1"/>
+                      </a:solidFill>
+                      <a:prstDash val="solid"/>
+                      <a:round/>
+                      <a:headEnd type="none" w="med" len="med"/>
+                      <a:tailEnd type="none" w="med" len="med"/>
+                    </a:lnR>
+                    <a:lnT w="12700" cap="flat" cmpd="sng" algn="ctr">
+                      <a:solidFill>
+                        <a:schemeClr val="tx1"/>
+                      </a:solidFill>
+                      <a:prstDash val="solid"/>
+                      <a:round/>
+                      <a:headEnd type="none" w="med" len="med"/>
+                      <a:tailEnd type="none" w="med" len="med"/>
+                    </a:lnT>
+                    <a:lnB w="12700" cap="flat" cmpd="sng" algn="ctr">
+                      <a:solidFill>
+                        <a:schemeClr val="tx1"/>
+                      </a:solidFill>
+                      <a:prstDash val="solid"/>
+                      <a:round/>
+                      <a:headEnd type="none" w="med" len="med"/>
+                      <a:tailEnd type="none" w="med" len="med"/>
+                    </a:lnB>
+                    <a:noFill/>
+                  </a:tcPr>
+                </a:tc>
+                <a:tc>
+                  <a:txBody>
+                    <a:bodyPr/>
+                    <a:lstStyle/>
+                    <a:p>
+                      <a:r>
+                        <a:rPr lang="en-US"/>
+                        <a:t>Sadə hallarda ok</a:t>
+                      </a:r>
+                    </a:p>
+                  </a:txBody>
+                  <a:tcPr anchor="ctr">
+                    <a:lnL w="12700" cap="flat" cmpd="sng" algn="ctr">
+                      <a:solidFill>
+                        <a:schemeClr val="tx1"/>
+                      </a:solidFill>
+                      <a:prstDash val="solid"/>
+                      <a:round/>
+                      <a:headEnd type="none" w="med" len="med"/>
+                      <a:tailEnd type="none" w="med" len="med"/>
+                    </a:lnL>
+                    <a:lnR w="12700" cap="flat" cmpd="sng" algn="ctr">
+                      <a:solidFill>
+                        <a:schemeClr val="tx1"/>
+                      </a:solidFill>
+                      <a:prstDash val="solid"/>
+                      <a:round/>
+                      <a:headEnd type="none" w="med" len="med"/>
+                      <a:tailEnd type="none" w="med" len="med"/>
+                    </a:lnR>
+                    <a:lnT w="12700" cap="flat" cmpd="sng" algn="ctr">
+                      <a:solidFill>
+                        <a:schemeClr val="tx1"/>
+                      </a:solidFill>
+                      <a:prstDash val="solid"/>
+                      <a:round/>
+                      <a:headEnd type="none" w="med" len="med"/>
+                      <a:tailEnd type="none" w="med" len="med"/>
+                    </a:lnT>
+                    <a:lnB w="12700" cap="flat" cmpd="sng" algn="ctr">
+                      <a:solidFill>
+                        <a:schemeClr val="tx1"/>
+                      </a:solidFill>
+                      <a:prstDash val="solid"/>
+                      <a:round/>
+                      <a:headEnd type="none" w="med" len="med"/>
+                      <a:tailEnd type="none" w="med" len="med"/>
+                    </a:lnB>
+                    <a:noFill/>
+                  </a:tcPr>
+                </a:tc>
+                <a:tc>
+                  <a:txBody>
+                    <a:bodyPr/>
+                    <a:lstStyle/>
+                    <a:p>
+                      <a:r>
+                        <a:rPr lang="en-US"/>
+                        <a:t>Property adı sadəcə bir dəyişəndirsə</a:t>
+                      </a:r>
+                    </a:p>
+                  </a:txBody>
+                  <a:tcPr anchor="ctr">
+                    <a:lnL w="12700" cap="flat" cmpd="sng" algn="ctr">
+                      <a:solidFill>
+                        <a:schemeClr val="tx1"/>
+                      </a:solidFill>
+                      <a:prstDash val="solid"/>
+                      <a:round/>
+                      <a:headEnd type="none" w="med" len="med"/>
+                      <a:tailEnd type="none" w="med" len="med"/>
+                    </a:lnL>
+                    <a:lnR w="12700" cap="flat" cmpd="sng" algn="ctr">
+                      <a:solidFill>
+                        <a:schemeClr val="tx1"/>
+                      </a:solidFill>
+                      <a:prstDash val="solid"/>
+                      <a:round/>
+                      <a:headEnd type="none" w="med" len="med"/>
+                      <a:tailEnd type="none" w="med" len="med"/>
+                    </a:lnR>
+                    <a:lnT w="12700" cap="flat" cmpd="sng" algn="ctr">
+                      <a:solidFill>
+                        <a:schemeClr val="tx1"/>
+                      </a:solidFill>
+                      <a:prstDash val="solid"/>
+                      <a:round/>
+                      <a:headEnd type="none" w="med" len="med"/>
+                      <a:tailEnd type="none" w="med" len="med"/>
+                    </a:lnT>
+                    <a:lnB w="12700" cap="flat" cmpd="sng" algn="ctr">
+                      <a:solidFill>
+                        <a:schemeClr val="tx1"/>
+                      </a:solidFill>
+                      <a:prstDash val="solid"/>
+                      <a:round/>
+                      <a:headEnd type="none" w="med" len="med"/>
+                      <a:tailEnd type="none" w="med" len="med"/>
+                    </a:lnB>
+                    <a:noFill/>
+                  </a:tcPr>
+                </a:tc>
+                <a:extLst>
+                  <a:ext uri="{0D108BD9-81ED-4DB2-BD59-A6C34878D82A}">
+                    <a16:rowId xmlns:a16="http://schemas.microsoft.com/office/drawing/2014/main" val="4173516034"/>
+                  </a:ext>
+                </a:extLst>
+              </a:tr>
+              <a:tr h="1330759">
+                <a:tc>
+                  <a:txBody>
+                    <a:bodyPr/>
+                    <a:lstStyle/>
+                    <a:p>
+                      <a:r>
+                        <a:rPr lang="en-US" b="1"/>
+                        <a:t>$request-&gt;{$inputName}</a:t>
+                      </a:r>
+                    </a:p>
+                  </a:txBody>
+                  <a:tcPr anchor="ctr">
+                    <a:lnL w="12700" cap="flat" cmpd="sng" algn="ctr">
+                      <a:solidFill>
+                        <a:schemeClr val="tx1"/>
+                      </a:solidFill>
+                      <a:prstDash val="solid"/>
+                      <a:round/>
+                      <a:headEnd type="none" w="med" len="med"/>
+                      <a:tailEnd type="none" w="med" len="med"/>
+                    </a:lnL>
+                    <a:lnR w="12700" cap="flat" cmpd="sng" algn="ctr">
+                      <a:solidFill>
+                        <a:schemeClr val="tx1"/>
+                      </a:solidFill>
+                      <a:prstDash val="solid"/>
+                      <a:round/>
+                      <a:headEnd type="none" w="med" len="med"/>
+                      <a:tailEnd type="none" w="med" len="med"/>
+                    </a:lnR>
+                    <a:lnT w="12700" cap="flat" cmpd="sng" algn="ctr">
+                      <a:solidFill>
+                        <a:schemeClr val="tx1"/>
+                      </a:solidFill>
+                      <a:prstDash val="solid"/>
+                      <a:round/>
+                      <a:headEnd type="none" w="med" len="med"/>
+                      <a:tailEnd type="none" w="med" len="med"/>
+                    </a:lnT>
+                    <a:lnB w="12700" cap="flat" cmpd="sng" algn="ctr">
+                      <a:solidFill>
+                        <a:schemeClr val="tx1"/>
+                      </a:solidFill>
+                      <a:prstDash val="solid"/>
+                      <a:round/>
+                      <a:headEnd type="none" w="med" len="med"/>
+                      <a:tailEnd type="none" w="med" len="med"/>
+                    </a:lnB>
+                    <a:noFill/>
+                  </a:tcPr>
+                </a:tc>
+                <a:tc>
+                  <a:txBody>
+                    <a:bodyPr/>
+                    <a:lstStyle/>
+                    <a:p>
+                      <a:r>
+                        <a:rPr lang="en-US"/>
+                        <a:t>Bəli</a:t>
+                      </a:r>
+                    </a:p>
+                  </a:txBody>
+                  <a:tcPr anchor="ctr">
+                    <a:lnL w="12700" cap="flat" cmpd="sng" algn="ctr">
+                      <a:solidFill>
+                        <a:schemeClr val="tx1"/>
+                      </a:solidFill>
+                      <a:prstDash val="solid"/>
+                      <a:round/>
+                      <a:headEnd type="none" w="med" len="med"/>
+                      <a:tailEnd type="none" w="med" len="med"/>
+                    </a:lnL>
+                    <a:lnR w="12700" cap="flat" cmpd="sng" algn="ctr">
+                      <a:solidFill>
+                        <a:schemeClr val="tx1"/>
+                      </a:solidFill>
+                      <a:prstDash val="solid"/>
+                      <a:round/>
+                      <a:headEnd type="none" w="med" len="med"/>
+                      <a:tailEnd type="none" w="med" len="med"/>
+                    </a:lnR>
+                    <a:lnT w="12700" cap="flat" cmpd="sng" algn="ctr">
+                      <a:solidFill>
+                        <a:schemeClr val="tx1"/>
+                      </a:solidFill>
+                      <a:prstDash val="solid"/>
+                      <a:round/>
+                      <a:headEnd type="none" w="med" len="med"/>
+                      <a:tailEnd type="none" w="med" len="med"/>
+                    </a:lnT>
+                    <a:lnB w="12700" cap="flat" cmpd="sng" algn="ctr">
+                      <a:solidFill>
+                        <a:schemeClr val="tx1"/>
+                      </a:solidFill>
+                      <a:prstDash val="solid"/>
+                      <a:round/>
+                      <a:headEnd type="none" w="med" len="med"/>
+                      <a:tailEnd type="none" w="med" len="med"/>
+                    </a:lnB>
+                    <a:noFill/>
+                  </a:tcPr>
+                </a:tc>
+                <a:tc>
+                  <a:txBody>
+                    <a:bodyPr/>
+                    <a:lstStyle/>
+                    <a:p>
+                      <a:r>
+                        <a:rPr lang="en-US" b="1"/>
+                        <a:t>Həmişə tövsiyə olunur</a:t>
+                      </a:r>
+                      <a:endParaRPr lang="en-US"/>
+                    </a:p>
+                  </a:txBody>
+                  <a:tcPr anchor="ctr">
+                    <a:lnL w="12700" cap="flat" cmpd="sng" algn="ctr">
+                      <a:solidFill>
+                        <a:schemeClr val="tx1"/>
+                      </a:solidFill>
+                      <a:prstDash val="solid"/>
+                      <a:round/>
+                      <a:headEnd type="none" w="med" len="med"/>
+                      <a:tailEnd type="none" w="med" len="med"/>
+                    </a:lnL>
+                    <a:lnR w="12700" cap="flat" cmpd="sng" algn="ctr">
+                      <a:solidFill>
+                        <a:schemeClr val="tx1"/>
+                      </a:solidFill>
+                      <a:prstDash val="solid"/>
+                      <a:round/>
+                      <a:headEnd type="none" w="med" len="med"/>
+                      <a:tailEnd type="none" w="med" len="med"/>
+                    </a:lnR>
+                    <a:lnT w="12700" cap="flat" cmpd="sng" algn="ctr">
+                      <a:solidFill>
+                        <a:schemeClr val="tx1"/>
+                      </a:solidFill>
+                      <a:prstDash val="solid"/>
+                      <a:round/>
+                      <a:headEnd type="none" w="med" len="med"/>
+                      <a:tailEnd type="none" w="med" len="med"/>
+                    </a:lnT>
+                    <a:lnB w="12700" cap="flat" cmpd="sng" algn="ctr">
+                      <a:solidFill>
+                        <a:schemeClr val="tx1"/>
+                      </a:solidFill>
+                      <a:prstDash val="solid"/>
+                      <a:round/>
+                      <a:headEnd type="none" w="med" len="med"/>
+                      <a:tailEnd type="none" w="med" len="med"/>
+                    </a:lnB>
+                    <a:noFill/>
+                  </a:tcPr>
+                </a:tc>
+                <a:tc>
+                  <a:txBody>
+                    <a:bodyPr/>
+                    <a:lstStyle/>
+                    <a:p>
+                      <a:r>
+                        <a:rPr lang="en-US"/>
+                        <a:t>Concatenation, array daxilində, qarışıq property-lərdə</a:t>
+                      </a:r>
+                    </a:p>
+                  </a:txBody>
+                  <a:tcPr anchor="ctr">
+                    <a:lnL w="12700" cap="flat" cmpd="sng" algn="ctr">
+                      <a:solidFill>
+                        <a:schemeClr val="tx1"/>
+                      </a:solidFill>
+                      <a:prstDash val="solid"/>
+                      <a:round/>
+                      <a:headEnd type="none" w="med" len="med"/>
+                      <a:tailEnd type="none" w="med" len="med"/>
+                    </a:lnL>
+                    <a:lnR w="12700" cap="flat" cmpd="sng" algn="ctr">
+                      <a:solidFill>
+                        <a:schemeClr val="tx1"/>
+                      </a:solidFill>
+                      <a:prstDash val="solid"/>
+                      <a:round/>
+                      <a:headEnd type="none" w="med" len="med"/>
+                      <a:tailEnd type="none" w="med" len="med"/>
+                    </a:lnR>
+                    <a:lnT w="12700" cap="flat" cmpd="sng" algn="ctr">
+                      <a:solidFill>
+                        <a:schemeClr val="tx1"/>
+                      </a:solidFill>
+                      <a:prstDash val="solid"/>
+                      <a:round/>
+                      <a:headEnd type="none" w="med" len="med"/>
+                      <a:tailEnd type="none" w="med" len="med"/>
+                    </a:lnT>
+                    <a:lnB w="12700" cap="flat" cmpd="sng" algn="ctr">
+                      <a:solidFill>
+                        <a:schemeClr val="tx1"/>
+                      </a:solidFill>
+                      <a:prstDash val="solid"/>
+                      <a:round/>
+                      <a:headEnd type="none" w="med" len="med"/>
+                      <a:tailEnd type="none" w="med" len="med"/>
+                    </a:lnB>
+                    <a:noFill/>
+                  </a:tcPr>
+                </a:tc>
+                <a:extLst>
+                  <a:ext uri="{0D108BD9-81ED-4DB2-BD59-A6C34878D82A}">
+                    <a16:rowId xmlns:a16="http://schemas.microsoft.com/office/drawing/2014/main" val="3456914868"/>
+                  </a:ext>
+                </a:extLst>
+              </a:tr>
+            </a:tbl>
+          </a:graphicData>
+        </a:graphic>
+      </p:graphicFrame>
+    </p:spTree>
+    <p:extLst>
+      <p:ext uri="{BB962C8B-B14F-4D97-AF65-F5344CB8AC3E}">
+        <p14:creationId xmlns:p14="http://schemas.microsoft.com/office/powerpoint/2010/main" val="3332042635"/>
+      </p:ext>
+    </p:extLst>
+  </p:cSld>
+  <p:clrMapOvr>
+    <a:masterClrMapping/>
+  </p:clrMapOvr>
+</p:sld>
+</file>
+
+<file path=ppt/slides/slide5.xml><?xml version="1.0" encoding="utf-8"?>
+<p:sld xmlns:a="http://schemas.openxmlformats.org/drawingml/2006/main" xmlns:r="http://schemas.openxmlformats.org/officeDocument/2006/relationships" xmlns:p="http://schemas.openxmlformats.org/presentationml/2006/main">
+  <p:cSld>
+    <p:spTree>
+      <p:nvGrpSpPr>
+        <p:cNvPr id="1" name="">
+          <a:extLst>
+            <a:ext uri="{FF2B5EF4-FFF2-40B4-BE49-F238E27FC236}">
+              <a16:creationId xmlns:a16="http://schemas.microsoft.com/office/drawing/2014/main" id="{4EFA6122-FBB6-9DAE-6585-FE1754E821C2}"/>
+            </a:ext>
+          </a:extLst>
+        </p:cNvPr>
+        <p:cNvGrpSpPr/>
+        <p:nvPr/>
+      </p:nvGrpSpPr>
+      <p:grpSpPr>
+        <a:xfrm>
+          <a:off x="0" y="0"/>
+          <a:ext cx="0" cy="0"/>
+          <a:chOff x="0" y="0"/>
+          <a:chExt cx="0" cy="0"/>
+        </a:xfrm>
+      </p:grpSpPr>
+      <p:sp>
+        <p:nvSpPr>
+          <p:cNvPr id="3" name="TextBox 2">
+            <a:extLst>
+              <a:ext uri="{FF2B5EF4-FFF2-40B4-BE49-F238E27FC236}">
+                <a16:creationId xmlns:a16="http://schemas.microsoft.com/office/drawing/2014/main" id="{80082856-306F-1125-DC43-70C0B78F55AE}"/>
+              </a:ext>
+            </a:extLst>
+          </p:cNvPr>
+          <p:cNvSpPr txBox="1"/>
+          <p:nvPr/>
+        </p:nvSpPr>
+        <p:spPr>
+          <a:xfrm>
+            <a:off x="217714" y="255046"/>
+            <a:ext cx="11756571" cy="6356997"/>
+          </a:xfrm>
+          <a:prstGeom prst="rect">
+            <a:avLst/>
+          </a:prstGeom>
+          <a:noFill/>
+        </p:spPr>
+        <p:txBody>
+          <a:bodyPr wrap="square">
+            <a:spAutoFit/>
+          </a:bodyPr>
+          <a:lstStyle/>
+          <a:p>
+            <a:pPr>
+              <a:lnSpc>
+                <a:spcPct val="150000"/>
+              </a:lnSpc>
+              <a:buNone/>
+            </a:pPr>
+            <a:r>
+              <a:rPr lang="en-US" altLang="en-US" sz="1300" b="1">
+                <a:latin typeface="Arial" panose="020B0604020202020204" pitchFamily="34" charset="0"/>
+              </a:rPr>
+              <a:t>Sadə</a:t>
+            </a:r>
+            <a:r>
+              <a:rPr lang="en-US" altLang="en-US" sz="1300">
+                <a:latin typeface="Arial" panose="020B0604020202020204" pitchFamily="34" charset="0"/>
+              </a:rPr>
+              <a:t>:</a:t>
+            </a:r>
+            <a:endParaRPr lang="az-Latn-AZ" altLang="en-US" sz="1300">
+              <a:latin typeface="Arial" panose="020B0604020202020204" pitchFamily="34" charset="0"/>
+            </a:endParaRPr>
+          </a:p>
+          <a:p>
+            <a:pPr>
+              <a:lnSpc>
+                <a:spcPct val="150000"/>
+              </a:lnSpc>
+              <a:buNone/>
+            </a:pPr>
+            <a:endParaRPr kumimoji="0" lang="az-Latn-AZ" altLang="en-US" sz="1300" b="0" i="0" u="none" strike="noStrike" cap="none" normalizeH="0" baseline="0">
+              <a:ln>
+                <a:noFill/>
+              </a:ln>
+              <a:solidFill>
+                <a:schemeClr val="tx1"/>
+              </a:solidFill>
+              <a:effectLst/>
+              <a:latin typeface="Arial" panose="020B0604020202020204" pitchFamily="34" charset="0"/>
+            </a:endParaRPr>
+          </a:p>
+          <a:p>
+            <a:pPr>
+              <a:lnSpc>
+                <a:spcPct val="150000"/>
+              </a:lnSpc>
+              <a:buNone/>
+            </a:pPr>
+            <a:endParaRPr lang="az-Latn-AZ" altLang="en-US" sz="1300">
+              <a:latin typeface="Arial" panose="020B0604020202020204" pitchFamily="34" charset="0"/>
+            </a:endParaRPr>
+          </a:p>
+          <a:p>
+            <a:pPr>
+              <a:lnSpc>
+                <a:spcPct val="150000"/>
+              </a:lnSpc>
+              <a:buNone/>
+            </a:pPr>
+            <a:endParaRPr kumimoji="0" lang="az-Latn-AZ" altLang="en-US" sz="1300" b="0" i="0" u="none" strike="noStrike" cap="none" normalizeH="0" baseline="0">
+              <a:ln>
+                <a:noFill/>
+              </a:ln>
+              <a:solidFill>
+                <a:schemeClr val="tx1"/>
+              </a:solidFill>
+              <a:effectLst/>
+              <a:latin typeface="Arial" panose="020B0604020202020204" pitchFamily="34" charset="0"/>
+            </a:endParaRPr>
+          </a:p>
+          <a:p>
+            <a:pPr>
+              <a:lnSpc>
+                <a:spcPct val="150000"/>
+              </a:lnSpc>
+              <a:buNone/>
+            </a:pPr>
+            <a:endParaRPr lang="az-Latn-AZ" altLang="en-US" sz="1300">
+              <a:latin typeface="Arial" panose="020B0604020202020204" pitchFamily="34" charset="0"/>
+            </a:endParaRPr>
+          </a:p>
+          <a:p>
+            <a:pPr>
+              <a:lnSpc>
+                <a:spcPct val="150000"/>
+              </a:lnSpc>
+              <a:buNone/>
+            </a:pPr>
+            <a:endParaRPr kumimoji="0" lang="az-Latn-AZ" altLang="en-US" sz="1300" b="0" i="0" u="none" strike="noStrike" cap="none" normalizeH="0" baseline="0">
+              <a:ln>
+                <a:noFill/>
+              </a:ln>
+              <a:solidFill>
+                <a:schemeClr val="tx1"/>
+              </a:solidFill>
+              <a:effectLst/>
+              <a:latin typeface="Arial" panose="020B0604020202020204" pitchFamily="34" charset="0"/>
+            </a:endParaRPr>
+          </a:p>
+          <a:p>
+            <a:pPr>
+              <a:lnSpc>
+                <a:spcPct val="150000"/>
+              </a:lnSpc>
+              <a:buNone/>
+            </a:pPr>
+            <a:r>
+              <a:rPr lang="en-US" altLang="en-US" sz="1300" b="1">
+                <a:latin typeface="Arial" panose="020B0604020202020204" pitchFamily="34" charset="0"/>
+              </a:rPr>
+              <a:t>Birləşdirmə</a:t>
+            </a:r>
+            <a:r>
+              <a:rPr lang="en-US" altLang="en-US" sz="1300">
+                <a:latin typeface="Arial" panose="020B0604020202020204" pitchFamily="34" charset="0"/>
+              </a:rPr>
+              <a:t>:</a:t>
+            </a:r>
+            <a:r>
+              <a:rPr lang="az-Latn-AZ" altLang="en-US" sz="1300">
+                <a:latin typeface="Arial" panose="020B0604020202020204" pitchFamily="34" charset="0"/>
+              </a:rPr>
+              <a:t> Ehtimal varki bu `</a:t>
+            </a:r>
+            <a:r>
+              <a:rPr lang="az-Latn-AZ" altLang="en-US" sz="1300" b="1">
+                <a:latin typeface="Arial" panose="020B0604020202020204" pitchFamily="34" charset="0"/>
+              </a:rPr>
+              <a:t>img</a:t>
+            </a:r>
+            <a:r>
+              <a:rPr lang="az-Latn-AZ" altLang="en-US" sz="1300">
+                <a:latin typeface="Arial" panose="020B0604020202020204" pitchFamily="34" charset="0"/>
+              </a:rPr>
+              <a:t>` olan hissə fərqli ancaq `</a:t>
+            </a:r>
+            <a:r>
+              <a:rPr lang="az-Latn-AZ" altLang="en-US" sz="1300" b="1">
+                <a:latin typeface="Arial" panose="020B0604020202020204" pitchFamily="34" charset="0"/>
+              </a:rPr>
+              <a:t>_banner</a:t>
+            </a:r>
+            <a:r>
+              <a:rPr lang="az-Latn-AZ" altLang="en-US" sz="1300">
+                <a:latin typeface="Arial" panose="020B0604020202020204" pitchFamily="34" charset="0"/>
+              </a:rPr>
+              <a:t>` olan hissə eyni qalsın. Belə olan hallarda, </a:t>
+            </a:r>
+            <a:r>
+              <a:rPr lang="az-Latn-AZ" altLang="en-US" sz="1300">
+                <a:latin typeface="Arial" panose="020B0604020202020204" pitchFamily="34" charset="0"/>
+                <a:cs typeface="Arial" panose="020B0604020202020204" pitchFamily="34" charset="0"/>
+              </a:rPr>
+              <a:t>"</a:t>
+            </a:r>
+            <a:r>
+              <a:rPr lang="az-Latn-AZ" altLang="en-US" sz="1300" b="1">
+                <a:solidFill>
+                  <a:srgbClr val="0070C0"/>
+                </a:solidFill>
+                <a:latin typeface="Arial" panose="020B0604020202020204" pitchFamily="34" charset="0"/>
+                <a:cs typeface="Arial" panose="020B0604020202020204" pitchFamily="34" charset="0"/>
+              </a:rPr>
+              <a:t>dinamik property əldə edilməsi</a:t>
+            </a:r>
+            <a:r>
+              <a:rPr lang="az-Latn-AZ" altLang="en-US" sz="1300">
+                <a:latin typeface="Arial" panose="020B0604020202020204" pitchFamily="34" charset="0"/>
+                <a:cs typeface="Arial" panose="020B0604020202020204" pitchFamily="34" charset="0"/>
+              </a:rPr>
+              <a:t>" sintaksisindən istifadə etmək məsləhətdir.</a:t>
+            </a:r>
+          </a:p>
+          <a:p>
+            <a:pPr marL="285750" indent="-285750">
+              <a:lnSpc>
+                <a:spcPct val="150000"/>
+              </a:lnSpc>
+              <a:buFont typeface="Wingdings" panose="05000000000000000000" pitchFamily="2" charset="2"/>
+              <a:buChar char="q"/>
+            </a:pPr>
+            <a:r>
+              <a:rPr kumimoji="0" lang="az-Latn-AZ" altLang="en-US" sz="1300" b="0" i="0" u="none" strike="noStrike" cap="none" normalizeH="0" baseline="0">
+                <a:ln>
+                  <a:noFill/>
+                </a:ln>
+                <a:solidFill>
+                  <a:schemeClr val="tx1"/>
+                </a:solidFill>
+                <a:effectLst/>
+                <a:latin typeface="Arial" panose="020B0604020202020204" pitchFamily="34" charset="0"/>
+                <a:cs typeface="Arial" panose="020B0604020202020204" pitchFamily="34" charset="0"/>
+              </a:rPr>
+              <a:t>img_banner</a:t>
+            </a:r>
+          </a:p>
+          <a:p>
+            <a:pPr marL="285750" indent="-285750">
+              <a:lnSpc>
+                <a:spcPct val="150000"/>
+              </a:lnSpc>
+              <a:buFont typeface="Wingdings" panose="05000000000000000000" pitchFamily="2" charset="2"/>
+              <a:buChar char="q"/>
+            </a:pPr>
+            <a:r>
+              <a:rPr lang="az-Latn-AZ" altLang="en-US" sz="1300">
+                <a:latin typeface="Arial" panose="020B0604020202020204" pitchFamily="34" charset="0"/>
+                <a:cs typeface="Arial" panose="020B0604020202020204" pitchFamily="34" charset="0"/>
+              </a:rPr>
+              <a:t>slider_banner</a:t>
+            </a:r>
+          </a:p>
+          <a:p>
+            <a:pPr marL="285750" indent="-285750">
+              <a:lnSpc>
+                <a:spcPct val="150000"/>
+              </a:lnSpc>
+              <a:buFont typeface="Wingdings" panose="05000000000000000000" pitchFamily="2" charset="2"/>
+              <a:buChar char="q"/>
+            </a:pPr>
+            <a:r>
+              <a:rPr kumimoji="0" lang="az-Latn-AZ" altLang="en-US" sz="1300" b="0" i="0" u="none" strike="noStrike" cap="none" normalizeH="0" baseline="0">
+                <a:ln>
+                  <a:noFill/>
+                </a:ln>
+                <a:solidFill>
+                  <a:schemeClr val="tx1"/>
+                </a:solidFill>
+                <a:effectLst/>
+                <a:latin typeface="Arial" panose="020B0604020202020204" pitchFamily="34" charset="0"/>
+                <a:cs typeface="Arial" panose="020B0604020202020204" pitchFamily="34" charset="0"/>
+              </a:rPr>
+              <a:t>foote</a:t>
+            </a:r>
+            <a:r>
+              <a:rPr lang="az-Latn-AZ" altLang="en-US" sz="1300">
+                <a:latin typeface="Arial" panose="020B0604020202020204" pitchFamily="34" charset="0"/>
+                <a:cs typeface="Arial" panose="020B0604020202020204" pitchFamily="34" charset="0"/>
+              </a:rPr>
+              <a:t>r_banner və.s</a:t>
+            </a:r>
+          </a:p>
+          <a:p>
+            <a:pPr>
+              <a:lnSpc>
+                <a:spcPct val="150000"/>
+              </a:lnSpc>
+              <a:buNone/>
+            </a:pPr>
+            <a:endParaRPr kumimoji="0" lang="az-Latn-AZ" altLang="en-US" sz="1300" b="0" i="0" u="none" strike="noStrike" cap="none" normalizeH="0" baseline="0">
+              <a:ln>
+                <a:noFill/>
+              </a:ln>
+              <a:solidFill>
+                <a:schemeClr val="tx1"/>
+              </a:solidFill>
+              <a:effectLst/>
+              <a:latin typeface="Arial" panose="020B0604020202020204" pitchFamily="34" charset="0"/>
+              <a:cs typeface="Arial" panose="020B0604020202020204" pitchFamily="34" charset="0"/>
+            </a:endParaRPr>
+          </a:p>
+          <a:p>
+            <a:pPr>
+              <a:lnSpc>
+                <a:spcPct val="150000"/>
+              </a:lnSpc>
+              <a:buNone/>
+            </a:pPr>
+            <a:endParaRPr lang="az-Latn-AZ" altLang="en-US" sz="1300">
+              <a:latin typeface="Arial" panose="020B0604020202020204" pitchFamily="34" charset="0"/>
+              <a:cs typeface="Arial" panose="020B0604020202020204" pitchFamily="34" charset="0"/>
+            </a:endParaRPr>
+          </a:p>
+          <a:p>
+            <a:pPr>
+              <a:lnSpc>
+                <a:spcPct val="150000"/>
+              </a:lnSpc>
+              <a:buNone/>
+            </a:pPr>
+            <a:endParaRPr kumimoji="0" lang="az-Latn-AZ" altLang="en-US" sz="1300" b="0" i="0" u="none" strike="noStrike" cap="none" normalizeH="0" baseline="0">
+              <a:ln>
+                <a:noFill/>
+              </a:ln>
+              <a:solidFill>
+                <a:schemeClr val="tx1"/>
+              </a:solidFill>
+              <a:effectLst/>
+              <a:latin typeface="Arial" panose="020B0604020202020204" pitchFamily="34" charset="0"/>
+              <a:cs typeface="Arial" panose="020B0604020202020204" pitchFamily="34" charset="0"/>
+            </a:endParaRPr>
+          </a:p>
+          <a:p>
+            <a:pPr>
+              <a:lnSpc>
+                <a:spcPct val="150000"/>
+              </a:lnSpc>
+              <a:buNone/>
+            </a:pPr>
+            <a:endParaRPr lang="az-Latn-AZ" altLang="en-US" sz="1300">
+              <a:latin typeface="Arial" panose="020B0604020202020204" pitchFamily="34" charset="0"/>
+              <a:cs typeface="Arial" panose="020B0604020202020204" pitchFamily="34" charset="0"/>
+            </a:endParaRPr>
+          </a:p>
+          <a:p>
+            <a:pPr>
+              <a:lnSpc>
+                <a:spcPct val="150000"/>
+              </a:lnSpc>
+              <a:buNone/>
+            </a:pPr>
+            <a:endParaRPr kumimoji="0" lang="az-Latn-AZ" altLang="en-US" sz="1300" b="0" i="0" u="none" strike="noStrike" cap="none" normalizeH="0" baseline="0">
+              <a:ln>
+                <a:noFill/>
+              </a:ln>
+              <a:solidFill>
+                <a:schemeClr val="tx1"/>
+              </a:solidFill>
+              <a:effectLst/>
+              <a:latin typeface="Arial" panose="020B0604020202020204" pitchFamily="34" charset="0"/>
+            </a:endParaRPr>
+          </a:p>
+          <a:p>
+            <a:pPr>
+              <a:lnSpc>
+                <a:spcPct val="150000"/>
+              </a:lnSpc>
+              <a:buNone/>
+            </a:pPr>
+            <a:r>
+              <a:rPr lang="en-US" altLang="en-US" sz="1300" b="1">
+                <a:latin typeface="Arial" panose="020B0604020202020204" pitchFamily="34" charset="0"/>
+              </a:rPr>
+              <a:t>Tövsiyə</a:t>
+            </a:r>
+            <a:r>
+              <a:rPr lang="az-Latn-AZ" altLang="en-US" sz="1300" b="1">
+                <a:latin typeface="Arial" panose="020B0604020202020204" pitchFamily="34" charset="0"/>
+              </a:rPr>
+              <a:t> - </a:t>
+            </a:r>
+            <a:r>
+              <a:rPr lang="en-US" altLang="en-US" sz="1300" b="1">
+                <a:latin typeface="Arial" panose="020B0604020202020204" pitchFamily="34" charset="0"/>
+              </a:rPr>
+              <a:t>Laravel və professional PHP developer-lar həmişə </a:t>
+            </a:r>
+            <a:r>
+              <a:rPr lang="en-US" altLang="en-US" sz="1300" b="1">
+                <a:solidFill>
+                  <a:srgbClr val="FF0000"/>
+                </a:solidFill>
+                <a:latin typeface="Arial" panose="020B0604020202020204" pitchFamily="34" charset="0"/>
+              </a:rPr>
+              <a:t>{}</a:t>
+            </a:r>
+            <a:r>
+              <a:rPr lang="en-US" altLang="en-US" sz="1300" b="1">
+                <a:latin typeface="Arial" panose="020B0604020202020204" pitchFamily="34" charset="0"/>
+              </a:rPr>
+              <a:t> istifadə edirlər, çünki</a:t>
+            </a:r>
+            <a:r>
+              <a:rPr lang="en-US" altLang="en-US" sz="1300">
+                <a:latin typeface="Arial" panose="020B0604020202020204" pitchFamily="34" charset="0"/>
+              </a:rPr>
+              <a:t>:</a:t>
+            </a:r>
+          </a:p>
+          <a:p>
+            <a:pPr marL="285750" indent="-285750">
+              <a:lnSpc>
+                <a:spcPct val="150000"/>
+              </a:lnSpc>
+              <a:buFont typeface="Wingdings" panose="05000000000000000000" pitchFamily="2" charset="2"/>
+              <a:buChar char="q"/>
+            </a:pPr>
+            <a:r>
+              <a:rPr lang="en-US" altLang="en-US" sz="1300">
+                <a:latin typeface="Arial" panose="020B0604020202020204" pitchFamily="34" charset="0"/>
+              </a:rPr>
+              <a:t>Daha təhlükəsizdir</a:t>
+            </a:r>
+          </a:p>
+          <a:p>
+            <a:pPr marL="285750" indent="-285750">
+              <a:lnSpc>
+                <a:spcPct val="150000"/>
+              </a:lnSpc>
+              <a:buFont typeface="Wingdings" panose="05000000000000000000" pitchFamily="2" charset="2"/>
+              <a:buChar char="q"/>
+            </a:pPr>
+            <a:r>
+              <a:rPr lang="en-US" altLang="en-US" sz="1300">
+                <a:latin typeface="Arial" panose="020B0604020202020204" pitchFamily="34" charset="0"/>
+              </a:rPr>
+              <a:t>Daha çevikdir</a:t>
+            </a:r>
+          </a:p>
+          <a:p>
+            <a:pPr marL="285750" indent="-285750">
+              <a:lnSpc>
+                <a:spcPct val="150000"/>
+              </a:lnSpc>
+              <a:buFont typeface="Wingdings" panose="05000000000000000000" pitchFamily="2" charset="2"/>
+              <a:buChar char="q"/>
+            </a:pPr>
+            <a:r>
+              <a:rPr lang="en-US" altLang="en-US" sz="1300">
+                <a:latin typeface="Arial" panose="020B0604020202020204" pitchFamily="34" charset="0"/>
+              </a:rPr>
+              <a:t>Gələcəkdə kodun dəyişəcəyi hallara hazırdır</a:t>
+            </a:r>
+          </a:p>
+          <a:p>
+            <a:pPr marL="285750" indent="-285750">
+              <a:lnSpc>
+                <a:spcPct val="150000"/>
+              </a:lnSpc>
+              <a:buFont typeface="Wingdings" panose="05000000000000000000" pitchFamily="2" charset="2"/>
+              <a:buChar char="q"/>
+            </a:pPr>
+            <a:r>
+              <a:rPr lang="en-US" altLang="en-US" sz="1300">
+                <a:latin typeface="Arial" panose="020B0604020202020204" pitchFamily="34" charset="0"/>
+              </a:rPr>
+              <a:t>IDE-lər və static analyzer-lər tərəfindən daha dəqiq analiz olunur</a:t>
+            </a:r>
+            <a:endParaRPr kumimoji="0" lang="en-US" altLang="en-US" sz="1300" b="0" i="0" u="none" strike="noStrike" cap="none" normalizeH="0" baseline="0">
+              <a:ln>
+                <a:noFill/>
+              </a:ln>
+              <a:solidFill>
+                <a:schemeClr val="tx1"/>
+              </a:solidFill>
+              <a:effectLst/>
+              <a:latin typeface="Arial" panose="020B0604020202020204" pitchFamily="34" charset="0"/>
+            </a:endParaRPr>
+          </a:p>
+        </p:txBody>
+      </p:sp>
+      <p:pic>
+        <p:nvPicPr>
+          <p:cNvPr id="4" name="Picture 3">
+            <a:extLst>
+              <a:ext uri="{FF2B5EF4-FFF2-40B4-BE49-F238E27FC236}">
+                <a16:creationId xmlns:a16="http://schemas.microsoft.com/office/drawing/2014/main" id="{53FA0BC1-1021-B3AA-FF7E-CFD2CB31B810}"/>
+              </a:ext>
+            </a:extLst>
+          </p:cNvPr>
+          <p:cNvPicPr>
+            <a:picLocks noChangeAspect="1"/>
+          </p:cNvPicPr>
+          <p:nvPr/>
+        </p:nvPicPr>
+        <p:blipFill>
+          <a:blip r:embed="rId2"/>
+          <a:stretch>
+            <a:fillRect/>
+          </a:stretch>
+        </p:blipFill>
+        <p:spPr>
+          <a:xfrm>
+            <a:off x="217714" y="757329"/>
+            <a:ext cx="3924848" cy="762106"/>
+          </a:xfrm>
+          <a:prstGeom prst="rect">
+            <a:avLst/>
+          </a:prstGeom>
+        </p:spPr>
+      </p:pic>
+      <p:pic>
+        <p:nvPicPr>
+          <p:cNvPr id="6" name="Picture 5">
+            <a:extLst>
+              <a:ext uri="{FF2B5EF4-FFF2-40B4-BE49-F238E27FC236}">
+                <a16:creationId xmlns:a16="http://schemas.microsoft.com/office/drawing/2014/main" id="{A880BF03-8ECA-DD82-753D-C22FA71676BF}"/>
+              </a:ext>
+            </a:extLst>
+          </p:cNvPr>
+          <p:cNvPicPr>
+            <a:picLocks noChangeAspect="1"/>
+          </p:cNvPicPr>
+          <p:nvPr/>
+        </p:nvPicPr>
+        <p:blipFill>
+          <a:blip r:embed="rId3"/>
+          <a:stretch>
+            <a:fillRect/>
+          </a:stretch>
+        </p:blipFill>
+        <p:spPr>
+          <a:xfrm>
+            <a:off x="217714" y="3690705"/>
+            <a:ext cx="4248743" cy="847843"/>
+          </a:xfrm>
+          <a:prstGeom prst="rect">
+            <a:avLst/>
+          </a:prstGeom>
+        </p:spPr>
+      </p:pic>
+    </p:spTree>
+    <p:extLst>
+      <p:ext uri="{BB962C8B-B14F-4D97-AF65-F5344CB8AC3E}">
+        <p14:creationId xmlns:p14="http://schemas.microsoft.com/office/powerpoint/2010/main" val="4203750426"/>
+      </p:ext>
+    </p:extLst>
+  </p:cSld>
+  <p:clrMapOvr>
+    <a:masterClrMapping/>
+  </p:clrMapOvr>
+</p:sld>
+</file>
+
+<file path=ppt/slides/slide6.xml><?xml version="1.0" encoding="utf-8"?>
+<p:sld xmlns:a="http://schemas.openxmlformats.org/drawingml/2006/main" xmlns:r="http://schemas.openxmlformats.org/officeDocument/2006/relationships" xmlns:p="http://schemas.openxmlformats.org/presentationml/2006/main">
+  <p:cSld>
+    <p:spTree>
+      <p:nvGrpSpPr>
+        <p:cNvPr id="1" name="">
+          <a:extLst>
+            <a:ext uri="{FF2B5EF4-FFF2-40B4-BE49-F238E27FC236}">
+              <a16:creationId xmlns:a16="http://schemas.microsoft.com/office/drawing/2014/main" id="{49793D78-B525-2833-BF99-B5997F521A94}"/>
+            </a:ext>
+          </a:extLst>
+        </p:cNvPr>
+        <p:cNvGrpSpPr/>
+        <p:nvPr/>
+      </p:nvGrpSpPr>
+      <p:grpSpPr>
+        <a:xfrm>
+          <a:off x="0" y="0"/>
+          <a:ext cx="0" cy="0"/>
+          <a:chOff x="0" y="0"/>
+          <a:chExt cx="0" cy="0"/>
+        </a:xfrm>
+      </p:grpSpPr>
+      <p:sp>
+        <p:nvSpPr>
+          <p:cNvPr id="3" name="TextBox 2">
+            <a:extLst>
+              <a:ext uri="{FF2B5EF4-FFF2-40B4-BE49-F238E27FC236}">
+                <a16:creationId xmlns:a16="http://schemas.microsoft.com/office/drawing/2014/main" id="{2DF6B4FC-4756-95C9-6F95-B2E78121580F}"/>
               </a:ext>
             </a:extLst>
           </p:cNvPr>
@@ -3541,7 +8497,879 @@
               <a:buNone/>
             </a:pPr>
             <a:r>
-              <a:rPr kumimoji="0" lang="en-US" altLang="en-US" sz="1300" b="0" i="0" u="none" strike="noStrike" cap="none" normalizeH="0" baseline="0">
+              <a:rPr lang="en-US" altLang="en-US" sz="1300">
+                <a:latin typeface="Arial" panose="020B0604020202020204" pitchFamily="34" charset="0"/>
+              </a:rPr>
+              <a:t>N</a:t>
+            </a:r>
+            <a:r>
+              <a:rPr lang="az-Latn-AZ" altLang="en-US" sz="1300">
+                <a:latin typeface="Arial" panose="020B0604020202020204" pitchFamily="34" charset="0"/>
+              </a:rPr>
+              <a:t>əticə.</a:t>
+            </a:r>
+            <a:endParaRPr kumimoji="0" lang="en-US" altLang="en-US" sz="1300" b="0" i="0" u="none" strike="noStrike" cap="none" normalizeH="0" baseline="0">
+              <a:ln>
+                <a:noFill/>
+              </a:ln>
+              <a:solidFill>
+                <a:schemeClr val="tx1"/>
+              </a:solidFill>
+              <a:effectLst/>
+              <a:latin typeface="Arial" panose="020B0604020202020204" pitchFamily="34" charset="0"/>
+            </a:endParaRPr>
+          </a:p>
+        </p:txBody>
+      </p:sp>
+      <p:pic>
+        <p:nvPicPr>
+          <p:cNvPr id="4" name="Picture 3">
+            <a:extLst>
+              <a:ext uri="{FF2B5EF4-FFF2-40B4-BE49-F238E27FC236}">
+                <a16:creationId xmlns:a16="http://schemas.microsoft.com/office/drawing/2014/main" id="{07E0D719-57CE-E0F4-1475-A6D9A76B4489}"/>
+              </a:ext>
+            </a:extLst>
+          </p:cNvPr>
+          <p:cNvPicPr>
+            <a:picLocks noChangeAspect="1"/>
+          </p:cNvPicPr>
+          <p:nvPr/>
+        </p:nvPicPr>
+        <p:blipFill>
+          <a:blip r:embed="rId2"/>
+          <a:srcRect b="36903"/>
+          <a:stretch>
+            <a:fillRect/>
+          </a:stretch>
+        </p:blipFill>
+        <p:spPr>
+          <a:xfrm>
+            <a:off x="0" y="4822185"/>
+            <a:ext cx="12192000" cy="2035815"/>
+          </a:xfrm>
+          <a:prstGeom prst="rect">
+            <a:avLst/>
+          </a:prstGeom>
+          <a:ln w="38100" cap="sq">
+            <a:solidFill>
+              <a:srgbClr val="000000"/>
+            </a:solidFill>
+            <a:prstDash val="solid"/>
+            <a:miter lim="800000"/>
+          </a:ln>
+          <a:effectLst>
+            <a:outerShdw blurRad="50800" dist="38100" dir="2700000" algn="tl" rotWithShape="0">
+              <a:srgbClr val="000000">
+                <a:alpha val="43000"/>
+              </a:srgbClr>
+            </a:outerShdw>
+          </a:effectLst>
+        </p:spPr>
+      </p:pic>
+    </p:spTree>
+    <p:extLst>
+      <p:ext uri="{BB962C8B-B14F-4D97-AF65-F5344CB8AC3E}">
+        <p14:creationId xmlns:p14="http://schemas.microsoft.com/office/powerpoint/2010/main" val="4215566038"/>
+      </p:ext>
+    </p:extLst>
+  </p:cSld>
+  <p:clrMapOvr>
+    <a:masterClrMapping/>
+  </p:clrMapOvr>
+</p:sld>
+</file>
+
+<file path=ppt/slides/slide7.xml><?xml version="1.0" encoding="utf-8"?>
+<p:sld xmlns:a="http://schemas.openxmlformats.org/drawingml/2006/main" xmlns:r="http://schemas.openxmlformats.org/officeDocument/2006/relationships" xmlns:p="http://schemas.openxmlformats.org/presentationml/2006/main">
+  <p:cSld>
+    <p:spTree>
+      <p:nvGrpSpPr>
+        <p:cNvPr id="1" name="">
+          <a:extLst>
+            <a:ext uri="{FF2B5EF4-FFF2-40B4-BE49-F238E27FC236}">
+              <a16:creationId xmlns:a16="http://schemas.microsoft.com/office/drawing/2014/main" id="{5EACD149-7859-80B5-2F41-2CE7FFA4CE96}"/>
+            </a:ext>
+          </a:extLst>
+        </p:cNvPr>
+        <p:cNvGrpSpPr/>
+        <p:nvPr/>
+      </p:nvGrpSpPr>
+      <p:grpSpPr>
+        <a:xfrm>
+          <a:off x="0" y="0"/>
+          <a:ext cx="0" cy="0"/>
+          <a:chOff x="0" y="0"/>
+          <a:chExt cx="0" cy="0"/>
+        </a:xfrm>
+      </p:grpSpPr>
+      <p:sp>
+        <p:nvSpPr>
+          <p:cNvPr id="3" name="TextBox 2">
+            <a:extLst>
+              <a:ext uri="{FF2B5EF4-FFF2-40B4-BE49-F238E27FC236}">
+                <a16:creationId xmlns:a16="http://schemas.microsoft.com/office/drawing/2014/main" id="{58637005-B782-64D7-2DCA-3583B7B8B77D}"/>
+              </a:ext>
+            </a:extLst>
+          </p:cNvPr>
+          <p:cNvSpPr txBox="1"/>
+          <p:nvPr/>
+        </p:nvSpPr>
+        <p:spPr>
+          <a:xfrm>
+            <a:off x="217714" y="255046"/>
+            <a:ext cx="11756571" cy="6287747"/>
+          </a:xfrm>
+          <a:prstGeom prst="rect">
+            <a:avLst/>
+          </a:prstGeom>
+          <a:noFill/>
+        </p:spPr>
+        <p:txBody>
+          <a:bodyPr wrap="square">
+            <a:spAutoFit/>
+          </a:bodyPr>
+          <a:lstStyle/>
+          <a:p>
+            <a:pPr>
+              <a:lnSpc>
+                <a:spcPct val="150000"/>
+              </a:lnSpc>
+              <a:buNone/>
+            </a:pPr>
+            <a:r>
+              <a:rPr lang="az-Latn-AZ" altLang="en-US" sz="1300">
+                <a:latin typeface="Arial" panose="020B0604020202020204" pitchFamily="34" charset="0"/>
+              </a:rPr>
+              <a:t>Kodu bir balaca dəyişdiririk.</a:t>
+            </a:r>
+          </a:p>
+          <a:p>
+            <a:pPr>
+              <a:lnSpc>
+                <a:spcPct val="150000"/>
+              </a:lnSpc>
+              <a:buNone/>
+            </a:pPr>
+            <a:endParaRPr lang="az-Latn-AZ" altLang="en-US" sz="1300">
+              <a:latin typeface="Arial" panose="020B0604020202020204" pitchFamily="34" charset="0"/>
+            </a:endParaRPr>
+          </a:p>
+          <a:p>
+            <a:pPr>
+              <a:lnSpc>
+                <a:spcPct val="150000"/>
+              </a:lnSpc>
+              <a:buNone/>
+            </a:pPr>
+            <a:r>
+              <a:rPr lang="az-Latn-AZ" altLang="en-US" b="1">
+                <a:latin typeface="Arial" panose="020B0604020202020204" pitchFamily="34" charset="0"/>
+              </a:rPr>
+              <a:t>Kod 1 – Yeni yazdığımız</a:t>
+            </a:r>
+            <a:r>
+              <a:rPr lang="az-Latn-AZ" altLang="en-US" sz="1300">
+                <a:latin typeface="Arial" panose="020B0604020202020204" pitchFamily="34" charset="0"/>
+              </a:rPr>
+              <a:t>:</a:t>
+            </a:r>
+          </a:p>
+          <a:p>
+            <a:pPr>
+              <a:lnSpc>
+                <a:spcPct val="150000"/>
+              </a:lnSpc>
+              <a:buNone/>
+            </a:pPr>
+            <a:endParaRPr lang="az-Latn-AZ" altLang="en-US" sz="1300">
+              <a:latin typeface="Arial" panose="020B0604020202020204" pitchFamily="34" charset="0"/>
+            </a:endParaRPr>
+          </a:p>
+          <a:p>
+            <a:pPr>
+              <a:lnSpc>
+                <a:spcPct val="150000"/>
+              </a:lnSpc>
+              <a:buNone/>
+            </a:pPr>
+            <a:endParaRPr kumimoji="0" lang="az-Latn-AZ" altLang="en-US" sz="1300" b="0" i="0" u="none" strike="noStrike" cap="none" normalizeH="0" baseline="0">
+              <a:ln>
+                <a:noFill/>
+              </a:ln>
+              <a:solidFill>
+                <a:schemeClr val="tx1"/>
+              </a:solidFill>
+              <a:effectLst/>
+              <a:latin typeface="Arial" panose="020B0604020202020204" pitchFamily="34" charset="0"/>
+            </a:endParaRPr>
+          </a:p>
+          <a:p>
+            <a:pPr>
+              <a:lnSpc>
+                <a:spcPct val="150000"/>
+              </a:lnSpc>
+              <a:buNone/>
+            </a:pPr>
+            <a:endParaRPr kumimoji="0" lang="az-Latn-AZ" altLang="en-US" sz="1300" b="0" i="0" u="none" strike="noStrike" cap="none" normalizeH="0" baseline="0">
+              <a:ln>
+                <a:noFill/>
+              </a:ln>
+              <a:solidFill>
+                <a:schemeClr val="tx1"/>
+              </a:solidFill>
+              <a:effectLst/>
+              <a:latin typeface="Arial" panose="020B0604020202020204" pitchFamily="34" charset="0"/>
+            </a:endParaRPr>
+          </a:p>
+          <a:p>
+            <a:pPr>
+              <a:lnSpc>
+                <a:spcPct val="150000"/>
+              </a:lnSpc>
+              <a:buNone/>
+            </a:pPr>
+            <a:r>
+              <a:rPr lang="en-US" altLang="en-US" sz="1300" b="1">
+                <a:latin typeface="Arial" panose="020B0604020202020204" pitchFamily="34" charset="0"/>
+              </a:rPr>
+              <a:t>Üstünlüklər</a:t>
+            </a:r>
+            <a:r>
+              <a:rPr lang="en-US" altLang="en-US" sz="1300">
+                <a:latin typeface="Arial" panose="020B0604020202020204" pitchFamily="34" charset="0"/>
+              </a:rPr>
+              <a:t>:</a:t>
+            </a:r>
+          </a:p>
+          <a:p>
+            <a:pPr marL="285750" indent="-285750">
+              <a:lnSpc>
+                <a:spcPct val="150000"/>
+              </a:lnSpc>
+              <a:buFont typeface="Wingdings" panose="05000000000000000000" pitchFamily="2" charset="2"/>
+              <a:buChar char="q"/>
+            </a:pPr>
+            <a:r>
+              <a:rPr lang="en-US" altLang="en-US" sz="1300" b="1">
+                <a:latin typeface="Arial" panose="020B0604020202020204" pitchFamily="34" charset="0"/>
+              </a:rPr>
+              <a:t>uniqid() </a:t>
+            </a:r>
+            <a:r>
+              <a:rPr lang="en-US" altLang="en-US" sz="1300">
+                <a:latin typeface="Arial" panose="020B0604020202020204" pitchFamily="34" charset="0"/>
+              </a:rPr>
+              <a:t>– çox daha </a:t>
+            </a:r>
+            <a:r>
+              <a:rPr lang="en-US" altLang="en-US" sz="1300" b="1">
+                <a:latin typeface="Arial" panose="020B0604020202020204" pitchFamily="34" charset="0"/>
+              </a:rPr>
+              <a:t>sabit</a:t>
+            </a:r>
+            <a:r>
+              <a:rPr lang="en-US" altLang="en-US" sz="1300">
+                <a:latin typeface="Arial" panose="020B0604020202020204" pitchFamily="34" charset="0"/>
+              </a:rPr>
+              <a:t> və </a:t>
+            </a:r>
+            <a:r>
+              <a:rPr lang="en-US" altLang="en-US" sz="1300" b="1">
+                <a:latin typeface="Arial" panose="020B0604020202020204" pitchFamily="34" charset="0"/>
+              </a:rPr>
+              <a:t>unikal string </a:t>
+            </a:r>
+            <a:r>
+              <a:rPr lang="en-US" altLang="en-US" sz="1300">
+                <a:latin typeface="Arial" panose="020B0604020202020204" pitchFamily="34" charset="0"/>
+              </a:rPr>
+              <a:t>verir. Hər dəfə fərqli və sistem saatına əsaslanan string qaytarır.</a:t>
+            </a:r>
+          </a:p>
+          <a:p>
+            <a:pPr marL="285750" indent="-285750">
+              <a:lnSpc>
+                <a:spcPct val="150000"/>
+              </a:lnSpc>
+              <a:buFont typeface="Wingdings" panose="05000000000000000000" pitchFamily="2" charset="2"/>
+              <a:buChar char="q"/>
+            </a:pPr>
+            <a:r>
+              <a:rPr lang="en-US" altLang="en-US" sz="1300" b="1">
+                <a:latin typeface="Arial" panose="020B0604020202020204" pitchFamily="34" charset="0"/>
+              </a:rPr>
+              <a:t>getClientOriginalExtension() </a:t>
+            </a:r>
+            <a:r>
+              <a:rPr lang="en-US" altLang="en-US" sz="1300">
+                <a:latin typeface="Arial" panose="020B0604020202020204" pitchFamily="34" charset="0"/>
+              </a:rPr>
+              <a:t>– sadəcə </a:t>
+            </a:r>
+            <a:r>
+              <a:rPr lang="en-US" altLang="en-US" sz="1300" b="1">
+                <a:latin typeface="Arial" panose="020B0604020202020204" pitchFamily="34" charset="0"/>
+              </a:rPr>
+              <a:t>.jpg</a:t>
+            </a:r>
+            <a:r>
+              <a:rPr lang="en-US" altLang="en-US" sz="1300">
+                <a:latin typeface="Arial" panose="020B0604020202020204" pitchFamily="34" charset="0"/>
+              </a:rPr>
+              <a:t>, </a:t>
+            </a:r>
+            <a:r>
+              <a:rPr lang="en-US" altLang="en-US" sz="1300" b="1">
+                <a:latin typeface="Arial" panose="020B0604020202020204" pitchFamily="34" charset="0"/>
+              </a:rPr>
+              <a:t>.png </a:t>
+            </a:r>
+            <a:r>
+              <a:rPr lang="en-US" altLang="en-US" sz="1300">
+                <a:latin typeface="Arial" panose="020B0604020202020204" pitchFamily="34" charset="0"/>
+              </a:rPr>
+              <a:t>və s. fayl uzantısını verir. Daha təmizdir.</a:t>
+            </a:r>
+          </a:p>
+          <a:p>
+            <a:pPr marL="285750" indent="-285750">
+              <a:lnSpc>
+                <a:spcPct val="150000"/>
+              </a:lnSpc>
+              <a:buFont typeface="Wingdings" panose="05000000000000000000" pitchFamily="2" charset="2"/>
+              <a:buChar char="q"/>
+            </a:pPr>
+            <a:r>
+              <a:rPr lang="en-US" altLang="en-US" sz="1300">
+                <a:latin typeface="Arial" panose="020B0604020202020204" pitchFamily="34" charset="0"/>
+              </a:rPr>
+              <a:t>Fayl adında </a:t>
+            </a:r>
+            <a:r>
+              <a:rPr lang="en-US" altLang="en-US" sz="1300" b="1">
+                <a:latin typeface="Arial" panose="020B0604020202020204" pitchFamily="34" charset="0"/>
+              </a:rPr>
+              <a:t>orijinal faylın adı yoxdur </a:t>
+            </a:r>
+            <a:r>
+              <a:rPr lang="en-US" altLang="en-US" sz="1300">
+                <a:latin typeface="Arial" panose="020B0604020202020204" pitchFamily="34" charset="0"/>
+              </a:rPr>
+              <a:t>→ məxfi saxlanma baxımından daha yaxşıdır.</a:t>
+            </a:r>
+          </a:p>
+          <a:p>
+            <a:pPr marL="285750" indent="-285750">
+              <a:lnSpc>
+                <a:spcPct val="150000"/>
+              </a:lnSpc>
+              <a:buFont typeface="Wingdings" panose="05000000000000000000" pitchFamily="2" charset="2"/>
+              <a:buChar char="q"/>
+            </a:pPr>
+            <a:r>
+              <a:rPr lang="en-US" altLang="en-US" sz="1300">
+                <a:latin typeface="Arial" panose="020B0604020202020204" pitchFamily="34" charset="0"/>
+              </a:rPr>
+              <a:t>Daha təhlükəsiz və peşəkar üsuldur.</a:t>
+            </a:r>
+            <a:endParaRPr lang="az-Latn-AZ" altLang="en-US" sz="1300">
+              <a:latin typeface="Arial" panose="020B0604020202020204" pitchFamily="34" charset="0"/>
+            </a:endParaRPr>
+          </a:p>
+          <a:p>
+            <a:pPr>
+              <a:lnSpc>
+                <a:spcPct val="150000"/>
+              </a:lnSpc>
+              <a:buNone/>
+            </a:pPr>
+            <a:r>
+              <a:rPr kumimoji="0" lang="az-Latn-AZ" altLang="en-US" sz="1300" b="0" i="0" u="none" strike="noStrike" cap="none" normalizeH="0" baseline="0">
+                <a:ln>
+                  <a:noFill/>
+                </a:ln>
+                <a:solidFill>
+                  <a:srgbClr val="FF0000"/>
+                </a:solidFill>
+                <a:effectLst/>
+                <a:latin typeface="Arial" panose="020B0604020202020204" pitchFamily="34" charset="0"/>
+              </a:rPr>
+              <a:t>___________________________________________________________________________________________________________________</a:t>
+            </a:r>
+          </a:p>
+          <a:p>
+            <a:pPr>
+              <a:lnSpc>
+                <a:spcPct val="150000"/>
+              </a:lnSpc>
+              <a:buNone/>
+            </a:pPr>
+            <a:r>
+              <a:rPr lang="en-US" altLang="en-US" b="1">
+                <a:latin typeface="Arial" panose="020B0604020202020204" pitchFamily="34" charset="0"/>
+              </a:rPr>
+              <a:t>Kod 2 – Köhnə yazdığı</a:t>
+            </a:r>
+            <a:r>
+              <a:rPr lang="az-Latn-AZ" altLang="en-US" b="1">
+                <a:latin typeface="Arial" panose="020B0604020202020204" pitchFamily="34" charset="0"/>
+              </a:rPr>
+              <a:t>m</a:t>
+            </a:r>
+            <a:r>
+              <a:rPr lang="en-US" altLang="en-US" b="1">
+                <a:latin typeface="Arial" panose="020B0604020202020204" pitchFamily="34" charset="0"/>
+              </a:rPr>
+              <a:t>ız</a:t>
+            </a:r>
+            <a:r>
+              <a:rPr lang="en-US" altLang="en-US" sz="1300">
+                <a:latin typeface="Arial" panose="020B0604020202020204" pitchFamily="34" charset="0"/>
+              </a:rPr>
+              <a:t>:</a:t>
+            </a:r>
+            <a:endParaRPr lang="az-Latn-AZ" altLang="en-US" sz="1300">
+              <a:latin typeface="Arial" panose="020B0604020202020204" pitchFamily="34" charset="0"/>
+            </a:endParaRPr>
+          </a:p>
+          <a:p>
+            <a:pPr>
+              <a:lnSpc>
+                <a:spcPct val="150000"/>
+              </a:lnSpc>
+              <a:buNone/>
+            </a:pPr>
+            <a:endParaRPr kumimoji="0" lang="az-Latn-AZ" altLang="en-US" sz="1300" b="0" i="0" u="none" strike="noStrike" cap="none" normalizeH="0" baseline="0">
+              <a:ln>
+                <a:noFill/>
+              </a:ln>
+              <a:solidFill>
+                <a:schemeClr val="tx1"/>
+              </a:solidFill>
+              <a:effectLst/>
+              <a:latin typeface="Arial" panose="020B0604020202020204" pitchFamily="34" charset="0"/>
+            </a:endParaRPr>
+          </a:p>
+          <a:p>
+            <a:pPr>
+              <a:lnSpc>
+                <a:spcPct val="150000"/>
+              </a:lnSpc>
+              <a:buNone/>
+            </a:pPr>
+            <a:endParaRPr lang="az-Latn-AZ" altLang="en-US" sz="1300">
+              <a:latin typeface="Arial" panose="020B0604020202020204" pitchFamily="34" charset="0"/>
+            </a:endParaRPr>
+          </a:p>
+          <a:p>
+            <a:pPr>
+              <a:lnSpc>
+                <a:spcPct val="150000"/>
+              </a:lnSpc>
+              <a:buNone/>
+            </a:pPr>
+            <a:r>
+              <a:rPr lang="az-Latn-AZ" altLang="en-US" sz="1300" b="1">
+                <a:latin typeface="Arial" panose="020B0604020202020204" pitchFamily="34" charset="0"/>
+              </a:rPr>
+              <a:t>Mənfi cəhətlər</a:t>
+            </a:r>
+            <a:r>
+              <a:rPr lang="az-Latn-AZ" altLang="en-US" sz="1300">
+                <a:latin typeface="Arial" panose="020B0604020202020204" pitchFamily="34" charset="0"/>
+              </a:rPr>
+              <a:t>:</a:t>
+            </a:r>
+          </a:p>
+          <a:p>
+            <a:pPr marL="285750" indent="-285750">
+              <a:lnSpc>
+                <a:spcPct val="150000"/>
+              </a:lnSpc>
+              <a:buFont typeface="Wingdings" panose="05000000000000000000" pitchFamily="2" charset="2"/>
+              <a:buChar char="q"/>
+            </a:pPr>
+            <a:r>
+              <a:rPr lang="az-Latn-AZ" altLang="en-US" sz="1300" b="1">
+                <a:latin typeface="Arial" panose="020B0604020202020204" pitchFamily="34" charset="0"/>
+              </a:rPr>
+              <a:t>rand() </a:t>
+            </a:r>
+            <a:r>
+              <a:rPr lang="az-Latn-AZ" altLang="en-US" sz="1300">
+                <a:latin typeface="Arial" panose="020B0604020202020204" pitchFamily="34" charset="0"/>
+              </a:rPr>
+              <a:t>– təkrarlanma riski var, çünki çox da böyük random sahə yaratmır.</a:t>
+            </a:r>
+          </a:p>
+          <a:p>
+            <a:pPr marL="285750" indent="-285750">
+              <a:lnSpc>
+                <a:spcPct val="150000"/>
+              </a:lnSpc>
+              <a:buFont typeface="Wingdings" panose="05000000000000000000" pitchFamily="2" charset="2"/>
+              <a:buChar char="q"/>
+            </a:pPr>
+            <a:r>
+              <a:rPr lang="az-Latn-AZ" altLang="en-US" sz="1300" b="1">
+                <a:latin typeface="Arial" panose="020B0604020202020204" pitchFamily="34" charset="0"/>
+              </a:rPr>
+              <a:t>getClientOriginalName() </a:t>
+            </a:r>
+            <a:r>
+              <a:rPr lang="az-Latn-AZ" altLang="en-US" sz="1300">
+                <a:latin typeface="Arial" panose="020B0604020202020204" pitchFamily="34" charset="0"/>
+              </a:rPr>
+              <a:t>– istifadəçinin göndərdiyi </a:t>
+            </a:r>
+            <a:r>
+              <a:rPr lang="az-Latn-AZ" altLang="en-US" sz="1300" b="1">
+                <a:latin typeface="Arial" panose="020B0604020202020204" pitchFamily="34" charset="0"/>
+              </a:rPr>
+              <a:t>orijinal fayl adını saxlayır</a:t>
+            </a:r>
+            <a:r>
+              <a:rPr lang="az-Latn-AZ" altLang="en-US" sz="1300">
+                <a:latin typeface="Arial" panose="020B0604020202020204" pitchFamily="34" charset="0"/>
+              </a:rPr>
+              <a:t>, məsələn: mehmet.jpg, virus.php.jpg və s.</a:t>
+            </a:r>
+          </a:p>
+          <a:p>
+            <a:pPr marL="285750" indent="-285750">
+              <a:lnSpc>
+                <a:spcPct val="150000"/>
+              </a:lnSpc>
+              <a:buFont typeface="Wingdings" panose="05000000000000000000" pitchFamily="2" charset="2"/>
+              <a:buChar char="q"/>
+            </a:pPr>
+            <a:r>
+              <a:rPr lang="az-Latn-AZ" altLang="en-US" sz="1300">
+                <a:latin typeface="Arial" panose="020B0604020202020204" pitchFamily="34" charset="0"/>
+              </a:rPr>
+              <a:t>Bu potensial olaraq security risk yaradır (xüsusilə backend-lərdə və ya image preview-lərdə).</a:t>
+            </a:r>
+          </a:p>
+          <a:p>
+            <a:pPr marL="285750" indent="-285750">
+              <a:lnSpc>
+                <a:spcPct val="150000"/>
+              </a:lnSpc>
+              <a:buFont typeface="Wingdings" panose="05000000000000000000" pitchFamily="2" charset="2"/>
+              <a:buChar char="q"/>
+            </a:pPr>
+            <a:r>
+              <a:rPr lang="az-Latn-AZ" altLang="en-US" sz="1300">
+                <a:latin typeface="Arial" panose="020B0604020202020204" pitchFamily="34" charset="0"/>
+              </a:rPr>
+              <a:t>Fayl adlarında </a:t>
+            </a:r>
+            <a:r>
+              <a:rPr lang="az-Latn-AZ" altLang="en-US" sz="1300" b="1">
+                <a:latin typeface="Arial" panose="020B0604020202020204" pitchFamily="34" charset="0"/>
+              </a:rPr>
+              <a:t>boşluq, türk/ə,ğ,ü simvolları </a:t>
+            </a:r>
+            <a:r>
+              <a:rPr lang="az-Latn-AZ" altLang="en-US" sz="1300">
+                <a:latin typeface="Arial" panose="020B0604020202020204" pitchFamily="34" charset="0"/>
+              </a:rPr>
+              <a:t>və ya təhlükəli simvollar ola bilər → serverdə problem yarada bilər.</a:t>
+            </a:r>
+            <a:endParaRPr kumimoji="0" lang="az-Latn-AZ" altLang="en-US" sz="1300" b="0" i="0" u="none" strike="noStrike" cap="none" normalizeH="0" baseline="0">
+              <a:ln>
+                <a:noFill/>
+              </a:ln>
+              <a:solidFill>
+                <a:schemeClr val="tx1"/>
+              </a:solidFill>
+              <a:effectLst/>
+              <a:latin typeface="Arial" panose="020B0604020202020204" pitchFamily="34" charset="0"/>
+            </a:endParaRPr>
+          </a:p>
+        </p:txBody>
+      </p:sp>
+      <p:pic>
+        <p:nvPicPr>
+          <p:cNvPr id="4" name="Picture 3">
+            <a:extLst>
+              <a:ext uri="{FF2B5EF4-FFF2-40B4-BE49-F238E27FC236}">
+                <a16:creationId xmlns:a16="http://schemas.microsoft.com/office/drawing/2014/main" id="{50CF39DC-2AAB-D5EA-D893-A4747D05F318}"/>
+              </a:ext>
+            </a:extLst>
+          </p:cNvPr>
+          <p:cNvPicPr>
+            <a:picLocks noChangeAspect="1"/>
+          </p:cNvPicPr>
+          <p:nvPr/>
+        </p:nvPicPr>
+        <p:blipFill>
+          <a:blip r:embed="rId2"/>
+          <a:stretch>
+            <a:fillRect/>
+          </a:stretch>
+        </p:blipFill>
+        <p:spPr>
+          <a:xfrm>
+            <a:off x="8728364" y="1"/>
+            <a:ext cx="3463636" cy="2696798"/>
+          </a:xfrm>
+          <a:prstGeom prst="rect">
+            <a:avLst/>
+          </a:prstGeom>
+        </p:spPr>
+      </p:pic>
+      <p:pic>
+        <p:nvPicPr>
+          <p:cNvPr id="6" name="Picture 5">
+            <a:extLst>
+              <a:ext uri="{FF2B5EF4-FFF2-40B4-BE49-F238E27FC236}">
+                <a16:creationId xmlns:a16="http://schemas.microsoft.com/office/drawing/2014/main" id="{60CE21B8-53F1-8749-53ED-22E0DA306FC1}"/>
+              </a:ext>
+            </a:extLst>
+          </p:cNvPr>
+          <p:cNvPicPr>
+            <a:picLocks noChangeAspect="1"/>
+          </p:cNvPicPr>
+          <p:nvPr/>
+        </p:nvPicPr>
+        <p:blipFill>
+          <a:blip r:embed="rId3"/>
+          <a:stretch>
+            <a:fillRect/>
+          </a:stretch>
+        </p:blipFill>
+        <p:spPr>
+          <a:xfrm>
+            <a:off x="217714" y="1378485"/>
+            <a:ext cx="3915321" cy="609685"/>
+          </a:xfrm>
+          <a:prstGeom prst="rect">
+            <a:avLst/>
+          </a:prstGeom>
+        </p:spPr>
+      </p:pic>
+      <p:pic>
+        <p:nvPicPr>
+          <p:cNvPr id="8" name="Picture 7">
+            <a:extLst>
+              <a:ext uri="{FF2B5EF4-FFF2-40B4-BE49-F238E27FC236}">
+                <a16:creationId xmlns:a16="http://schemas.microsoft.com/office/drawing/2014/main" id="{76E6A4B4-E9BF-4E90-8043-E715E29D43A7}"/>
+              </a:ext>
+            </a:extLst>
+          </p:cNvPr>
+          <p:cNvPicPr>
+            <a:picLocks noChangeAspect="1"/>
+          </p:cNvPicPr>
+          <p:nvPr/>
+        </p:nvPicPr>
+        <p:blipFill>
+          <a:blip r:embed="rId4"/>
+          <a:stretch>
+            <a:fillRect/>
+          </a:stretch>
+        </p:blipFill>
+        <p:spPr>
+          <a:xfrm>
+            <a:off x="217714" y="4453780"/>
+            <a:ext cx="4610743" cy="333422"/>
+          </a:xfrm>
+          <a:prstGeom prst="rect">
+            <a:avLst/>
+          </a:prstGeom>
+        </p:spPr>
+      </p:pic>
+    </p:spTree>
+    <p:extLst>
+      <p:ext uri="{BB962C8B-B14F-4D97-AF65-F5344CB8AC3E}">
+        <p14:creationId xmlns:p14="http://schemas.microsoft.com/office/powerpoint/2010/main" val="3754116470"/>
+      </p:ext>
+    </p:extLst>
+  </p:cSld>
+  <p:clrMapOvr>
+    <a:masterClrMapping/>
+  </p:clrMapOvr>
+</p:sld>
+</file>
+
+<file path=ppt/slides/slide8.xml><?xml version="1.0" encoding="utf-8"?>
+<p:sld xmlns:a="http://schemas.openxmlformats.org/drawingml/2006/main" xmlns:r="http://schemas.openxmlformats.org/officeDocument/2006/relationships" xmlns:p="http://schemas.openxmlformats.org/presentationml/2006/main">
+  <p:cSld>
+    <p:spTree>
+      <p:nvGrpSpPr>
+        <p:cNvPr id="1" name="">
+          <a:extLst>
+            <a:ext uri="{FF2B5EF4-FFF2-40B4-BE49-F238E27FC236}">
+              <a16:creationId xmlns:a16="http://schemas.microsoft.com/office/drawing/2014/main" id="{F6AEF736-438E-232A-B0BA-76813A32E436}"/>
+            </a:ext>
+          </a:extLst>
+        </p:cNvPr>
+        <p:cNvGrpSpPr/>
+        <p:nvPr/>
+      </p:nvGrpSpPr>
+      <p:grpSpPr>
+        <a:xfrm>
+          <a:off x="0" y="0"/>
+          <a:ext cx="0" cy="0"/>
+          <a:chOff x="0" y="0"/>
+          <a:chExt cx="0" cy="0"/>
+        </a:xfrm>
+      </p:grpSpPr>
+      <p:sp>
+        <p:nvSpPr>
+          <p:cNvPr id="3" name="TextBox 2">
+            <a:extLst>
+              <a:ext uri="{FF2B5EF4-FFF2-40B4-BE49-F238E27FC236}">
+                <a16:creationId xmlns:a16="http://schemas.microsoft.com/office/drawing/2014/main" id="{DBCEDF29-C8C5-DDDE-ABC5-FB61D8C124DF}"/>
+              </a:ext>
+            </a:extLst>
+          </p:cNvPr>
+          <p:cNvSpPr txBox="1"/>
+          <p:nvPr/>
+        </p:nvSpPr>
+        <p:spPr>
+          <a:xfrm>
+            <a:off x="217714" y="264282"/>
+            <a:ext cx="11756571" cy="355354"/>
+          </a:xfrm>
+          <a:prstGeom prst="rect">
+            <a:avLst/>
+          </a:prstGeom>
+          <a:noFill/>
+        </p:spPr>
+        <p:txBody>
+          <a:bodyPr wrap="square">
+            <a:spAutoFit/>
+          </a:bodyPr>
+          <a:lstStyle/>
+          <a:p>
+            <a:pPr>
+              <a:lnSpc>
+                <a:spcPct val="150000"/>
+              </a:lnSpc>
+              <a:buNone/>
+            </a:pPr>
+            <a:r>
+              <a:rPr lang="en-US" altLang="en-US" sz="1300">
+                <a:latin typeface="Arial" panose="020B0604020202020204" pitchFamily="34" charset="0"/>
+              </a:rPr>
+              <a:t>Daha da Təkmil Versiya (gələcək üçün) Əgər həm təhlükəsizlik, həm də image uzantısı yoxlaması istəsəniz:</a:t>
+            </a:r>
+            <a:endParaRPr kumimoji="0" lang="en-US" altLang="en-US" sz="1300" b="0" i="0" u="none" strike="noStrike" cap="none" normalizeH="0" baseline="0">
+              <a:ln>
+                <a:noFill/>
+              </a:ln>
+              <a:solidFill>
+                <a:schemeClr val="tx1"/>
+              </a:solidFill>
+              <a:effectLst/>
+              <a:latin typeface="Arial" panose="020B0604020202020204" pitchFamily="34" charset="0"/>
+            </a:endParaRPr>
+          </a:p>
+        </p:txBody>
+      </p:sp>
+      <p:pic>
+        <p:nvPicPr>
+          <p:cNvPr id="4" name="Picture 3">
+            <a:extLst>
+              <a:ext uri="{FF2B5EF4-FFF2-40B4-BE49-F238E27FC236}">
+                <a16:creationId xmlns:a16="http://schemas.microsoft.com/office/drawing/2014/main" id="{D29C3C4F-E05B-8549-D41C-FDD2A298142B}"/>
+              </a:ext>
+            </a:extLst>
+          </p:cNvPr>
+          <p:cNvPicPr>
+            <a:picLocks noChangeAspect="1"/>
+          </p:cNvPicPr>
+          <p:nvPr/>
+        </p:nvPicPr>
+        <p:blipFill>
+          <a:blip r:embed="rId2"/>
+          <a:stretch>
+            <a:fillRect/>
+          </a:stretch>
+        </p:blipFill>
+        <p:spPr>
+          <a:xfrm>
+            <a:off x="217714" y="725351"/>
+            <a:ext cx="4744112" cy="1952898"/>
+          </a:xfrm>
+          <a:prstGeom prst="rect">
+            <a:avLst/>
+          </a:prstGeom>
+        </p:spPr>
+      </p:pic>
+    </p:spTree>
+    <p:extLst>
+      <p:ext uri="{BB962C8B-B14F-4D97-AF65-F5344CB8AC3E}">
+        <p14:creationId xmlns:p14="http://schemas.microsoft.com/office/powerpoint/2010/main" val="3581609869"/>
+      </p:ext>
+    </p:extLst>
+  </p:cSld>
+  <p:clrMapOvr>
+    <a:masterClrMapping/>
+  </p:clrMapOvr>
+</p:sld>
+</file>
+
+<file path=ppt/slides/slide9.xml><?xml version="1.0" encoding="utf-8"?>
+<p:sld xmlns:a="http://schemas.openxmlformats.org/drawingml/2006/main" xmlns:r="http://schemas.openxmlformats.org/officeDocument/2006/relationships" xmlns:p="http://schemas.openxmlformats.org/presentationml/2006/main">
+  <p:cSld>
+    <p:spTree>
+      <p:nvGrpSpPr>
+        <p:cNvPr id="1" name="">
+          <a:extLst>
+            <a:ext uri="{FF2B5EF4-FFF2-40B4-BE49-F238E27FC236}">
+              <a16:creationId xmlns:a16="http://schemas.microsoft.com/office/drawing/2014/main" id="{27D40C33-3898-C3C9-A533-C88AFCF313EB}"/>
+            </a:ext>
+          </a:extLst>
+        </p:cNvPr>
+        <p:cNvGrpSpPr/>
+        <p:nvPr/>
+      </p:nvGrpSpPr>
+      <p:grpSpPr>
+        <a:xfrm>
+          <a:off x="0" y="0"/>
+          <a:ext cx="0" cy="0"/>
+          <a:chOff x="0" y="0"/>
+          <a:chExt cx="0" cy="0"/>
+        </a:xfrm>
+      </p:grpSpPr>
+      <p:sp>
+        <p:nvSpPr>
+          <p:cNvPr id="3" name="TextBox 2">
+            <a:extLst>
+              <a:ext uri="{FF2B5EF4-FFF2-40B4-BE49-F238E27FC236}">
+                <a16:creationId xmlns:a16="http://schemas.microsoft.com/office/drawing/2014/main" id="{2E498F7C-C399-3F7E-9AB4-92C3665772E3}"/>
+              </a:ext>
+            </a:extLst>
+          </p:cNvPr>
+          <p:cNvSpPr txBox="1"/>
+          <p:nvPr/>
+        </p:nvSpPr>
+        <p:spPr>
+          <a:xfrm>
+            <a:off x="217714" y="255046"/>
+            <a:ext cx="11756571" cy="355354"/>
+          </a:xfrm>
+          <a:prstGeom prst="rect">
+            <a:avLst/>
+          </a:prstGeom>
+          <a:noFill/>
+        </p:spPr>
+        <p:txBody>
+          <a:bodyPr wrap="square">
+            <a:spAutoFit/>
+          </a:bodyPr>
+          <a:lstStyle/>
+          <a:p>
+            <a:pPr>
+              <a:lnSpc>
+                <a:spcPct val="150000"/>
+              </a:lnSpc>
+              <a:buNone/>
+            </a:pPr>
+            <a:r>
+              <a:rPr kumimoji="0" lang="az-Latn-AZ" altLang="en-US" sz="1300" b="0" i="0" u="none" strike="noStrike" cap="none" normalizeH="0" baseline="0">
                 <a:ln>
                   <a:noFill/>
                 </a:ln>
@@ -3551,15 +9379,55 @@
                 <a:effectLst/>
                 <a:latin typeface="Arial" panose="020B0604020202020204" pitchFamily="34" charset="0"/>
               </a:rPr>
-              <a:t>.</a:t>
-            </a:r>
+              <a:t>Təkrar test edirik.</a:t>
+            </a:r>
+            <a:endParaRPr kumimoji="0" lang="en-US" altLang="en-US" sz="1300" b="0" i="0" u="none" strike="noStrike" cap="none" normalizeH="0" baseline="0">
+              <a:ln>
+                <a:noFill/>
+              </a:ln>
+              <a:solidFill>
+                <a:schemeClr val="tx1"/>
+              </a:solidFill>
+              <a:effectLst/>
+              <a:latin typeface="Arial" panose="020B0604020202020204" pitchFamily="34" charset="0"/>
+            </a:endParaRPr>
           </a:p>
         </p:txBody>
       </p:sp>
+      <p:pic>
+        <p:nvPicPr>
+          <p:cNvPr id="4" name="Picture 3">
+            <a:extLst>
+              <a:ext uri="{FF2B5EF4-FFF2-40B4-BE49-F238E27FC236}">
+                <a16:creationId xmlns:a16="http://schemas.microsoft.com/office/drawing/2014/main" id="{45355EFF-2F61-FF87-60DF-6D2C9986D932}"/>
+              </a:ext>
+            </a:extLst>
+          </p:cNvPr>
+          <p:cNvPicPr>
+            <a:picLocks noChangeAspect="1"/>
+          </p:cNvPicPr>
+          <p:nvPr/>
+        </p:nvPicPr>
+        <p:blipFill>
+          <a:blip r:embed="rId2"/>
+          <a:stretch>
+            <a:fillRect/>
+          </a:stretch>
+        </p:blipFill>
+        <p:spPr>
+          <a:xfrm>
+            <a:off x="0" y="749287"/>
+            <a:ext cx="12192000" cy="6108713"/>
+          </a:xfrm>
+          <a:prstGeom prst="rect">
+            <a:avLst/>
+          </a:prstGeom>
+        </p:spPr>
+      </p:pic>
     </p:spTree>
     <p:extLst>
       <p:ext uri="{BB962C8B-B14F-4D97-AF65-F5344CB8AC3E}">
-        <p14:creationId xmlns:p14="http://schemas.microsoft.com/office/powerpoint/2010/main" val="3095838342"/>
+        <p14:creationId xmlns:p14="http://schemas.microsoft.com/office/powerpoint/2010/main" val="1287364365"/>
       </p:ext>
     </p:extLst>
   </p:cSld>
